--- a/doc/交付/2026-10-03-答辩与商业计划书/Blocky-Studio-小学Agent创作教育-2026-10-03.pptx
+++ b/doc/交付/2026-10-03-答辩与商业计划书/Blocky-Studio-小学Agent创作教育-2026-10-03.pptx
@@ -859,7 +859,7 @@
             <a:r>
               <a:rPr lang="en-US" dirty="0"/>
               <a:t>拟讲述20秒；制作目标，非赛事硬规则。
-大家好，我们是TB快重置就队。Blocky是面向小学生的积木式Agent创作工具。我们希望孩子通过读懂、改造、搭建和调试自己的作品，理解智能体怎样工作。当前桌面工具已可运行，小学入门体验和真实学习效果仍需验证。
+大家好，我们是TB快重置就队。Blocky面向非专业用户，以小学Agent创作教育为首个切入点。我们希望孩子通过读懂、改造、搭建和调试自己的作品，理解智能体怎样工作。当前桌面工具已可运行，小学入门体验和真实学习效果仍需验证。
 </a:t>
             </a:r>
             <a:endParaRPr lang="en-US" dirty="0"/>
@@ -949,7 +949,7 @@
             <a:r>
               <a:rPr lang="en-US" dirty="0"/>
               <a:t>拟讲述35秒；制作目标，非赛事硬规则。
-技术支撑这条学习链：作品由可编辑积木表达，编译校验后进入统一运行内核；模型承担任务理解和生成，工具实际操作通过权限边界；事件关联到具体积木，项目可以保存继续修改。Blockly、Tauri和Pi是开源底座，Blocky实现自身作品语义、运行映射与受控集成。既有生成学习卡证据是真实模型请求，不能用于声称故事课程已完成，更不能承诺模型绝不出错。
+Blocky面向非专业用户，把Agent的关键行为从代码审阅转成积木审阅。搭建时读角色、任务和步骤，执行前查工具与权限，运行后用轨迹核对并修改。小学创作先练习这种理解与解释能力；后续OPC一人公司可据此审阅Agent员工的职责和流程，具体办公应用尚待验证。模型内容仍需核查，积木与轨迹不揭示模型内部推理。Blockly、Tauri、Pi提供底座，Blocky组织作品语义、运行映射和权限集成。
 </a:t>
             </a:r>
             <a:endParaRPr lang="en-US" dirty="0"/>
@@ -3158,7 +3158,7 @@
                 <a:ea typeface="Noto Sans CJK SC" pitchFamily="34" charset="-122"/>
                 <a:cs typeface="Noto Sans CJK SC" pitchFamily="34" charset="-120"/>
               </a:rPr>
-              <a:t>09 / 技术与贡献</a:t>
+              <a:t>09 / 产品价值与技术</a:t>
             </a:r>
             <a:endParaRPr lang="en-US" sz="1100" dirty="0"/>
           </a:p>
@@ -3199,7 +3199,7 @@
                 <a:ea typeface="Noto Sans CJK SC" pitchFamily="34" charset="-122"/>
                 <a:cs typeface="Noto Sans CJK SC" pitchFamily="34" charset="-120"/>
               </a:rPr>
-              <a:t>把作品结构、模型能力和运行证据连接起来</a:t>
+              <a:t>从代码审阅，到积木审阅</a:t>
             </a:r>
             <a:endParaRPr lang="en-US" sz="3000" dirty="0"/>
           </a:p>
@@ -3240,7 +3240,7 @@
                 <a:ea typeface="Noto Sans CJK SC" pitchFamily="34" charset="-122"/>
                 <a:cs typeface="Noto Sans CJK SC" pitchFamily="34" charset="-120"/>
               </a:rPr>
-              <a:t>开源底座与项目实现分别说明；模型输出仍需教师检查。</a:t>
+              <a:t>面向非专业用户：看懂 Agent 的任务、步骤与工具，用轨迹核对实际行为。</a:t>
             </a:r>
             <a:endParaRPr lang="en-US" sz="1500" dirty="0"/>
           </a:p>
@@ -3360,11 +3360,11 @@
         <p:spPr>
           <a:xfrm>
             <a:off x="594360" y="2350008"/>
-            <a:ext cx="3520440" cy="2651760"/>
+            <a:ext cx="3520440" cy="2468880"/>
           </a:xfrm>
           <a:prstGeom prst="roundRect">
             <a:avLst>
-              <a:gd name="adj" fmla="val 5172"/>
+              <a:gd name="adj" fmla="val 5556"/>
             </a:avLst>
           </a:prstGeom>
           <a:solidFill>
@@ -3413,7 +3413,7 @@
                 <a:ea typeface="Noto Sans CJK SC" pitchFamily="34" charset="-122"/>
                 <a:cs typeface="Noto Sans CJK SC" pitchFamily="34" charset="-120"/>
               </a:rPr>
-              <a:t>作品语义</a:t>
+              <a:t>搭建时：读懂结构</a:t>
             </a:r>
             <a:endParaRPr lang="en-US" sz="2200" dirty="0"/>
           </a:p>
@@ -3428,7 +3428,7 @@
         <p:spPr>
           <a:xfrm>
             <a:off x="795528" y="3182112"/>
-            <a:ext cx="3118104" cy="1691640"/>
+            <a:ext cx="3118104" cy="1508760"/>
           </a:xfrm>
           <a:prstGeom prst="rect">
             <a:avLst/>
@@ -3454,7 +3454,7 @@
                 <a:ea typeface="Noto Sans CJK SC" pitchFamily="34" charset="-122"/>
                 <a:cs typeface="Noto Sans CJK SC" pitchFamily="34" charset="-120"/>
               </a:rPr>
-              <a:t>角色、任务与能力资源</a:t>
+              <a:t>审角色、任务与上下文</a:t>
             </a:r>
             <a:endParaRPr lang="en-US" sz="1700" dirty="0"/>
           </a:p>
@@ -3471,7 +3471,7 @@
                 <a:ea typeface="Noto Sans CJK SC" pitchFamily="34" charset="-122"/>
                 <a:cs typeface="Noto Sans CJK SC" pitchFamily="34" charset="-120"/>
               </a:rPr>
-              <a:t>编译校验后按结构运行</a:t>
+              <a:t>看条件、记忆和能力部件</a:t>
             </a:r>
             <a:endParaRPr lang="en-US" sz="1700" dirty="0"/>
           </a:p>
@@ -3488,7 +3488,7 @@
                 <a:ea typeface="Noto Sans CJK SC" pitchFamily="34" charset="-122"/>
                 <a:cs typeface="Noto Sans CJK SC" pitchFamily="34" charset="-120"/>
               </a:rPr>
-              <a:t>条件、记忆、工具有明确语义</a:t>
+              <a:t>逐块确认设计是否符合目标</a:t>
             </a:r>
             <a:endParaRPr lang="en-US" sz="1700" dirty="0"/>
           </a:p>
@@ -3503,11 +3503,11 @@
         <p:spPr>
           <a:xfrm>
             <a:off x="4352544" y="2350008"/>
-            <a:ext cx="3520440" cy="2651760"/>
+            <a:ext cx="3520440" cy="2468880"/>
           </a:xfrm>
           <a:prstGeom prst="roundRect">
             <a:avLst>
-              <a:gd name="adj" fmla="val 5172"/>
+              <a:gd name="adj" fmla="val 5556"/>
             </a:avLst>
           </a:prstGeom>
           <a:solidFill>
@@ -3556,7 +3556,7 @@
                 <a:ea typeface="Noto Sans CJK SC" pitchFamily="34" charset="-122"/>
                 <a:cs typeface="Noto Sans CJK SC" pitchFamily="34" charset="-120"/>
               </a:rPr>
-              <a:t>模型与受控工具</a:t>
+              <a:t>执行前：检查行为</a:t>
             </a:r>
             <a:endParaRPr lang="en-US" sz="2200" dirty="0"/>
           </a:p>
@@ -3571,7 +3571,7 @@
         <p:spPr>
           <a:xfrm>
             <a:off x="4553712" y="3182112"/>
-            <a:ext cx="3118104" cy="1691640"/>
+            <a:ext cx="3118104" cy="1508760"/>
           </a:xfrm>
           <a:prstGeom prst="rect">
             <a:avLst/>
@@ -3597,7 +3597,7 @@
                 <a:ea typeface="Noto Sans CJK SC" pitchFamily="34" charset="-122"/>
                 <a:cs typeface="Noto Sans CJK SC" pitchFamily="34" charset="-120"/>
               </a:rPr>
-              <a:t>配置模型后发出真实请求</a:t>
+              <a:t>预测步骤与预期结果</a:t>
             </a:r>
             <a:endParaRPr lang="en-US" sz="1700" dirty="0"/>
           </a:p>
@@ -3614,7 +3614,7 @@
                 <a:ea typeface="Noto Sans CJK SC" pitchFamily="34" charset="-122"/>
                 <a:cs typeface="Noto Sans CJK SC" pitchFamily="34" charset="-120"/>
               </a:rPr>
-              <a:t>工具按权限执行</a:t>
+              <a:t>核对工具、资料和权限</a:t>
             </a:r>
             <a:endParaRPr lang="en-US" sz="1700" dirty="0"/>
           </a:p>
@@ -3631,7 +3631,7 @@
                 <a:ea typeface="Noto Sans CJK SC" pitchFamily="34" charset="-122"/>
                 <a:cs typeface="Noto Sans CJK SC" pitchFamily="34" charset="-120"/>
               </a:rPr>
-              <a:t>引用、结果与变更可检查</a:t>
+              <a:t>修改要求后再运行</a:t>
             </a:r>
             <a:endParaRPr lang="en-US" sz="1700" dirty="0"/>
           </a:p>
@@ -3646,11 +3646,11 @@
         <p:spPr>
           <a:xfrm>
             <a:off x="8110728" y="2350008"/>
-            <a:ext cx="3474720" cy="2651760"/>
+            <a:ext cx="3474720" cy="2468880"/>
           </a:xfrm>
           <a:prstGeom prst="roundRect">
             <a:avLst>
-              <a:gd name="adj" fmla="val 5172"/>
+              <a:gd name="adj" fmla="val 5556"/>
             </a:avLst>
           </a:prstGeom>
           <a:solidFill>
@@ -3699,7 +3699,7 @@
                 <a:ea typeface="Noto Sans CJK SC" pitchFamily="34" charset="-122"/>
                 <a:cs typeface="Noto Sans CJK SC" pitchFamily="34" charset="-120"/>
               </a:rPr>
-              <a:t>运行回到积木</a:t>
+              <a:t>运行后：核对过程</a:t>
             </a:r>
             <a:endParaRPr lang="en-US" sz="2200" dirty="0"/>
           </a:p>
@@ -3714,7 +3714,7 @@
         <p:spPr>
           <a:xfrm>
             <a:off x="8311896" y="3182112"/>
-            <a:ext cx="3072384" cy="1691640"/>
+            <a:ext cx="3072384" cy="1508760"/>
           </a:xfrm>
           <a:prstGeom prst="rect">
             <a:avLst/>
@@ -3740,7 +3740,7 @@
                 <a:ea typeface="Noto Sans CJK SC" pitchFamily="34" charset="-122"/>
                 <a:cs typeface="Noto Sans CJK SC" pitchFamily="34" charset="-120"/>
               </a:rPr>
-              <a:t>统一事件关联具体积木</a:t>
+              <a:t>事件对应到具体积木</a:t>
             </a:r>
             <a:endParaRPr lang="en-US" sz="1700" dirty="0"/>
           </a:p>
@@ -3757,7 +3757,7 @@
                 <a:ea typeface="Noto Sans CJK SC" pitchFamily="34" charset="-122"/>
                 <a:cs typeface="Noto Sans CJK SC" pitchFamily="34" charset="-120"/>
               </a:rPr>
-              <a:t>失败与修改有定位入口</a:t>
+              <a:t>比较实际步骤与输出</a:t>
             </a:r>
             <a:endParaRPr lang="en-US" sz="1700" dirty="0"/>
           </a:p>
@@ -3774,7 +3774,7 @@
                 <a:ea typeface="Noto Sans CJK SC" pitchFamily="34" charset="-122"/>
                 <a:cs typeface="Noto Sans CJK SC" pitchFamily="34" charset="-120"/>
               </a:rPr>
-              <a:t>项目保存支持继续创作</a:t>
+              <a:t>定位问题，修改后再检验</a:t>
             </a:r>
             <a:endParaRPr lang="en-US" sz="1700" dirty="0"/>
           </a:p>
@@ -3782,7 +3782,106 @@
       </p:sp>
       <p:sp>
         <p:nvSpPr>
-          <p:cNvPr id="17" name="Shape 15"/>
+          <p:cNvPr id="17" name="Text 15"/>
+          <p:cNvSpPr/>
+          <p:nvPr/>
+        </p:nvSpPr>
+        <p:spPr>
+          <a:xfrm>
+            <a:off x="777240" y="5102352"/>
+            <a:ext cx="1965960" cy="411480"/>
+          </a:xfrm>
+          <a:prstGeom prst="rect">
+            <a:avLst/>
+          </a:prstGeom>
+          <a:noFill/>
+          <a:ln/>
+        </p:spPr>
+        <p:txBody>
+          <a:bodyPr wrap="square" lIns="0" tIns="0" rIns="0" bIns="0" rtlCol="0" anchor="ctr">
+            <a:spAutoFit/>
+          </a:bodyPr>
+          <a:lstStyle/>
+          <a:p>
+            <a:pPr indent="0" marL="0">
+              <a:buNone/>
+            </a:pPr>
+            <a:r>
+              <a:rPr lang="en-US" sz="2100" b="1" dirty="0">
+                <a:solidFill>
+                  <a:srgbClr val="AF6B22"/>
+                </a:solidFill>
+                <a:latin typeface="Noto Sans CJK SC" pitchFamily="34" charset="0"/>
+                <a:ea typeface="Noto Sans CJK SC" pitchFamily="34" charset="-122"/>
+                <a:cs typeface="Noto Sans CJK SC" pitchFamily="34" charset="-120"/>
+              </a:rPr>
+              <a:t>后续拓展</a:t>
+            </a:r>
+            <a:endParaRPr lang="en-US" sz="2100" dirty="0"/>
+          </a:p>
+        </p:txBody>
+      </p:sp>
+      <p:sp>
+        <p:nvSpPr>
+          <p:cNvPr id="18" name="Text 16"/>
+          <p:cNvSpPr/>
+          <p:nvPr/>
+        </p:nvSpPr>
+        <p:spPr>
+          <a:xfrm>
+            <a:off x="2788920" y="5038344"/>
+            <a:ext cx="8641080" cy="704088"/>
+          </a:xfrm>
+          <a:prstGeom prst="rect">
+            <a:avLst/>
+          </a:prstGeom>
+          <a:noFill/>
+          <a:ln/>
+        </p:spPr>
+        <p:txBody>
+          <a:bodyPr wrap="square" lIns="0" tIns="0" rIns="0" bIns="0" rtlCol="0" anchor="ctr">
+            <a:spAutoFit/>
+          </a:bodyPr>
+          <a:lstStyle/>
+          <a:p>
+            <a:pPr indent="0" marL="0">
+              <a:buNone/>
+            </a:pPr>
+            <a:r>
+              <a:rPr lang="en-US" sz="1800" dirty="0">
+                <a:solidFill>
+                  <a:srgbClr val="172C30"/>
+                </a:solidFill>
+                <a:latin typeface="Noto Sans CJK SC" pitchFamily="34" charset="0"/>
+                <a:ea typeface="Noto Sans CJK SC" pitchFamily="34" charset="-122"/>
+                <a:cs typeface="Noto Sans CJK SC" pitchFamily="34" charset="-120"/>
+              </a:rPr>
+              <a:t>OPC（一人公司）：让“Agent 员工”的职责、流程与工具权限可审阅。</a:t>
+            </a:r>
+            <a:endParaRPr lang="en-US" sz="1800" dirty="0"/>
+          </a:p>
+          <a:p>
+            <a:pPr indent="0" marL="0">
+              <a:buNone/>
+            </a:pPr>
+            <a:r>
+              <a:rPr lang="en-US" sz="1800" dirty="0">
+                <a:solidFill>
+                  <a:srgbClr val="172C30"/>
+                </a:solidFill>
+                <a:latin typeface="Noto Sans CJK SC" pitchFamily="34" charset="0"/>
+                <a:ea typeface="Noto Sans CJK SC" pitchFamily="34" charset="-122"/>
+                <a:cs typeface="Noto Sans CJK SC" pitchFamily="34" charset="-120"/>
+              </a:rPr>
+              <a:t>与小学创作共享理解、修改和解释这条价值主线；应用待验证。</a:t>
+            </a:r>
+            <a:endParaRPr lang="en-US" sz="1800" dirty="0"/>
+          </a:p>
+        </p:txBody>
+      </p:sp>
+      <p:sp>
+        <p:nvSpPr>
+          <p:cNvPr id="19" name="Shape 17"/>
           <p:cNvSpPr/>
           <p:nvPr/>
         </p:nvSpPr>
@@ -3809,7 +3908,7 @@
       </p:sp>
       <p:sp>
         <p:nvSpPr>
-          <p:cNvPr id="18" name="Text 16"/>
+          <p:cNvPr id="20" name="Text 18"/>
           <p:cNvSpPr/>
           <p:nvPr/>
         </p:nvSpPr>
@@ -3842,7 +3941,7 @@
                 <a:ea typeface="Noto Sans CJK SC" pitchFamily="34" charset="-122"/>
                 <a:cs typeface="Noto Sans CJK SC" pitchFamily="34" charset="-120"/>
               </a:rPr>
-              <a:t>底层采用 Blockly、Tauri、Pi；Blocky组织作品语义、运行映射与受控集成。</a:t>
+              <a:t>积木与轨迹呈现关键行为；模型内容仍需核查。底座采用 Blockly、Tauri、Pi。</a:t>
             </a:r>
             <a:endParaRPr lang="en-US" sz="1200" dirty="0"/>
           </a:p>
@@ -10882,7 +10981,7 @@
                 <a:ea typeface="Noto Sans CJK SC" pitchFamily="34" charset="-122"/>
                 <a:cs typeface="Noto Sans CJK SC" pitchFamily="34" charset="-120"/>
               </a:rPr>
-              <a:t>故事搭档是教学设计；当前没有小学生使用结果。</a:t>
+              <a:t>积木审阅：读懂任务与步骤，用轨迹核对行为；小学实践仍待验证。</a:t>
             </a:r>
             <a:endParaRPr lang="en-US" sz="1200" dirty="0"/>
           </a:p>

--- a/doc/交付/2026-10-03-答辩与商业计划书/Blocky-Studio-小学Agent创作教育-2026-10-03.pptx
+++ b/doc/交付/2026-10-03-答辩与商业计划书/Blocky-Studio-小学Agent创作教育-2026-10-03.pptx
@@ -3873,7 +3873,7 @@
                 <a:ea typeface="Noto Sans CJK SC" pitchFamily="34" charset="-122"/>
                 <a:cs typeface="Noto Sans CJK SC" pitchFamily="34" charset="-120"/>
               </a:rPr>
-              <a:t>与小学创作共享理解、修改和解释这条价值主线；应用待验证。</a:t>
+              <a:t>后续拓展方向：把理解、修改与解释的能力延伸到办公协作。</a:t>
             </a:r>
             <a:endParaRPr lang="en-US" sz="1800" dirty="0"/>
           </a:p>
@@ -3941,7 +3941,7 @@
                 <a:ea typeface="Noto Sans CJK SC" pitchFamily="34" charset="-122"/>
                 <a:cs typeface="Noto Sans CJK SC" pitchFamily="34" charset="-120"/>
               </a:rPr>
-              <a:t>积木与轨迹呈现关键行为；模型内容仍需核查。底座采用 Blockly、Tauri、Pi。</a:t>
+              <a:t>积木呈现结构，轨迹支持行为核对；底座采用 Blockly、Tauri、Pi。</a:t>
             </a:r>
             <a:endParaRPr lang="en-US" sz="1200" dirty="0"/>
           </a:p>
@@ -4055,7 +4055,7 @@
                 <a:ea typeface="Noto Sans CJK SC" pitchFamily="34" charset="-122"/>
                 <a:cs typeface="Noto Sans CJK SC" pitchFamily="34" charset="-120"/>
               </a:rPr>
-              <a:t>先验证孩子能创作，再验证教师能复用</a:t>
+              <a:t>从学生创作，到教师复用与机构合作</a:t>
             </a:r>
             <a:endParaRPr lang="en-US" sz="3000" dirty="0"/>
           </a:p>
@@ -4344,7 +4344,7 @@
                 <a:ea typeface="Noto Sans CJK SC" pitchFamily="34" charset="-122"/>
                 <a:cs typeface="Noto Sans CJK SC" pitchFamily="34" charset="-120"/>
               </a:rPr>
-              <a:t>小学体验与课程待验证</a:t>
+              <a:t>围绕小学创作设计课程</a:t>
             </a:r>
             <a:endParaRPr lang="en-US" sz="1700" dirty="0"/>
           </a:p>
@@ -4487,7 +4487,7 @@
                 <a:ea typeface="Noto Sans CJK SC" pitchFamily="34" charset="-122"/>
                 <a:cs typeface="Noto Sans CJK SC" pitchFamily="34" charset="-120"/>
               </a:rPr>
-              <a:t>记录帮助、失败与实际费用</a:t>
+              <a:t>记录指导、调试与实际费用</a:t>
             </a:r>
             <a:endParaRPr lang="en-US" sz="1700" dirty="0"/>
           </a:p>
@@ -4712,7 +4712,7 @@
                 <a:ea typeface="Noto Sans CJK SC" pitchFamily="34" charset="-122"/>
                 <a:cs typeface="Noto Sans CJK SC" pitchFamily="34" charset="-120"/>
               </a:rPr>
-              <a:t>机构账户、班级管理、额度与计费尚待建设。</a:t>
+              <a:t>机构服务规划：课程准备、部署配置、教师培训与支持。</a:t>
             </a:r>
             <a:endParaRPr lang="en-US" sz="1900" dirty="0"/>
           </a:p>
@@ -4729,7 +4729,7 @@
                 <a:ea typeface="Noto Sans CJK SC" pitchFamily="34" charset="-122"/>
                 <a:cs typeface="Noto Sans CJK SC" pitchFamily="34" charset="-120"/>
               </a:rPr>
-              <a:t>真实课堂、合同与营收尚无验证结果。</a:t>
+              <a:t>按教学规模、模型用量和服务范围制定合作方案。</a:t>
             </a:r>
             <a:endParaRPr lang="en-US" sz="1900" dirty="0"/>
           </a:p>
@@ -5284,7 +5284,7 @@
                 <a:ea typeface="Noto Sans CJK SC" pitchFamily="34" charset="-122"/>
                 <a:cs typeface="Noto Sans CJK SC" pitchFamily="34" charset="-120"/>
               </a:rPr>
-              <a:t>免费与积木不是充分差异，教师复用才是待验证价值。</a:t>
+              <a:t>围绕创作学习、作品解释与教师复用，形成产品价值。</a:t>
             </a:r>
             <a:endParaRPr lang="en-US" sz="1500" dirty="0"/>
           </a:p>
@@ -5576,7 +5576,7 @@
                           <a:ea typeface="Noto Sans CJK SC" pitchFamily="34" charset="-122"/>
                           <a:cs typeface="Noto Sans CJK SC" pitchFamily="34" charset="-120"/>
                         </a:rPr>
-                        <a:t>Blocky需要证明</a:t>
+                        <a:t>Blocky重点方向</a:t>
                       </a:r>
                       <a:endParaRPr lang="en-US" sz="1700" dirty="0">
                         <a:latin typeface="Noto Sans CJK SC" charset="0"/>
@@ -5988,7 +5988,7 @@
                           <a:ea typeface="Noto Sans CJK SC" pitchFamily="34" charset="-122"/>
                           <a:cs typeface="Noto Sans CJK SC" pitchFamily="34" charset="-120"/>
                         </a:rPr>
-                        <a:t>课程与桌面过程能否支持复用</a:t>
+                        <a:t>课程作品与桌面过程支持复用</a:t>
                       </a:r>
                       <a:endParaRPr lang="en-US" sz="1700" dirty="0">
                         <a:latin typeface="Noto Sans CJK SC" charset="0"/>
@@ -6194,7 +6194,7 @@
                           <a:ea typeface="Noto Sans CJK SC" pitchFamily="34" charset="-122"/>
                           <a:cs typeface="Noto Sans CJK SC" pitchFamily="34" charset="-120"/>
                         </a:rPr>
-                        <a:t>小学阅读、操作与组织成本</a:t>
+                        <a:t>小学创作体验与课堂组织</a:t>
                       </a:r>
                       <a:endParaRPr lang="en-US" sz="1700" dirty="0">
                         <a:latin typeface="Noto Sans CJK SC" charset="0"/>
@@ -6312,7 +6312,7 @@
                 <a:ea typeface="Noto Sans CJK SC" pitchFamily="34" charset="-122"/>
                 <a:cs typeface="Noto Sans CJK SC" pitchFamily="34" charset="-120"/>
               </a:rPr>
-              <a:t>公开描述沿用交接核对；本轮未复核页面变化，功能与价格以官方最新说明为准。</a:t>
+              <a:t>创作参照与竞品公开资料见讲稿来源；功能与价格以官方说明为准。</a:t>
             </a:r>
             <a:endParaRPr lang="en-US" sz="1200" dirty="0"/>
           </a:p>
@@ -6426,7 +6426,7 @@
                 <a:ea typeface="Noto Sans CJK SC" pitchFamily="34" charset="-122"/>
                 <a:cs typeface="Noto Sans CJK SC" pitchFamily="34" charset="-120"/>
               </a:rPr>
-              <a:t>基准前两年亏损，现金比增长目标更紧迫</a:t>
+              <a:t>三年基准经营测算与资金安排</a:t>
             </a:r>
             <a:endParaRPr lang="en-US" sz="3000" dirty="0"/>
           </a:p>
@@ -6467,7 +6467,7 @@
                 <a:ea typeface="Noto Sans CJK SC" pitchFamily="34" charset="-122"/>
                 <a:cs typeface="Noto Sans CJK SC" pitchFamily="34" charset="-120"/>
               </a:rPr>
-              <a:t>2027–2029 · 人民币万元 · 全部为假设，无真实合同或资金承诺</a:t>
+              <a:t>2027–2029 · 人民币万元 · 经营规划与预算假设</a:t>
             </a:r>
             <a:endParaRPr lang="en-US" sz="1500" dirty="0"/>
           </a:p>
@@ -6714,7 +6714,7 @@
                 <a:ea typeface="Noto Sans CJK SC" pitchFamily="34" charset="-122"/>
                 <a:cs typeface="Noto Sans CJK SC" pitchFamily="34" charset="-120"/>
               </a:rPr>
-              <a:t>峰值缺口8.30万 + 储备2万</a:t>
+              <a:t>资金需求8.30万 + 储备2万</a:t>
             </a:r>
             <a:endParaRPr lang="en-US" sz="1700" dirty="0"/>
           </a:p>
@@ -6799,7 +6799,7 @@
                 <a:ea typeface="Noto Sans CJK SC" pitchFamily="34" charset="-122"/>
                 <a:cs typeface="Noto Sans CJK SC" pitchFamily="34" charset="-120"/>
               </a:rPr>
-              <a:t>合同4 / 10 / 18份，均价1.8万元；2029单年转正，三年累计仍亏1.472万元。</a:t>
+              <a:t>规划合同4 / 10 / 18份，均价1.8万元；收入、费用与资金按年度安排。</a:t>
             </a:r>
             <a:endParaRPr lang="en-US" sz="1200" dirty="0"/>
           </a:p>
@@ -8286,7 +8286,7 @@
                 <a:ea typeface="Noto Sans CJK SC" pitchFamily="34" charset="-122"/>
                 <a:cs typeface="Noto Sans CJK SC" pitchFamily="34" charset="-120"/>
               </a:rPr>
-              <a:t>每份模型额度预算1400元；用量与单价没有整班实测。</a:t>
+              <a:t>每份模型额度预算1400元；按实际课堂用量优化额度与报价。</a:t>
             </a:r>
             <a:endParaRPr lang="en-US" sz="1900" dirty="0"/>
           </a:p>
@@ -8354,7 +8354,7 @@
                 <a:ea typeface="Noto Sans CJK SC" pitchFamily="34" charset="-122"/>
                 <a:cs typeface="Noto Sans CJK SC" pitchFamily="34" charset="-120"/>
               </a:rPr>
-              <a:t>收款、费用与产能按月核对；悲观持续亏损，必须缩小支出或暂停扩展。</a:t>
+              <a:t>按月核对收款、费用与产能，依据合作进展分阶段安排投入。</a:t>
             </a:r>
             <a:endParaRPr lang="en-US" sz="1200" dirty="0"/>
           </a:p>
@@ -8468,7 +8468,7 @@
                 <a:ea typeface="Noto Sans CJK SC" pitchFamily="34" charset="-122"/>
                 <a:cs typeface="Noto Sans CJK SC" pitchFamily="34" charset="-120"/>
               </a:rPr>
-              <a:t>三类证据，各自只证明对应范围</a:t>
+              <a:t>产品运行依据与教学实践路线</a:t>
             </a:r>
             <a:endParaRPr lang="en-US" sz="3000" dirty="0"/>
           </a:p>
@@ -8509,7 +8509,7 @@
                 <a:ea typeface="Noto Sans CJK SC" pitchFamily="34" charset="-122"/>
                 <a:cs typeface="Noto Sans CJK SC" pitchFamily="34" charset="-120"/>
               </a:rPr>
-              <a:t>教学设计、领域运行、Windows普通包画面不能相互替代。</a:t>
+              <a:t>从规则实验、真实工作台到模型演示，支撑课程设计与实践。</a:t>
             </a:r>
             <a:endParaRPr lang="en-US" sz="1500" dirty="0"/>
           </a:p>
@@ -8801,7 +8801,7 @@
                           <a:ea typeface="Noto Sans CJK SC" pitchFamily="34" charset="-122"/>
                           <a:cs typeface="Noto Sans CJK SC" pitchFamily="34" charset="-120"/>
                         </a:rPr>
-                        <a:t>不能推出</a:t>
+                        <a:t>教学实践方向</a:t>
                       </a:r>
                       <a:endParaRPr lang="en-US" sz="1700" dirty="0">
                         <a:latin typeface="Noto Sans CJK SC" charset="0"/>
@@ -9007,7 +9007,7 @@
                           <a:ea typeface="Noto Sans CJK SC" pitchFamily="34" charset="-122"/>
                           <a:cs typeface="Noto Sans CJK SC" pitchFamily="34" charset="-120"/>
                         </a:rPr>
-                        <a:t>生成式故事、Windows课程或小学生效果</a:t>
+                        <a:t>故事生成与学生作品讲解</a:t>
                       </a:r>
                       <a:endParaRPr lang="en-US" sz="1700" dirty="0">
                         <a:latin typeface="Noto Sans CJK SC" charset="0"/>
@@ -9213,7 +9213,7 @@
                           <a:ea typeface="Noto Sans CJK SC" pitchFamily="34" charset="-122"/>
                           <a:cs typeface="Noto Sans CJK SC" pitchFamily="34" charset="-120"/>
                         </a:rPr>
-                        <a:t>新故事任务或真实课堂采用</a:t>
+                        <a:t>课堂作品准备与师生实践</a:t>
                       </a:r>
                       <a:endParaRPr lang="en-US" sz="1700" dirty="0">
                         <a:latin typeface="Noto Sans CJK SC" charset="0"/>
@@ -9419,7 +9419,7 @@
                           <a:ea typeface="Noto Sans CJK SC" pitchFamily="34" charset="-122"/>
                           <a:cs typeface="Noto Sans CJK SC" pitchFamily="34" charset="-120"/>
                         </a:rPr>
-                        <a:t>本轮新模型用量、教学提升或收入</a:t>
+                        <a:t>模型回应比较与课堂用量记录</a:t>
                       </a:r>
                       <a:endParaRPr lang="en-US" sz="1700" dirty="0">
                         <a:latin typeface="Noto Sans CJK SC" charset="0"/>
@@ -9537,7 +9537,7 @@
                 <a:ea typeface="Noto Sans CJK SC" pitchFamily="34" charset="-122"/>
                 <a:cs typeface="Noto Sans CJK SC" pitchFamily="34" charset="-120"/>
               </a:rPr>
-              <a:t>教师选择模型与内容范围；工具按权限执行。引用不保证正确，受控不等于绝对安全。</a:t>
+              <a:t>教师预选模型与内容范围；工具按权限执行，学生结合资料检查回答。</a:t>
             </a:r>
             <a:endParaRPr lang="en-US" sz="1200" dirty="0"/>
           </a:p>
@@ -9692,7 +9692,7 @@
                 <a:ea typeface="Noto Sans CJK SC" pitchFamily="34" charset="-122"/>
                 <a:cs typeface="Noto Sans CJK SC" pitchFamily="34" charset="-120"/>
               </a:rPr>
-              <a:t>资料用于解释现有方向，不代替产品取证或课堂验证。</a:t>
+              <a:t>公开资料、产品记录与财务工作簿，共同支持项目介绍。</a:t>
             </a:r>
             <a:endParaRPr lang="en-US" sz="1500" dirty="0"/>
           </a:p>
@@ -10193,7 +10193,7 @@
                 <a:ea typeface="Noto Sans CJK SC" pitchFamily="34" charset="-122"/>
                 <a:cs typeface="Noto Sans CJK SC" pitchFamily="34" charset="-120"/>
               </a:rPr>
-              <a:t>未完成真人彩排与现场投屏；12页主讲拟480秒，另5页备答。</a:t>
+              <a:t>讲述安排：12页主讲约8分钟，5页备答用于产品与经营问题。</a:t>
             </a:r>
             <a:endParaRPr lang="en-US" sz="1200" dirty="0"/>
           </a:p>
@@ -10981,7 +10981,7 @@
                 <a:ea typeface="Noto Sans CJK SC" pitchFamily="34" charset="-122"/>
                 <a:cs typeface="Noto Sans CJK SC" pitchFamily="34" charset="-120"/>
               </a:rPr>
-              <a:t>积木审阅：读懂任务与步骤，用轨迹核对行为；小学实践仍待验证。</a:t>
+              <a:t>积木审阅：读懂任务与步骤，用运行轨迹解释自己的设计。</a:t>
             </a:r>
             <a:endParaRPr lang="en-US" sz="1200" dirty="0"/>
           </a:p>
@@ -12137,7 +12137,7 @@
                 <a:ea typeface="Noto Sans CJK SC" pitchFamily="34" charset="-122"/>
                 <a:cs typeface="Noto Sans CJK SC" pitchFamily="34" charset="-120"/>
               </a:rPr>
-              <a:t>迁移需要验证</a:t>
+              <a:t>课堂实践重点</a:t>
             </a:r>
             <a:endParaRPr lang="en-US" sz="2300" dirty="0"/>
           </a:p>
@@ -12178,7 +12178,7 @@
                 <a:ea typeface="Noto Sans CJK SC" pitchFamily="34" charset="-122"/>
                 <a:cs typeface="Noto Sans CJK SC" pitchFamily="34" charset="-120"/>
               </a:rPr>
-              <a:t>工具能运行 ≠ 孩子能独立学习</a:t>
+              <a:t>从读懂作品，走向自主创作</a:t>
             </a:r>
             <a:endParaRPr lang="en-US" sz="2000" dirty="0"/>
           </a:p>
@@ -12195,7 +12195,7 @@
                 <a:ea typeface="Noto Sans CJK SC" pitchFamily="34" charset="-122"/>
                 <a:cs typeface="Noto Sans CJK SC" pitchFamily="34" charset="-120"/>
               </a:rPr>
-              <a:t>须观察阅读负担、操作帮助与解释质量</a:t>
+              <a:t>关注阅读理解、操作过程与作品讲解</a:t>
             </a:r>
             <a:endParaRPr lang="en-US" sz="2000" dirty="0"/>
           </a:p>
@@ -12350,7 +12350,7 @@
                 <a:ea typeface="Noto Sans CJK SC" pitchFamily="34" charset="-122"/>
                 <a:cs typeface="Noto Sans CJK SC" pitchFamily="34" charset="-120"/>
               </a:rPr>
-              <a:t>真实 Windows 普通包画面；合成资料作品仅用于说明界面与能力。</a:t>
+              <a:t>真实 Windows 工作台：以合成资料作品展示积木、运行与修改。</a:t>
             </a:r>
             <a:endParaRPr lang="en-US" sz="1500" dirty="0"/>
           </a:p>
@@ -12663,7 +12663,7 @@
                 <a:ea typeface="Noto Sans CJK SC" pitchFamily="34" charset="-122"/>
                 <a:cs typeface="Noto Sans CJK SC" pitchFamily="34" charset="-120"/>
               </a:rPr>
-              <a:t>仍待验证</a:t>
+              <a:t>教学实践计划</a:t>
             </a:r>
             <a:endParaRPr lang="en-US" sz="2100" dirty="0"/>
           </a:p>
@@ -12704,7 +12704,7 @@
                 <a:ea typeface="Noto Sans CJK SC" pitchFamily="34" charset="-122"/>
                 <a:cs typeface="Noto Sans CJK SC" pitchFamily="34" charset="-120"/>
               </a:rPr>
-              <a:t>小学阅读与操作负担</a:t>
+              <a:t>从少量积木开始创作</a:t>
             </a:r>
             <a:endParaRPr lang="en-US" sz="1600" dirty="0"/>
           </a:p>
@@ -12721,7 +12721,7 @@
                 <a:ea typeface="Noto Sans CJK SC" pitchFamily="34" charset="-122"/>
                 <a:cs typeface="Noto Sans CJK SC" pitchFamily="34" charset="-120"/>
               </a:rPr>
-              <a:t>教师能否独立复用</a:t>
+              <a:t>支持教师准备与复用作品</a:t>
             </a:r>
             <a:endParaRPr lang="en-US" sz="1600" dirty="0"/>
           </a:p>
@@ -13546,7 +13546,7 @@
                 <a:ea typeface="Noto Sans CJK SC" pitchFamily="34" charset="-122"/>
                 <a:cs typeface="Noto Sans CJK SC" pitchFamily="34" charset="-120"/>
               </a:rPr>
-              <a:t>完整链为教学设计；已运行证据仅覆盖方向规则，生成故事尚待取证。</a:t>
+              <a:t>教学设计：读懂角色与任务，预测方向，运行后检查并修改故事。</a:t>
             </a:r>
             <a:endParaRPr lang="en-US" sz="1200" dirty="0"/>
           </a:p>
@@ -14191,7 +14191,7 @@
                 <a:ea typeface="Noto Sans CJK SC" pitchFamily="34" charset="-122"/>
                 <a:cs typeface="Noto Sans CJK SC" pitchFamily="34" charset="-120"/>
               </a:rPr>
-              <a:t>再把路线交给模型，比较故事是否符合任务（待验证）。</a:t>
+              <a:t>再把路线交给模型，比较故事是否符合任务。</a:t>
             </a:r>
             <a:endParaRPr lang="en-US" sz="2100" dirty="0"/>
           </a:p>
@@ -14259,7 +14259,7 @@
                 <a:ea typeface="Noto Sans CJK SC" pitchFamily="34" charset="-122"/>
                 <a:cs typeface="Noto Sans CJK SC" pitchFamily="34" charset="-120"/>
               </a:rPr>
-              <a:t>两次结构化结果与实际分支事件一致；无外部大模型调用。</a:t>
+              <a:t>本地规则对照：条件改变，分支事件与输出结果同步变化。</a:t>
             </a:r>
             <a:endParaRPr lang="en-US" sz="1200" dirty="0"/>
           </a:p>
@@ -15067,7 +15067,7 @@
                 <a:ea typeface="Noto Sans CJK SC" pitchFamily="34" charset="-122"/>
                 <a:cs typeface="Noto Sans CJK SC" pitchFamily="34" charset="-120"/>
               </a:rPr>
-              <a:t>教师预选模型、权限与少量积木；生成式故事与学生自主搭建尚待取证。</a:t>
+              <a:t>教学设计：教师预选模型与权限，学生逐步组合角色、记忆和工具。</a:t>
             </a:r>
             <a:endParaRPr lang="en-US" sz="1200" dirty="0"/>
           </a:p>
@@ -15222,7 +15222,7 @@
                 <a:ea typeface="Noto Sans CJK SC" pitchFamily="34" charset="-122"/>
                 <a:cs typeface="Noto Sans CJK SC" pitchFamily="34" charset="-120"/>
               </a:rPr>
-              <a:t>真实普通包轨迹，证明事件能对应回积木；图中作品不是故事搭档。</a:t>
+              <a:t>真实 Windows 运行轨迹：从执行事件定位积木，回到作品继续修改。</a:t>
             </a:r>
             <a:endParaRPr lang="en-US" sz="1500" dirty="0"/>
           </a:p>
@@ -15692,7 +15692,7 @@
                 <a:ea typeface="Noto Sans CJK SC" pitchFamily="34" charset="-122"/>
                 <a:cs typeface="Noto Sans CJK SC" pitchFamily="34" charset="-120"/>
               </a:rPr>
-              <a:t>拟议活动流程；课时与帮助程度将在真实试用中记录。</a:t>
+              <a:t>课堂活动设计：教师引导实践，学生留下作品、过程和解释。</a:t>
             </a:r>
             <a:endParaRPr lang="en-US" sz="1500" dirty="0"/>
           </a:p>
@@ -16808,7 +16808,7 @@
                           <a:ea typeface="Noto Sans CJK SC" pitchFamily="34" charset="-122"/>
                           <a:cs typeface="Noto Sans CJK SC" pitchFamily="34" charset="-120"/>
                         </a:rPr>
-                        <a:t>失败位置、修订与同伴讲解</a:t>
+                        <a:t>调试位置、修订与同伴讲解</a:t>
                       </a:r>
                       <a:endParaRPr lang="en-US" sz="1700" dirty="0">
                         <a:latin typeface="Noto Sans CJK SC" charset="0"/>
@@ -16926,7 +16926,7 @@
                 <a:ea typeface="Noto Sans CJK SC" pitchFamily="34" charset="-122"/>
                 <a:cs typeface="Noto Sans CJK SC" pitchFamily="34" charset="-120"/>
               </a:rPr>
-              <a:t>暂无班级管理或自动评分；教师人工组织。不能由完成率直接推断教学提升。</a:t>
+              <a:t>教师组织四个环节，以作品、过程记录和学生讲解观察学习进展。</a:t>
             </a:r>
             <a:endParaRPr lang="en-US" sz="1200" dirty="0"/>
           </a:p>

--- a/doc/交付/2026-10-03-答辩与商业计划书/Blocky-Studio-小学Agent创作教育-2026-10-03.pptx
+++ b/doc/交付/2026-10-03-答辩与商业计划书/Blocky-Studio-小学Agent创作教育-2026-10-03.pptx
@@ -40,9 +40,11 @@
     <p:sldId id="288" r:id="rId34"/>
     <p:sldId id="289" r:id="rId35"/>
     <p:sldId id="290" r:id="rId36"/>
+    <p:sldId id="291" r:id="rId37"/>
+    <p:sldId id="292" r:id="rId38"/>
   </p:sldIdLst>
   <p:notesMasterIdLst>
-    <p:notesMasterId r:id="rId37"/>
+    <p:notesMasterId r:id="rId39"/>
   </p:notesMasterIdLst>
   <p:sldSz cx="12192000" cy="6858000"/>
   <p:notesSz cx="6858000" cy="12192000"/>
@@ -139,375 +141,6 @@
     </a:lvl9pPr>
   </p:defaultTextStyle>
 </p:presentation>
-</file>
-
-<file path=ppt/charts/chart1.xml><?xml version="1.0" encoding="utf-8"?>
-<c:chartSpace xmlns:c="http://schemas.openxmlformats.org/drawingml/2006/chart" xmlns:a="http://schemas.openxmlformats.org/drawingml/2006/main" xmlns:r="http://schemas.openxmlformats.org/officeDocument/2006/relationships">
-  <c:date1904 val="0"/>
-  <c:roundedCorners val="1"/>
-  <c:chart>
-    <c:title>
-      <c:tx>
-        <c:rich>
-          <a:bodyPr/>
-          <a:lstStyle/>
-          <a:p>
-            <a:pPr>
-              <a:defRPr sz="1500" b="0" i="0" u="none" strike="noStrike">
-                <a:solidFill>
-                  <a:srgbClr val="000000"/>
-                </a:solidFill>
-                <a:latin typeface="Noto Sans SC"/>
-              </a:defRPr>
-            </a:pPr>
-            <a:r>
-              <a:rPr sz="1500" b="0" i="0" u="none" strike="noStrike">
-                <a:solidFill>
-                  <a:srgbClr val="000000"/>
-                </a:solidFill>
-                <a:latin typeface="Noto Sans SC"/>
-              </a:rPr>
-              <a:t>基准年度收入与费用</a:t>
-            </a:r>
-          </a:p>
-        </c:rich>
-      </c:tx>
-      <c:layout/>
-      <c:overlay val="0"/>
-    </c:title>
-    <c:autoTitleDeleted val="0"/>
-    <c:plotArea>
-      <c:layout/>
-      <c:barChart>
-        <c:barDir val="col"/>
-        <c:grouping val="clustered"/>
-        <c:varyColors val="0"/>
-        <c:ser>
-          <c:idx val="0"/>
-          <c:order val="0"/>
-          <c:tx>
-            <c:strRef>
-              <c:f>Sheet1!$B$1</c:f>
-              <c:strCache>
-                <c:ptCount val="1"/>
-                <c:pt idx="0">
-                  <c:v>收入</c:v>
-                </c:pt>
-              </c:strCache>
-            </c:strRef>
-          </c:tx>
-          <c:spPr>
-            <a:solidFill>
-              <a:srgbClr val="007C73"/>
-            </a:solidFill>
-            <a:effectLst/>
-          </c:spPr>
-          <c:invertIfNegative val="0"/>
-          <c:dLbls>
-            <c:numFmt formatCode="0.00" sourceLinked="0"/>
-            <c:txPr>
-              <a:bodyPr/>
-              <a:lstStyle/>
-              <a:p>
-                <a:pPr>
-                  <a:defRPr b="0" i="0" strike="noStrike" sz="1200" u="none">
-                    <a:solidFill>
-                      <a:srgbClr val="000000"/>
-                    </a:solidFill>
-                    <a:latin typeface="Arial"/>
-                  </a:defRPr>
-                </a:pPr>
-              </a:p>
-            </c:txPr>
-            <c:showLegendKey val="0"/>
-            <c:showVal val="1"/>
-            <c:showCatName val="0"/>
-            <c:showSerName val="0"/>
-            <c:showPercent val="0"/>
-            <c:showBubbleSize val="0"/>
-            <c:showLeaderLines val="0"/>
-          </c:dLbls>
-          <c:cat>
-            <c:multiLvlStrRef>
-              <c:f>Sheet1!$A$2:$A$4</c:f>
-              <c:multiLvlStrCache>
-                <c:ptCount val="3"/>
-                <c:lvl>
-                  <c:pt idx="0">
-                    <c:v>2027</c:v>
-                  </c:pt>
-                  <c:pt idx="1">
-                    <c:v>2028</c:v>
-                  </c:pt>
-                  <c:pt idx="2">
-                    <c:v>2029</c:v>
-                  </c:pt>
-                </c:lvl>
-              </c:multiLvlStrCache>
-            </c:multiLvlStrRef>
-          </c:cat>
-          <c:val>
-            <c:numRef>
-              <c:f>Sheet1!$B$2:$B$4</c:f>
-              <c:numCache>
-                <c:formatCode>General</c:formatCode>
-                <c:ptCount val="3"/>
-                <c:pt idx="0">
-                  <c:v>7.2</c:v>
-                </c:pt>
-                <c:pt idx="1">
-                  <c:v>18</c:v>
-                </c:pt>
-                <c:pt idx="2">
-                  <c:v>32.4</c:v>
-                </c:pt>
-              </c:numCache>
-            </c:numRef>
-          </c:val>
-        </c:ser>
-        <c:ser>
-          <c:idx val="1"/>
-          <c:order val="1"/>
-          <c:tx>
-            <c:strRef>
-              <c:f>Sheet1!$C$1</c:f>
-              <c:strCache>
-                <c:ptCount val="1"/>
-                <c:pt idx="0">
-                  <c:v>费用</c:v>
-                </c:pt>
-              </c:strCache>
-            </c:strRef>
-          </c:tx>
-          <c:spPr>
-            <a:solidFill>
-              <a:srgbClr val="7550A4"/>
-            </a:solidFill>
-            <a:effectLst/>
-          </c:spPr>
-          <c:invertIfNegative val="0"/>
-          <c:dLbls>
-            <c:numFmt formatCode="0.00" sourceLinked="0"/>
-            <c:txPr>
-              <a:bodyPr/>
-              <a:lstStyle/>
-              <a:p>
-                <a:pPr>
-                  <a:defRPr b="0" i="0" strike="noStrike" sz="1200" u="none">
-                    <a:solidFill>
-                      <a:srgbClr val="000000"/>
-                    </a:solidFill>
-                    <a:latin typeface="Arial"/>
-                  </a:defRPr>
-                </a:pPr>
-              </a:p>
-            </c:txPr>
-            <c:showLegendKey val="0"/>
-            <c:showVal val="1"/>
-            <c:showCatName val="0"/>
-            <c:showSerName val="0"/>
-            <c:showPercent val="0"/>
-            <c:showBubbleSize val="0"/>
-            <c:showLeaderLines val="0"/>
-          </c:dLbls>
-          <c:cat>
-            <c:multiLvlStrRef>
-              <c:f>Sheet1!$A$2:$A$4</c:f>
-              <c:multiLvlStrCache>
-                <c:ptCount val="3"/>
-                <c:lvl>
-                  <c:pt idx="0">
-                    <c:v>2027</c:v>
-                  </c:pt>
-                  <c:pt idx="1">
-                    <c:v>2028</c:v>
-                  </c:pt>
-                  <c:pt idx="2">
-                    <c:v>2029</c:v>
-                  </c:pt>
-                </c:lvl>
-              </c:multiLvlStrCache>
-            </c:multiLvlStrRef>
-          </c:cat>
-          <c:val>
-            <c:numRef>
-              <c:f>Sheet1!$C$2:$C$4</c:f>
-              <c:numCache>
-                <c:formatCode>General</c:formatCode>
-                <c:ptCount val="3"/>
-                <c:pt idx="0">
-                  <c:v>13.264</c:v>
-                </c:pt>
-                <c:pt idx="1">
-                  <c:v>18.84</c:v>
-                </c:pt>
-                <c:pt idx="2">
-                  <c:v>26.968</c:v>
-                </c:pt>
-              </c:numCache>
-            </c:numRef>
-          </c:val>
-        </c:ser>
-        <c:dLbls>
-          <c:numFmt formatCode="0.00" sourceLinked="0"/>
-          <c:txPr>
-            <a:bodyPr/>
-            <a:lstStyle/>
-            <a:p>
-              <a:pPr>
-                <a:defRPr b="0" i="0" strike="noStrike" sz="1200" u="none">
-                  <a:solidFill>
-                    <a:srgbClr val="000000"/>
-                  </a:solidFill>
-                  <a:latin typeface="Arial"/>
-                </a:defRPr>
-              </a:pPr>
-            </a:p>
-          </c:txPr>
-          <c:showLegendKey val="0"/>
-          <c:showVal val="1"/>
-          <c:showCatName val="0"/>
-          <c:showSerName val="0"/>
-          <c:showPercent val="0"/>
-          <c:showBubbleSize val="0"/>
-          <c:showLeaderLines val="0"/>
-        </c:dLbls>
-        <c:gapWidth val="150"/>
-        <c:overlap val="0"/>
-        <c:axId val="2094734554"/>
-        <c:axId val="2094734552"/>
-        <c:axId val="2094734556"/>
-      </c:barChart>
-      <c:catAx>
-        <c:axId val="2094734554"/>
-        <c:scaling>
-          <c:orientation val="minMax"/>
-        </c:scaling>
-        <c:delete val="0"/>
-        <c:axPos val="b"/>
-        <c:numFmt formatCode="General" sourceLinked="1"/>
-        <c:majorTickMark val="out"/>
-        <c:minorTickMark val="none"/>
-        <c:tickLblPos val="low"/>
-        <c:spPr>
-          <a:ln w="12700" cap="flat">
-            <a:solidFill>
-              <a:srgbClr val="888888"/>
-            </a:solidFill>
-            <a:prstDash val="solid"/>
-            <a:round/>
-          </a:ln>
-        </c:spPr>
-        <c:txPr>
-          <a:bodyPr/>
-          <a:lstStyle/>
-          <a:p>
-            <a:pPr>
-              <a:defRPr sz="1200" b="0" i="0" u="none" strike="noStrike">
-                <a:solidFill>
-                  <a:srgbClr val="000000"/>
-                </a:solidFill>
-                <a:latin typeface="Noto Sans SC"/>
-              </a:defRPr>
-            </a:pPr>
-            <a:endParaRPr lang="en-US"/>
-          </a:p>
-        </c:txPr>
-        <c:crossAx val="2094734552"/>
-        <c:crosses val="autoZero"/>
-        <c:auto val="1"/>
-        <c:lblAlgn val="ctr"/>
-        <c:noMultiLvlLbl val="1"/>
-      </c:catAx>
-      <c:valAx>
-        <c:axId val="2094734552"/>
-        <c:scaling>
-          <c:orientation val="minMax"/>
-          <c:max val="40"/>
-          <c:min val="0"/>
-        </c:scaling>
-        <c:delete val="0"/>
-        <c:axPos val="l"/>
-        <c:majorGridlines>
-          <c:spPr>
-            <a:ln w="12700" cap="flat">
-              <a:solidFill>
-                <a:srgbClr val="888888"/>
-              </a:solidFill>
-              <a:prstDash val="solid"/>
-              <a:round/>
-            </a:ln>
-          </c:spPr>
-        </c:majorGridlines>
-        <c:numFmt formatCode="General" sourceLinked="0"/>
-        <c:majorTickMark val="out"/>
-        <c:minorTickMark val="none"/>
-        <c:tickLblPos val="nextTo"/>
-        <c:spPr>
-          <a:ln w="12700" cap="flat">
-            <a:solidFill>
-              <a:srgbClr val="888888"/>
-            </a:solidFill>
-            <a:prstDash val="solid"/>
-            <a:round/>
-          </a:ln>
-        </c:spPr>
-        <c:txPr>
-          <a:bodyPr/>
-          <a:lstStyle/>
-          <a:p>
-            <a:pPr>
-              <a:defRPr sz="1100" b="0" i="0" u="none" strike="noStrike">
-                <a:solidFill>
-                  <a:srgbClr val="000000"/>
-                </a:solidFill>
-                <a:latin typeface="Arial"/>
-              </a:defRPr>
-            </a:pPr>
-            <a:endParaRPr lang="en-US"/>
-          </a:p>
-        </c:txPr>
-        <c:crossAx val="2094734554"/>
-        <c:crosses val="autoZero"/>
-        <c:crossBetween val="between"/>
-        <c:majorUnit val="10"/>
-      </c:valAx>
-      <c:spPr>
-        <a:noFill/>
-        <a:ln>
-          <a:noFill/>
-        </a:ln>
-        <a:effectLst/>
-      </c:spPr>
-    </c:plotArea>
-    <c:legend>
-      <c:legendPos val="b"/>
-      <c:overlay val="0"/>
-      <c:txPr>
-        <a:bodyPr/>
-        <a:lstStyle/>
-        <a:p>
-          <a:pPr>
-            <a:defRPr sz="1200">      </a:defRPr>
-          </a:pPr>
-          <a:endParaRPr lang="en-US"/>
-        </a:p>
-      </c:txPr>
-    </c:legend>
-    <c:plotVisOnly val="1"/>
-    <c:dispBlanksAs val="span"/>
-  </c:chart>
-  <c:spPr>
-    <a:noFill/>
-    <a:ln>
-      <a:noFill/>
-    </a:ln>
-    <a:effectLst/>
-  </c:spPr>
-  <c:externalData r:id="rId1">
-    <c:autoUpdate val="0"/>
-  </c:externalData>
-</c:chartSpace>
 </file>
 
 <file path=ppt/notesMasters/notesMaster1.xml><?xml version="1.0" encoding="utf-8"?>
@@ -2836,7 +2469,7 @@
               <a:rPr lang="en-US" dirty="0"/>
               <a:t>讲述时间参考25秒。
 学生可先搭建故事搭档，再给它输入和结果页面，目标是生成可以独立使用的故事伙伴App。这是产品规划，当前已有页面生成和预览不等于一键独立App。Pake基于Tauri并提供桌面网页或本地前端封装，Blocky仍需集成运行内核、资源、桥接和权限；Tauri定制壳是另一二次开发路径。生成应用不默认包含商店上架，各平台分发独立完成。
-转场：以试点服务测算，规划早期交付资源
+转场：把算力成本，落实到每一类云端用户
 公开来源，2026-10-03核对：
 https://github.com/tw93/Pake
 https://v2.tauri.app/start/
@@ -3020,10 +2653,12 @@
           <a:p>
             <a:r>
               <a:rPr lang="en-US" dirty="0"/>
-              <a:t>讲述时间参考30秒。
-沿用原试点服务工作簿，不把它改称新组织版完整预算。单份贡献9240元不是净利润，仍覆盖固定费用和折旧。人工80小时乘80元，外援100元时薪时贡献7640。原模型1400元是服务情景的模型成本预留，非独立算力订阅收入或包含额度承诺。新增组织订阅收入、后台建设运营成本和独立算力业务另行测算；不能拿10.30万元作为新商业方案全部资金需求。原基准三年累计损益负1.472万元。
-转场：试点服务情景的三年经营参考
-</a:t>
+              <a:t>讲述时间参考35秒。
+表内人数是逐季增长的资源情景，期末学生2400、教师240、个人2500，共5140名平台云算力活跃用户，不是已获得客户，也不是注册或下载数。累计人月为17730、1845、17340，分别乘暂定10、50、30元人均月采购成本，24个月合计789750元。该参数不是向学生或个人销售的订阅价格，也不是厂商报价。实际执行后台按模型、输入输出、缓存及工具计量，再观察各用户月均采购成本。个人开源和BYOK/local不承担平台模型采购成本。研发按等效资源人月另算108000元。
+转场：500万元资金规划，覆盖24个月产品建设
+公开来源，2026-10-03核对：
+https://api-docs.deepseek.com/quick_start/pricing/
+https://cursor.com/pricing</a:t>
             </a:r>
             <a:endParaRPr lang="en-US" dirty="0"/>
           </a:p>
@@ -3111,9 +2746,9 @@
           <a:p>
             <a:r>
               <a:rPr lang="en-US" dirty="0"/>
-              <a:t>讲述时间参考25秒。
-直接读取finance-summary，不重写财务公式。基准2027/2028/2029收入7.2/18/32.4万元，费用13.264/18.84/26.968万元，2029单年转正但三年累计负1.472万元。三情景同时变化多个输入，用于规划范围，不是单变量因果或实际收入。
-转场：让服务范围、交付产能和资金节奏匹配
+              <a:t>讲述时间参考40秒。
+新预算替代仅支持试点服务的旧资金参考。前6月3、后18月4个等效人力资源，共90人月，综合人月2万元；这是预算能力，不是现有团队介绍。24个月现金支出3410750元，常规固定与专项支出风险预留254100元，未知厂商合作预留300000元，期末正常月支出与未覆盖算力成本的3个月储备665400元，最低追加4630250元，按50万元取整至500万元，余量369750元。现金储备1589250元由上述三类储备和取整余量组成，不重复记为费用。默认未确认收入和自有资金不抵减；不代表融资到账、估值、股权或贷款条件。设备现金与折旧、专项采购与等效人力分别核算。
+转场：把合作费用、预付额度和保证金分开管理
 </a:t>
             </a:r>
             <a:endParaRPr lang="en-US" dirty="0"/>
@@ -3202,9 +2837,9 @@
           <a:p>
             <a:r>
               <a:rPr lang="en-US" dirty="0"/>
-              <a:t>讲述时间参考25秒。
-单变量计算保持18000价格、80元时薪、1400模型、600材料和税费预算预留360元不变，新增工时降低单份贡献。100小时贡献7640与80小时外援100元时薪的结果相同但原因不同，不能混用。现金需求8.3万元已经计入假设期初2万元；额外储备2万元后追加10.3万元，没有融资承诺或到账事实。
-转场：推进小学作品、开源社区与组织方案
+              <a:t>讲述时间参考35秒。
+30万元只是现金预算判断，不是大模型厂商的报价。非退合作费、可消费额度预付与可退保证金当前输入0表示未录入条款，不表示厂商免费。已发生的非退费用以及期末占用的保证金、未消耗额度占用预留余额，预留余额最低为0。预付额度在消耗时抵扣模型采购现金，不能把充值和后续被抵扣的消耗再收两遍；保证金不进入损益。基准暂不假定返还到账，签约后按实际条款增加返还时点。
+转场：用回款与合作条款，校准资金计划
 </a:t>
             </a:r>
             <a:endParaRPr lang="en-US" dirty="0"/>
@@ -3293,9 +2928,9 @@
           <a:p>
             <a:r>
               <a:rPr lang="en-US" dirty="0"/>
-              <a:t>讲述时间参考25秒。
-已有产品成果以普通包和领域证据为依据。课程作品、指南和活动是现阶段服务建设规划。10访谈2活动1独立复用为90天目标，不当作真实采用或收入。资金用于形成可以重复交付的资产，再按教学及机构反馈推进。此页介绍产品成果和交付资产。
-转场：把积木审阅的能力，延伸到更多协作场景
+              <a:t>讲述时间参考40秒。
+80%是用户算力采购成本的回收覆盖比例，不是付费转化率、用户售价或80%利润率，也没有假定收入已经发生。默认未确认收款不压低资金需求。若当月回收80%，最低3732050元、取整400万元；相同比例延迟两月收款，最低3909650元、取整仍400万元，但现金需求增加。若厂商有100万元不可退合作费，最低5330250元，取整550万元，原30万元合作预留已被占用，不再重复加。压力金额不是实际厂商报价。模型另有额度预付100万、保证金10万、合作费30万情景，预付余量与保证金为资产。机构服务收入和正式算力售价还需合同及实际成本支持，未计入不确定收益。
+转场：按建设能力和用户规模，安排不同资金强度
 </a:t>
             </a:r>
             <a:endParaRPr lang="en-US" dirty="0"/>
@@ -3384,21 +3019,10 @@
           <a:p>
             <a:r>
               <a:rPr lang="en-US" dirty="0"/>
-              <a:t>讲述时间参考25秒。
-OPC方向共享结构审阅、修改和运行解释价值，具体办公应用没有现阶段实证，不进入财务。WorkBuddy积分与加量、Cursor订阅额度与按量、TRAE将Token成本折算用量余额、OpenCode Zen按量/BYOK/组织限额提供算力设计参照，不搬入固定价或倍率。官方来源完整URL如下。截图是既有普通包合成资料场景，规则对照是本地Runtime，教学活动是设计；不拼接成已完成课堂。
-转场：共创首批小学 Agent 创作活动
-公开来源，2026-10-03核对：
-https://scratchfoundation.org/learn/learning-library/getting-started
-https://scratchfoundation.org/learn/learning-library/teacher-accounts
-https://blocksbuilder.ai/features
-https://blocksbuilder.ai/pricing
-https://www.tynker.com/school/coding-curriculum/request
-https://www.tynker.com/classroom-school/coding-curriculum/
-https://www.moe.gov.cn/jyb_xwfb/gzdt_gzdt/s5987/202412/t20241202_1165500.html
-https://www.workbuddy.cn/docs/workbuddy/Pricing
-https://cursor.com/pricing
-https://www.trae.ai/pricing
-https://opencode.ai/docs/zen/</a:t>
+              <a:t>讲述时间参考35秒。
+三类均为资源规划情景，不是已经获得用户或融资，也不是三年收入预测。精简推进前6月2人后18月3人、综合人月1.6万元，用户为基准40%、人均Token成本为60%、其他支出75%；最低2389225元取整250万元。基准最低4630250元取整500万元。高用量前6月4人后18月5人、综合人月2.4万元，云用户为2倍、人均算力2.5倍、其他支出1.5倍、合作预留80万元及风险15%；最低11512055元取整1200万元。不能把这些多输入变化解释成单变量因果。实际扩大用量时，要同步调整订阅收入、额度、合同与现金保障。
+转场：推进小学作品、开源社区与组织方案
+</a:t>
             </a:r>
             <a:endParaRPr lang="en-US" dirty="0"/>
           </a:p>
@@ -3487,8 +3111,8 @@
             <a:r>
               <a:rPr lang="en-US" dirty="0"/>
               <a:t>讲述时间参考25秒。
-具体邀请是教师带来一个教学目标，并提供设备和组织机会，共同准备原作品与任务，开展可记录的创作活动，收集作品与过程，再形成教师可复用资料和机构合作范围。这是下一阶段合作诉求，不是融资到账或签约成果。谢谢各位。
-结束：共创邀请与下一步行动。
+已有产品成果以普通包和领域证据为依据。课程作品、指南和活动是现阶段服务建设规划。10访谈2活动1独立复用为90天目标，不当作真实采用或收入。资金用于形成可以重复交付的资产，再按教学及机构反馈推进。此页介绍产品成果和交付资产。
+转场：把积木审阅的能力，延伸到更多协作场景
 </a:t>
             </a:r>
             <a:endParaRPr lang="en-US" dirty="0"/>
@@ -3513,6 +3137,199 @@
             <a:fld id="{F7021451-1387-4CA6-816F-3879F97B5CBC}" type="slidenum">
               <a:rPr lang="en-US"/>
               <a:t>35</a:t>
+            </a:fld>
+            <a:endParaRPr lang="en-US"/>
+          </a:p>
+        </p:txBody>
+      </p:sp>
+    </p:spTree>
+    <p:extLst>
+      <p:ext uri="{BB962C8B-B14F-4D97-AF65-F5344CB8AC3E}">
+        <p14:creationId xmlns:p14="http://schemas.microsoft.com/office/powerpoint/2010/main" val="1024086991"/>
+      </p:ext>
+    </p:extLst>
+  </p:cSld>
+  <p:clrMapOvr>
+    <a:masterClrMapping/>
+  </p:clrMapOvr>
+</p:notes>
+</file>
+
+<file path=ppt/notesSlides/notesSlide36.xml><?xml version="1.0" encoding="utf-8"?>
+<p:notes xmlns:a="http://schemas.openxmlformats.org/drawingml/2006/main" xmlns:r="http://schemas.openxmlformats.org/officeDocument/2006/relationships" xmlns:p="http://schemas.openxmlformats.org/presentationml/2006/main">
+  <p:cSld>
+    <p:spTree>
+      <p:nvGrpSpPr>
+        <p:cNvPr id="1" name=""/>
+        <p:cNvGrpSpPr/>
+        <p:nvPr/>
+      </p:nvGrpSpPr>
+      <p:grpSpPr>
+        <a:xfrm>
+          <a:off x="0" y="0"/>
+          <a:ext cx="0" cy="0"/>
+          <a:chOff x="0" y="0"/>
+          <a:chExt cx="0" cy="0"/>
+        </a:xfrm>
+      </p:grpSpPr>
+      <p:sp>
+        <p:nvSpPr>
+          <p:cNvPr id="2" name="Slide Image Placeholder 1"/>
+          <p:cNvSpPr>
+            <a:spLocks noGrp="1" noRot="1" noChangeAspect="1"/>
+          </p:cNvSpPr>
+          <p:nvPr>
+            <p:ph type="sldImg"/>
+          </p:nvPr>
+        </p:nvSpPr>
+        <p:spPr/>
+      </p:sp>
+      <p:sp>
+        <p:nvSpPr>
+          <p:cNvPr id="3" name="Notes Placeholder 2"/>
+          <p:cNvSpPr>
+            <a:spLocks noGrp="1"/>
+          </p:cNvSpPr>
+          <p:nvPr>
+            <p:ph type="body" idx="1"/>
+          </p:nvPr>
+        </p:nvSpPr>
+        <p:spPr/>
+        <p:txBody>
+          <a:bodyPr/>
+          <a:lstStyle/>
+          <a:p>
+            <a:r>
+              <a:rPr lang="en-US" dirty="0"/>
+              <a:t>讲述时间参考25秒。
+OPC方向共享结构审阅、修改和运行解释价值，具体办公应用没有现阶段实证，不进入财务。WorkBuddy积分与加量、Cursor订阅额度与按量、TRAE将Token成本折算用量余额、OpenCode Zen按量/BYOK/组织限额提供算力设计参照，不搬入固定价或倍率。官方来源完整URL如下。截图是既有普通包合成资料场景，规则对照是本地Runtime，教学活动是设计；不拼接成已完成课堂。
+转场：共创首批小学 Agent 创作活动
+公开来源，2026-10-03核对：
+https://scratchfoundation.org/learn/learning-library/getting-started
+https://scratchfoundation.org/learn/learning-library/teacher-accounts
+https://blocksbuilder.ai/features
+https://blocksbuilder.ai/pricing
+https://www.tynker.com/school/coding-curriculum/request
+https://www.tynker.com/classroom-school/coding-curriculum/
+https://www.moe.gov.cn/jyb_xwfb/gzdt_gzdt/s5987/202412/t20241202_1165500.html
+https://www.workbuddy.cn/docs/workbuddy/Pricing
+https://cursor.com/pricing
+https://www.trae.ai/pricing
+https://opencode.ai/docs/zen/</a:t>
+            </a:r>
+            <a:endParaRPr lang="en-US" dirty="0"/>
+          </a:p>
+        </p:txBody>
+      </p:sp>
+      <p:sp>
+        <p:nvSpPr>
+          <p:cNvPr id="4" name="Slide Number Placeholder 3"/>
+          <p:cNvSpPr>
+            <a:spLocks noGrp="1"/>
+          </p:cNvSpPr>
+          <p:nvPr>
+            <p:ph type="sldNum" sz="quarter" idx="10"/>
+          </p:nvPr>
+        </p:nvSpPr>
+        <p:spPr/>
+        <p:txBody>
+          <a:bodyPr/>
+          <a:lstStyle/>
+          <a:p>
+            <a:fld id="{F7021451-1387-4CA6-816F-3879F97B5CBC}" type="slidenum">
+              <a:rPr lang="en-US"/>
+              <a:t>36</a:t>
+            </a:fld>
+            <a:endParaRPr lang="en-US"/>
+          </a:p>
+        </p:txBody>
+      </p:sp>
+    </p:spTree>
+    <p:extLst>
+      <p:ext uri="{BB962C8B-B14F-4D97-AF65-F5344CB8AC3E}">
+        <p14:creationId xmlns:p14="http://schemas.microsoft.com/office/powerpoint/2010/main" val="1024086991"/>
+      </p:ext>
+    </p:extLst>
+  </p:cSld>
+  <p:clrMapOvr>
+    <a:masterClrMapping/>
+  </p:clrMapOvr>
+</p:notes>
+</file>
+
+<file path=ppt/notesSlides/notesSlide37.xml><?xml version="1.0" encoding="utf-8"?>
+<p:notes xmlns:a="http://schemas.openxmlformats.org/drawingml/2006/main" xmlns:r="http://schemas.openxmlformats.org/officeDocument/2006/relationships" xmlns:p="http://schemas.openxmlformats.org/presentationml/2006/main">
+  <p:cSld>
+    <p:spTree>
+      <p:nvGrpSpPr>
+        <p:cNvPr id="1" name=""/>
+        <p:cNvGrpSpPr/>
+        <p:nvPr/>
+      </p:nvGrpSpPr>
+      <p:grpSpPr>
+        <a:xfrm>
+          <a:off x="0" y="0"/>
+          <a:ext cx="0" cy="0"/>
+          <a:chOff x="0" y="0"/>
+          <a:chExt cx="0" cy="0"/>
+        </a:xfrm>
+      </p:grpSpPr>
+      <p:sp>
+        <p:nvSpPr>
+          <p:cNvPr id="2" name="Slide Image Placeholder 1"/>
+          <p:cNvSpPr>
+            <a:spLocks noGrp="1" noRot="1" noChangeAspect="1"/>
+          </p:cNvSpPr>
+          <p:nvPr>
+            <p:ph type="sldImg"/>
+          </p:nvPr>
+        </p:nvSpPr>
+        <p:spPr/>
+      </p:sp>
+      <p:sp>
+        <p:nvSpPr>
+          <p:cNvPr id="3" name="Notes Placeholder 2"/>
+          <p:cNvSpPr>
+            <a:spLocks noGrp="1"/>
+          </p:cNvSpPr>
+          <p:nvPr>
+            <p:ph type="body" idx="1"/>
+          </p:nvPr>
+        </p:nvSpPr>
+        <p:spPr/>
+        <p:txBody>
+          <a:bodyPr/>
+          <a:lstStyle/>
+          <a:p>
+            <a:r>
+              <a:rPr lang="en-US" dirty="0"/>
+              <a:t>讲述时间参考25秒。
+具体邀请是教师带来一个教学目标，并提供设备和组织机会，共同准备原作品与任务，开展可记录的创作活动，收集作品与过程，再形成教师可复用资料和机构合作范围。这是下一阶段合作诉求，不是融资到账或签约成果。谢谢各位。
+结束：共创邀请与下一步行动。
+</a:t>
+            </a:r>
+            <a:endParaRPr lang="en-US" dirty="0"/>
+          </a:p>
+        </p:txBody>
+      </p:sp>
+      <p:sp>
+        <p:nvSpPr>
+          <p:cNvPr id="4" name="Slide Number Placeholder 3"/>
+          <p:cNvSpPr>
+            <a:spLocks noGrp="1"/>
+          </p:cNvSpPr>
+          <p:nvPr>
+            <p:ph type="sldNum" sz="quarter" idx="10"/>
+          </p:nvPr>
+        </p:nvSpPr>
+        <p:spPr/>
+        <p:txBody>
+          <a:bodyPr/>
+          <a:lstStyle/>
+          <a:p>
+            <a:fld id="{F7021451-1387-4CA6-816F-3879F97B5CBC}" type="slidenum">
+              <a:rPr lang="en-US"/>
+              <a:t>37</a:t>
             </a:fld>
             <a:endParaRPr lang="en-US"/>
           </a:p>
@@ -31476,7 +31293,7 @@
                 <a:ea typeface="Noto Sans SC" pitchFamily="34" charset="-122"/>
                 <a:cs typeface="Noto Sans SC" pitchFamily="34" charset="-120"/>
               </a:rPr>
-              <a:t>29 / 经营参考</a:t>
+              <a:t>29 / 按人头算力</a:t>
             </a:r>
             <a:endParaRPr lang="en-US" sz="1100" dirty="0"/>
           </a:p>
@@ -31517,7 +31334,7 @@
                 <a:ea typeface="Noto Sans SC" pitchFamily="34" charset="-122"/>
                 <a:cs typeface="Noto Sans SC" pitchFamily="34" charset="-120"/>
               </a:rPr>
-              <a:t>以试点服务测算，规划早期交付资源</a:t>
+              <a:t>把算力成本，落实到每一类云端用户</a:t>
             </a:r>
             <a:endParaRPr lang="en-US" sz="3000" dirty="0"/>
           </a:p>
@@ -31558,7 +31375,7 @@
                 <a:ea typeface="Noto Sans SC" pitchFamily="34" charset="-122"/>
                 <a:cs typeface="Noto Sans SC" pitchFamily="34" charset="-120"/>
               </a:rPr>
-              <a:t>人民币 · 原试点服务情景；组织后台与独立算力订阅另行测算。</a:t>
+              <a:t>2026-11至2028-10 · 24个月规划 · 人均月度采购成本为预算参数。</a:t>
             </a:r>
             <a:endParaRPr lang="en-US" sz="1500" dirty="0"/>
           </a:p>
@@ -31684,7 +31501,7 @@
           </p:nvPr>
         </p:nvGraphicFramePr>
         <p:xfrm>
-          <a:off x="594360" y="2286000"/>
+          <a:off x="594360" y="2148840"/>
           <a:ext cx="10972800" cy="914400"/>
         </p:xfrm>
         <a:graphic>
@@ -31692,11 +31509,13 @@
             <a:tbl>
               <a:tblPr/>
               <a:tblGrid>
-                <a:gridCol w="4023360"/>
-                <a:gridCol w="1920240"/>
-                <a:gridCol w="5029200"/>
+                <a:gridCol w="1645920"/>
+                <a:gridCol w="2103120"/>
+                <a:gridCol w="2103120"/>
+                <a:gridCol w="2377440"/>
+                <a:gridCol w="2743200"/>
               </a:tblGrid>
-              <a:tr h="649224">
+              <a:tr h="676656">
                 <a:tc>
                   <a:txBody>
                     <a:bodyPr/>
@@ -31706,7 +31525,7 @@
                         <a:buNone/>
                       </a:pPr>
                       <a:r>
-                        <a:rPr lang="en-US" sz="1900" b="1" dirty="0">
+                        <a:rPr lang="en-US" sz="1800" b="1" dirty="0">
                           <a:solidFill>
                             <a:srgbClr val="007C73"/>
                           </a:solidFill>
@@ -31714,9 +31533,9 @@
                           <a:ea typeface="Noto Sans SC" pitchFamily="34" charset="-122"/>
                           <a:cs typeface="Noto Sans SC" pitchFamily="34" charset="-120"/>
                         </a:rPr>
-                        <a:t>单份规划</a:t>
+                        <a:t>云算力用户</a:t>
                       </a:r>
-                      <a:endParaRPr lang="en-US" sz="1900" dirty="0">
+                      <a:endParaRPr lang="en-US" sz="1800" dirty="0">
                         <a:latin typeface="Noto Sans SC" charset="0"/>
                         <a:ea typeface="Noto Sans SC" charset="0"/>
                         <a:cs typeface="Noto Sans SC" charset="0"/>
@@ -31774,7 +31593,7 @@
                         <a:buNone/>
                       </a:pPr>
                       <a:r>
-                        <a:rPr lang="en-US" sz="1900" b="1" dirty="0">
+                        <a:rPr lang="en-US" sz="1800" b="1" dirty="0">
                           <a:solidFill>
                             <a:srgbClr val="007C73"/>
                           </a:solidFill>
@@ -31782,9 +31601,9 @@
                           <a:ea typeface="Noto Sans SC" pitchFamily="34" charset="-122"/>
                           <a:cs typeface="Noto Sans SC" pitchFamily="34" charset="-120"/>
                         </a:rPr>
-                        <a:t>金额（元）</a:t>
+                        <a:t>期末活跃人头</a:t>
                       </a:r>
-                      <a:endParaRPr lang="en-US" sz="1900" dirty="0">
+                      <a:endParaRPr lang="en-US" sz="1800" dirty="0">
                         <a:latin typeface="Noto Sans SC" charset="0"/>
                         <a:ea typeface="Noto Sans SC" charset="0"/>
                         <a:cs typeface="Noto Sans SC" charset="0"/>
@@ -31842,7 +31661,7 @@
                         <a:buNone/>
                       </a:pPr>
                       <a:r>
-                        <a:rPr lang="en-US" sz="1900" b="1" dirty="0">
+                        <a:rPr lang="en-US" sz="1800" b="1" dirty="0">
                           <a:solidFill>
                             <a:srgbClr val="007C73"/>
                           </a:solidFill>
@@ -31850,79 +31669,9 @@
                           <a:ea typeface="Noto Sans SC" pitchFamily="34" charset="-122"/>
                           <a:cs typeface="Noto Sans SC" pitchFamily="34" charset="-120"/>
                         </a:rPr>
-                        <a:t>计算依据</a:t>
+                        <a:t>累计人月</a:t>
                       </a:r>
-                      <a:endParaRPr lang="en-US" sz="1900" dirty="0">
-                        <a:latin typeface="Noto Sans SC" charset="0"/>
-                        <a:ea typeface="Noto Sans SC" charset="0"/>
-                        <a:cs typeface="Noto Sans SC" charset="0"/>
-                      </a:endParaRPr>
-                    </a:p>
-                  </a:txBody>
-                  <a:tcPr marL="109728" marR="109728" marT="109728" marB="109728" anchor="ctr">
-                    <a:lnL w="8890" cap="flat" cmpd="sng" algn="ctr">
-                      <a:solidFill>
-                        <a:srgbClr val="D8E0DA"/>
-                      </a:solidFill>
-                      <a:prstDash val="solid"/>
-                      <a:round/>
-                      <a:headEnd type="none" w="med" len="med"/>
-                      <a:tailEnd type="none" w="med" len="med"/>
-                    </a:lnL>
-                    <a:lnR w="8890" cap="flat" cmpd="sng" algn="ctr">
-                      <a:solidFill>
-                        <a:srgbClr val="D8E0DA"/>
-                      </a:solidFill>
-                      <a:prstDash val="solid"/>
-                      <a:round/>
-                      <a:headEnd type="none" w="med" len="med"/>
-                      <a:tailEnd type="none" w="med" len="med"/>
-                    </a:lnR>
-                    <a:lnT w="8890" cap="flat" cmpd="sng" algn="ctr">
-                      <a:solidFill>
-                        <a:srgbClr val="D8E0DA"/>
-                      </a:solidFill>
-                      <a:prstDash val="solid"/>
-                      <a:round/>
-                      <a:headEnd type="none" w="med" len="med"/>
-                      <a:tailEnd type="none" w="med" len="med"/>
-                    </a:lnT>
-                    <a:lnB w="8890" cap="flat" cmpd="sng" algn="ctr">
-                      <a:solidFill>
-                        <a:srgbClr val="D8E0DA"/>
-                      </a:solidFill>
-                      <a:prstDash val="solid"/>
-                      <a:round/>
-                      <a:headEnd type="none" w="med" len="med"/>
-                      <a:tailEnd type="none" w="med" len="med"/>
-                    </a:lnB>
-                    <a:solidFill>
-                      <a:srgbClr val="FFFFFF"/>
-                    </a:solidFill>
-                  </a:tcPr>
-                </a:tc>
-              </a:tr>
-              <a:tr h="649224">
-                <a:tc>
-                  <a:txBody>
-                    <a:bodyPr/>
-                    <a:lstStyle/>
-                    <a:p>
-                      <a:pPr indent="0" marL="0">
-                        <a:buNone/>
-                      </a:pPr>
-                      <a:r>
-                        <a:rPr lang="en-US" sz="1900" dirty="0">
-                          <a:solidFill>
-                            <a:srgbClr val="172C30"/>
-                          </a:solidFill>
-                          <a:latin typeface="Noto Sans SC" pitchFamily="34" charset="0"/>
-                          <a:ea typeface="Noto Sans SC" pitchFamily="34" charset="-122"/>
-                          <a:cs typeface="Noto Sans SC" pitchFamily="34" charset="-120"/>
-                        </a:rPr>
-                        <a:t>服务均价</a:t>
-                      </a:r>
-                      <a:endParaRPr lang="en-US" sz="1900" dirty="0">
+                      <a:endParaRPr lang="en-US" sz="1800" dirty="0">
                         <a:latin typeface="Noto Sans SC" charset="0"/>
                         <a:ea typeface="Noto Sans SC" charset="0"/>
                         <a:cs typeface="Noto Sans SC" charset="0"/>
@@ -31980,17 +31729,17 @@
                         <a:buNone/>
                       </a:pPr>
                       <a:r>
-                        <a:rPr lang="en-US" sz="1900" dirty="0">
+                        <a:rPr lang="en-US" sz="1800" b="1" dirty="0">
                           <a:solidFill>
-                            <a:srgbClr val="172C30"/>
+                            <a:srgbClr val="007C73"/>
                           </a:solidFill>
                           <a:latin typeface="Noto Sans SC" pitchFamily="34" charset="0"/>
                           <a:ea typeface="Noto Sans SC" pitchFamily="34" charset="-122"/>
                           <a:cs typeface="Noto Sans SC" pitchFamily="34" charset="-120"/>
                         </a:rPr>
-                        <a:t>18,000</a:t>
+                        <a:t>人均月成本（元）</a:t>
                       </a:r>
-                      <a:endParaRPr lang="en-US" sz="1900" dirty="0">
+                      <a:endParaRPr lang="en-US" sz="1800" dirty="0">
                         <a:latin typeface="Noto Sans SC" charset="0"/>
                         <a:ea typeface="Noto Sans SC" charset="0"/>
                         <a:cs typeface="Noto Sans SC" charset="0"/>
@@ -32048,17 +31797,17 @@
                         <a:buNone/>
                       </a:pPr>
                       <a:r>
-                        <a:rPr lang="en-US" sz="1900" dirty="0">
+                        <a:rPr lang="en-US" sz="1800" b="1" dirty="0">
                           <a:solidFill>
-                            <a:srgbClr val="172C30"/>
+                            <a:srgbClr val="007C73"/>
                           </a:solidFill>
                           <a:latin typeface="Noto Sans SC" pitchFamily="34" charset="0"/>
                           <a:ea typeface="Noto Sans SC" pitchFamily="34" charset="-122"/>
                           <a:cs typeface="Noto Sans SC" pitchFamily="34" charset="-120"/>
                         </a:rPr>
-                        <a:t>按服务范围洽谈的经营假设</a:t>
+                        <a:t>24月成本（万元）</a:t>
                       </a:r>
-                      <a:endParaRPr lang="en-US" sz="1900" dirty="0">
+                      <a:endParaRPr lang="en-US" sz="1800" dirty="0">
                         <a:latin typeface="Noto Sans SC" charset="0"/>
                         <a:ea typeface="Noto Sans SC" charset="0"/>
                         <a:cs typeface="Noto Sans SC" charset="0"/>
@@ -32108,7 +31857,7 @@
                   </a:tcPr>
                 </a:tc>
               </a:tr>
-              <a:tr h="649224">
+              <a:tr h="676656">
                 <a:tc>
                   <a:txBody>
                     <a:bodyPr/>
@@ -32118,7 +31867,7 @@
                         <a:buNone/>
                       </a:pPr>
                       <a:r>
-                        <a:rPr lang="en-US" sz="1900" dirty="0">
+                        <a:rPr lang="en-US" sz="1800" dirty="0">
                           <a:solidFill>
                             <a:srgbClr val="172C30"/>
                           </a:solidFill>
@@ -32126,9 +31875,9 @@
                           <a:ea typeface="Noto Sans SC" pitchFamily="34" charset="-122"/>
                           <a:cs typeface="Noto Sans SC" pitchFamily="34" charset="-120"/>
                         </a:rPr>
-                        <a:t>交付人工</a:t>
+                        <a:t>学生</a:t>
                       </a:r>
-                      <a:endParaRPr lang="en-US" sz="1900" dirty="0">
+                      <a:endParaRPr lang="en-US" sz="1800" dirty="0">
                         <a:latin typeface="Noto Sans SC" charset="0"/>
                         <a:ea typeface="Noto Sans SC" charset="0"/>
                         <a:cs typeface="Noto Sans SC" charset="0"/>
@@ -32186,7 +31935,7 @@
                         <a:buNone/>
                       </a:pPr>
                       <a:r>
-                        <a:rPr lang="en-US" sz="1900" dirty="0">
+                        <a:rPr lang="en-US" sz="1800" dirty="0">
                           <a:solidFill>
                             <a:srgbClr val="172C30"/>
                           </a:solidFill>
@@ -32194,9 +31943,9 @@
                           <a:ea typeface="Noto Sans SC" pitchFamily="34" charset="-122"/>
                           <a:cs typeface="Noto Sans SC" pitchFamily="34" charset="-120"/>
                         </a:rPr>
-                        <a:t>6,400</a:t>
+                        <a:t>2,400</a:t>
                       </a:r>
-                      <a:endParaRPr lang="en-US" sz="1900" dirty="0">
+                      <a:endParaRPr lang="en-US" sz="1800" dirty="0">
                         <a:latin typeface="Noto Sans SC" charset="0"/>
                         <a:ea typeface="Noto Sans SC" charset="0"/>
                         <a:cs typeface="Noto Sans SC" charset="0"/>
@@ -32254,7 +32003,7 @@
                         <a:buNone/>
                       </a:pPr>
                       <a:r>
-                        <a:rPr lang="en-US" sz="1900" dirty="0">
+                        <a:rPr lang="en-US" sz="1800" dirty="0">
                           <a:solidFill>
                             <a:srgbClr val="172C30"/>
                           </a:solidFill>
@@ -32262,79 +32011,9 @@
                           <a:ea typeface="Noto Sans SC" pitchFamily="34" charset="-122"/>
                           <a:cs typeface="Noto Sans SC" pitchFamily="34" charset="-120"/>
                         </a:rPr>
-                        <a:t>80小时 × 80元/小时</a:t>
+                        <a:t>17,730</a:t>
                       </a:r>
-                      <a:endParaRPr lang="en-US" sz="1900" dirty="0">
-                        <a:latin typeface="Noto Sans SC" charset="0"/>
-                        <a:ea typeface="Noto Sans SC" charset="0"/>
-                        <a:cs typeface="Noto Sans SC" charset="0"/>
-                      </a:endParaRPr>
-                    </a:p>
-                  </a:txBody>
-                  <a:tcPr marL="109728" marR="109728" marT="109728" marB="109728" anchor="ctr">
-                    <a:lnL w="8890" cap="flat" cmpd="sng" algn="ctr">
-                      <a:solidFill>
-                        <a:srgbClr val="D8E0DA"/>
-                      </a:solidFill>
-                      <a:prstDash val="solid"/>
-                      <a:round/>
-                      <a:headEnd type="none" w="med" len="med"/>
-                      <a:tailEnd type="none" w="med" len="med"/>
-                    </a:lnL>
-                    <a:lnR w="8890" cap="flat" cmpd="sng" algn="ctr">
-                      <a:solidFill>
-                        <a:srgbClr val="D8E0DA"/>
-                      </a:solidFill>
-                      <a:prstDash val="solid"/>
-                      <a:round/>
-                      <a:headEnd type="none" w="med" len="med"/>
-                      <a:tailEnd type="none" w="med" len="med"/>
-                    </a:lnR>
-                    <a:lnT w="8890" cap="flat" cmpd="sng" algn="ctr">
-                      <a:solidFill>
-                        <a:srgbClr val="D8E0DA"/>
-                      </a:solidFill>
-                      <a:prstDash val="solid"/>
-                      <a:round/>
-                      <a:headEnd type="none" w="med" len="med"/>
-                      <a:tailEnd type="none" w="med" len="med"/>
-                    </a:lnT>
-                    <a:lnB w="8890" cap="flat" cmpd="sng" algn="ctr">
-                      <a:solidFill>
-                        <a:srgbClr val="D8E0DA"/>
-                      </a:solidFill>
-                      <a:prstDash val="solid"/>
-                      <a:round/>
-                      <a:headEnd type="none" w="med" len="med"/>
-                      <a:tailEnd type="none" w="med" len="med"/>
-                    </a:lnB>
-                    <a:solidFill>
-                      <a:srgbClr val="FFFFFF"/>
-                    </a:solidFill>
-                  </a:tcPr>
-                </a:tc>
-              </a:tr>
-              <a:tr h="649224">
-                <a:tc>
-                  <a:txBody>
-                    <a:bodyPr/>
-                    <a:lstStyle/>
-                    <a:p>
-                      <a:pPr indent="0" marL="0">
-                        <a:buNone/>
-                      </a:pPr>
-                      <a:r>
-                        <a:rPr lang="en-US" sz="1900" dirty="0">
-                          <a:solidFill>
-                            <a:srgbClr val="172C30"/>
-                          </a:solidFill>
-                          <a:latin typeface="Noto Sans SC" pitchFamily="34" charset="0"/>
-                          <a:ea typeface="Noto Sans SC" pitchFamily="34" charset="-122"/>
-                          <a:cs typeface="Noto Sans SC" pitchFamily="34" charset="-120"/>
-                        </a:rPr>
-                        <a:t>模型、材料与税费预算</a:t>
-                      </a:r>
-                      <a:endParaRPr lang="en-US" sz="1900" dirty="0">
+                      <a:endParaRPr lang="en-US" sz="1800" dirty="0">
                         <a:latin typeface="Noto Sans SC" charset="0"/>
                         <a:ea typeface="Noto Sans SC" charset="0"/>
                         <a:cs typeface="Noto Sans SC" charset="0"/>
@@ -32392,7 +32071,7 @@
                         <a:buNone/>
                       </a:pPr>
                       <a:r>
-                        <a:rPr lang="en-US" sz="1900" dirty="0">
+                        <a:rPr lang="en-US" sz="1800" dirty="0">
                           <a:solidFill>
                             <a:srgbClr val="172C30"/>
                           </a:solidFill>
@@ -32400,9 +32079,9 @@
                           <a:ea typeface="Noto Sans SC" pitchFamily="34" charset="-122"/>
                           <a:cs typeface="Noto Sans SC" pitchFamily="34" charset="-120"/>
                         </a:rPr>
-                        <a:t>2,360</a:t>
+                        <a:t>10</a:t>
                       </a:r>
-                      <a:endParaRPr lang="en-US" sz="1900" dirty="0">
+                      <a:endParaRPr lang="en-US" sz="1800" dirty="0">
                         <a:latin typeface="Noto Sans SC" charset="0"/>
                         <a:ea typeface="Noto Sans SC" charset="0"/>
                         <a:cs typeface="Noto Sans SC" charset="0"/>
@@ -32460,7 +32139,7 @@
                         <a:buNone/>
                       </a:pPr>
                       <a:r>
-                        <a:rPr lang="en-US" sz="1900" dirty="0">
+                        <a:rPr lang="en-US" sz="1800" dirty="0">
                           <a:solidFill>
                             <a:srgbClr val="172C30"/>
                           </a:solidFill>
@@ -32468,9 +32147,9 @@
                           <a:ea typeface="Noto Sans SC" pitchFamily="34" charset="-122"/>
                           <a:cs typeface="Noto Sans SC" pitchFamily="34" charset="-120"/>
                         </a:rPr>
-                        <a:t>1,400 + 600 + 18,000 × 2%</a:t>
+                        <a:t>17.730</a:t>
                       </a:r>
-                      <a:endParaRPr lang="en-US" sz="1900" dirty="0">
+                      <a:endParaRPr lang="en-US" sz="1800" dirty="0">
                         <a:latin typeface="Noto Sans SC" charset="0"/>
                         <a:ea typeface="Noto Sans SC" charset="0"/>
                         <a:cs typeface="Noto Sans SC" charset="0"/>
@@ -32520,7 +32199,7 @@
                   </a:tcPr>
                 </a:tc>
               </a:tr>
-              <a:tr h="649224">
+              <a:tr h="676656">
                 <a:tc>
                   <a:txBody>
                     <a:bodyPr/>
@@ -32530,7 +32209,7 @@
                         <a:buNone/>
                       </a:pPr>
                       <a:r>
-                        <a:rPr lang="en-US" sz="1900" dirty="0">
+                        <a:rPr lang="en-US" sz="1800" dirty="0">
                           <a:solidFill>
                             <a:srgbClr val="172C30"/>
                           </a:solidFill>
@@ -32538,9 +32217,9 @@
                           <a:ea typeface="Noto Sans SC" pitchFamily="34" charset="-122"/>
                           <a:cs typeface="Noto Sans SC" pitchFamily="34" charset="-120"/>
                         </a:rPr>
-                        <a:t>覆盖固定费用前的贡献</a:t>
+                        <a:t>教师</a:t>
                       </a:r>
-                      <a:endParaRPr lang="en-US" sz="1900" dirty="0">
+                      <a:endParaRPr lang="en-US" sz="1800" dirty="0">
                         <a:latin typeface="Noto Sans SC" charset="0"/>
                         <a:ea typeface="Noto Sans SC" charset="0"/>
                         <a:cs typeface="Noto Sans SC" charset="0"/>
@@ -32598,7 +32277,7 @@
                         <a:buNone/>
                       </a:pPr>
                       <a:r>
-                        <a:rPr lang="en-US" sz="1900" dirty="0">
+                        <a:rPr lang="en-US" sz="1800" dirty="0">
                           <a:solidFill>
                             <a:srgbClr val="172C30"/>
                           </a:solidFill>
@@ -32606,9 +32285,9 @@
                           <a:ea typeface="Noto Sans SC" pitchFamily="34" charset="-122"/>
                           <a:cs typeface="Noto Sans SC" pitchFamily="34" charset="-120"/>
                         </a:rPr>
-                        <a:t>9,240</a:t>
+                        <a:t>240</a:t>
                       </a:r>
-                      <a:endParaRPr lang="en-US" sz="1900" dirty="0">
+                      <a:endParaRPr lang="en-US" sz="1800" dirty="0">
                         <a:latin typeface="Noto Sans SC" charset="0"/>
                         <a:ea typeface="Noto Sans SC" charset="0"/>
                         <a:cs typeface="Noto Sans SC" charset="0"/>
@@ -32666,7 +32345,7 @@
                         <a:buNone/>
                       </a:pPr>
                       <a:r>
-                        <a:rPr lang="en-US" sz="1900" dirty="0">
+                        <a:rPr lang="en-US" sz="1800" dirty="0">
                           <a:solidFill>
                             <a:srgbClr val="172C30"/>
                           </a:solidFill>
@@ -32674,9 +32353,487 @@
                           <a:ea typeface="Noto Sans SC" pitchFamily="34" charset="-122"/>
                           <a:cs typeface="Noto Sans SC" pitchFamily="34" charset="-120"/>
                         </a:rPr>
-                        <a:t>18,000 − 6,400 − 2,360</a:t>
+                        <a:t>1,845</a:t>
                       </a:r>
-                      <a:endParaRPr lang="en-US" sz="1900" dirty="0">
+                      <a:endParaRPr lang="en-US" sz="1800" dirty="0">
+                        <a:latin typeface="Noto Sans SC" charset="0"/>
+                        <a:ea typeface="Noto Sans SC" charset="0"/>
+                        <a:cs typeface="Noto Sans SC" charset="0"/>
+                      </a:endParaRPr>
+                    </a:p>
+                  </a:txBody>
+                  <a:tcPr marL="109728" marR="109728" marT="109728" marB="109728" anchor="ctr">
+                    <a:lnL w="8890" cap="flat" cmpd="sng" algn="ctr">
+                      <a:solidFill>
+                        <a:srgbClr val="D8E0DA"/>
+                      </a:solidFill>
+                      <a:prstDash val="solid"/>
+                      <a:round/>
+                      <a:headEnd type="none" w="med" len="med"/>
+                      <a:tailEnd type="none" w="med" len="med"/>
+                    </a:lnL>
+                    <a:lnR w="8890" cap="flat" cmpd="sng" algn="ctr">
+                      <a:solidFill>
+                        <a:srgbClr val="D8E0DA"/>
+                      </a:solidFill>
+                      <a:prstDash val="solid"/>
+                      <a:round/>
+                      <a:headEnd type="none" w="med" len="med"/>
+                      <a:tailEnd type="none" w="med" len="med"/>
+                    </a:lnR>
+                    <a:lnT w="8890" cap="flat" cmpd="sng" algn="ctr">
+                      <a:solidFill>
+                        <a:srgbClr val="D8E0DA"/>
+                      </a:solidFill>
+                      <a:prstDash val="solid"/>
+                      <a:round/>
+                      <a:headEnd type="none" w="med" len="med"/>
+                      <a:tailEnd type="none" w="med" len="med"/>
+                    </a:lnT>
+                    <a:lnB w="8890" cap="flat" cmpd="sng" algn="ctr">
+                      <a:solidFill>
+                        <a:srgbClr val="D8E0DA"/>
+                      </a:solidFill>
+                      <a:prstDash val="solid"/>
+                      <a:round/>
+                      <a:headEnd type="none" w="med" len="med"/>
+                      <a:tailEnd type="none" w="med" len="med"/>
+                    </a:lnB>
+                    <a:solidFill>
+                      <a:srgbClr val="FFFFFF"/>
+                    </a:solidFill>
+                  </a:tcPr>
+                </a:tc>
+                <a:tc>
+                  <a:txBody>
+                    <a:bodyPr/>
+                    <a:lstStyle/>
+                    <a:p>
+                      <a:pPr indent="0" marL="0">
+                        <a:buNone/>
+                      </a:pPr>
+                      <a:r>
+                        <a:rPr lang="en-US" sz="1800" dirty="0">
+                          <a:solidFill>
+                            <a:srgbClr val="172C30"/>
+                          </a:solidFill>
+                          <a:latin typeface="Noto Sans SC" pitchFamily="34" charset="0"/>
+                          <a:ea typeface="Noto Sans SC" pitchFamily="34" charset="-122"/>
+                          <a:cs typeface="Noto Sans SC" pitchFamily="34" charset="-120"/>
+                        </a:rPr>
+                        <a:t>50</a:t>
+                      </a:r>
+                      <a:endParaRPr lang="en-US" sz="1800" dirty="0">
+                        <a:latin typeface="Noto Sans SC" charset="0"/>
+                        <a:ea typeface="Noto Sans SC" charset="0"/>
+                        <a:cs typeface="Noto Sans SC" charset="0"/>
+                      </a:endParaRPr>
+                    </a:p>
+                  </a:txBody>
+                  <a:tcPr marL="109728" marR="109728" marT="109728" marB="109728" anchor="ctr">
+                    <a:lnL w="8890" cap="flat" cmpd="sng" algn="ctr">
+                      <a:solidFill>
+                        <a:srgbClr val="D8E0DA"/>
+                      </a:solidFill>
+                      <a:prstDash val="solid"/>
+                      <a:round/>
+                      <a:headEnd type="none" w="med" len="med"/>
+                      <a:tailEnd type="none" w="med" len="med"/>
+                    </a:lnL>
+                    <a:lnR w="8890" cap="flat" cmpd="sng" algn="ctr">
+                      <a:solidFill>
+                        <a:srgbClr val="D8E0DA"/>
+                      </a:solidFill>
+                      <a:prstDash val="solid"/>
+                      <a:round/>
+                      <a:headEnd type="none" w="med" len="med"/>
+                      <a:tailEnd type="none" w="med" len="med"/>
+                    </a:lnR>
+                    <a:lnT w="8890" cap="flat" cmpd="sng" algn="ctr">
+                      <a:solidFill>
+                        <a:srgbClr val="D8E0DA"/>
+                      </a:solidFill>
+                      <a:prstDash val="solid"/>
+                      <a:round/>
+                      <a:headEnd type="none" w="med" len="med"/>
+                      <a:tailEnd type="none" w="med" len="med"/>
+                    </a:lnT>
+                    <a:lnB w="8890" cap="flat" cmpd="sng" algn="ctr">
+                      <a:solidFill>
+                        <a:srgbClr val="D8E0DA"/>
+                      </a:solidFill>
+                      <a:prstDash val="solid"/>
+                      <a:round/>
+                      <a:headEnd type="none" w="med" len="med"/>
+                      <a:tailEnd type="none" w="med" len="med"/>
+                    </a:lnB>
+                    <a:solidFill>
+                      <a:srgbClr val="FFFFFF"/>
+                    </a:solidFill>
+                  </a:tcPr>
+                </a:tc>
+                <a:tc>
+                  <a:txBody>
+                    <a:bodyPr/>
+                    <a:lstStyle/>
+                    <a:p>
+                      <a:pPr indent="0" marL="0">
+                        <a:buNone/>
+                      </a:pPr>
+                      <a:r>
+                        <a:rPr lang="en-US" sz="1800" dirty="0">
+                          <a:solidFill>
+                            <a:srgbClr val="172C30"/>
+                          </a:solidFill>
+                          <a:latin typeface="Noto Sans SC" pitchFamily="34" charset="0"/>
+                          <a:ea typeface="Noto Sans SC" pitchFamily="34" charset="-122"/>
+                          <a:cs typeface="Noto Sans SC" pitchFamily="34" charset="-120"/>
+                        </a:rPr>
+                        <a:t>9.225</a:t>
+                      </a:r>
+                      <a:endParaRPr lang="en-US" sz="1800" dirty="0">
+                        <a:latin typeface="Noto Sans SC" charset="0"/>
+                        <a:ea typeface="Noto Sans SC" charset="0"/>
+                        <a:cs typeface="Noto Sans SC" charset="0"/>
+                      </a:endParaRPr>
+                    </a:p>
+                  </a:txBody>
+                  <a:tcPr marL="109728" marR="109728" marT="109728" marB="109728" anchor="ctr">
+                    <a:lnL w="8890" cap="flat" cmpd="sng" algn="ctr">
+                      <a:solidFill>
+                        <a:srgbClr val="D8E0DA"/>
+                      </a:solidFill>
+                      <a:prstDash val="solid"/>
+                      <a:round/>
+                      <a:headEnd type="none" w="med" len="med"/>
+                      <a:tailEnd type="none" w="med" len="med"/>
+                    </a:lnL>
+                    <a:lnR w="8890" cap="flat" cmpd="sng" algn="ctr">
+                      <a:solidFill>
+                        <a:srgbClr val="D8E0DA"/>
+                      </a:solidFill>
+                      <a:prstDash val="solid"/>
+                      <a:round/>
+                      <a:headEnd type="none" w="med" len="med"/>
+                      <a:tailEnd type="none" w="med" len="med"/>
+                    </a:lnR>
+                    <a:lnT w="8890" cap="flat" cmpd="sng" algn="ctr">
+                      <a:solidFill>
+                        <a:srgbClr val="D8E0DA"/>
+                      </a:solidFill>
+                      <a:prstDash val="solid"/>
+                      <a:round/>
+                      <a:headEnd type="none" w="med" len="med"/>
+                      <a:tailEnd type="none" w="med" len="med"/>
+                    </a:lnT>
+                    <a:lnB w="8890" cap="flat" cmpd="sng" algn="ctr">
+                      <a:solidFill>
+                        <a:srgbClr val="D8E0DA"/>
+                      </a:solidFill>
+                      <a:prstDash val="solid"/>
+                      <a:round/>
+                      <a:headEnd type="none" w="med" len="med"/>
+                      <a:tailEnd type="none" w="med" len="med"/>
+                    </a:lnB>
+                    <a:solidFill>
+                      <a:srgbClr val="FFFFFF"/>
+                    </a:solidFill>
+                  </a:tcPr>
+                </a:tc>
+              </a:tr>
+              <a:tr h="676656">
+                <a:tc>
+                  <a:txBody>
+                    <a:bodyPr/>
+                    <a:lstStyle/>
+                    <a:p>
+                      <a:pPr indent="0" marL="0">
+                        <a:buNone/>
+                      </a:pPr>
+                      <a:r>
+                        <a:rPr lang="en-US" sz="1800" dirty="0">
+                          <a:solidFill>
+                            <a:srgbClr val="172C30"/>
+                          </a:solidFill>
+                          <a:latin typeface="Noto Sans SC" pitchFamily="34" charset="0"/>
+                          <a:ea typeface="Noto Sans SC" pitchFamily="34" charset="-122"/>
+                          <a:cs typeface="Noto Sans SC" pitchFamily="34" charset="-120"/>
+                        </a:rPr>
+                        <a:t>个人</a:t>
+                      </a:r>
+                      <a:endParaRPr lang="en-US" sz="1800" dirty="0">
+                        <a:latin typeface="Noto Sans SC" charset="0"/>
+                        <a:ea typeface="Noto Sans SC" charset="0"/>
+                        <a:cs typeface="Noto Sans SC" charset="0"/>
+                      </a:endParaRPr>
+                    </a:p>
+                  </a:txBody>
+                  <a:tcPr marL="109728" marR="109728" marT="109728" marB="109728" anchor="ctr">
+                    <a:lnL w="8890" cap="flat" cmpd="sng" algn="ctr">
+                      <a:solidFill>
+                        <a:srgbClr val="D8E0DA"/>
+                      </a:solidFill>
+                      <a:prstDash val="solid"/>
+                      <a:round/>
+                      <a:headEnd type="none" w="med" len="med"/>
+                      <a:tailEnd type="none" w="med" len="med"/>
+                    </a:lnL>
+                    <a:lnR w="8890" cap="flat" cmpd="sng" algn="ctr">
+                      <a:solidFill>
+                        <a:srgbClr val="D8E0DA"/>
+                      </a:solidFill>
+                      <a:prstDash val="solid"/>
+                      <a:round/>
+                      <a:headEnd type="none" w="med" len="med"/>
+                      <a:tailEnd type="none" w="med" len="med"/>
+                    </a:lnR>
+                    <a:lnT w="8890" cap="flat" cmpd="sng" algn="ctr">
+                      <a:solidFill>
+                        <a:srgbClr val="D8E0DA"/>
+                      </a:solidFill>
+                      <a:prstDash val="solid"/>
+                      <a:round/>
+                      <a:headEnd type="none" w="med" len="med"/>
+                      <a:tailEnd type="none" w="med" len="med"/>
+                    </a:lnT>
+                    <a:lnB w="8890" cap="flat" cmpd="sng" algn="ctr">
+                      <a:solidFill>
+                        <a:srgbClr val="D8E0DA"/>
+                      </a:solidFill>
+                      <a:prstDash val="solid"/>
+                      <a:round/>
+                      <a:headEnd type="none" w="med" len="med"/>
+                      <a:tailEnd type="none" w="med" len="med"/>
+                    </a:lnB>
+                    <a:solidFill>
+                      <a:srgbClr val="FFFFFF"/>
+                    </a:solidFill>
+                  </a:tcPr>
+                </a:tc>
+                <a:tc>
+                  <a:txBody>
+                    <a:bodyPr/>
+                    <a:lstStyle/>
+                    <a:p>
+                      <a:pPr indent="0" marL="0">
+                        <a:buNone/>
+                      </a:pPr>
+                      <a:r>
+                        <a:rPr lang="en-US" sz="1800" dirty="0">
+                          <a:solidFill>
+                            <a:srgbClr val="172C30"/>
+                          </a:solidFill>
+                          <a:latin typeface="Noto Sans SC" pitchFamily="34" charset="0"/>
+                          <a:ea typeface="Noto Sans SC" pitchFamily="34" charset="-122"/>
+                          <a:cs typeface="Noto Sans SC" pitchFamily="34" charset="-120"/>
+                        </a:rPr>
+                        <a:t>2,500</a:t>
+                      </a:r>
+                      <a:endParaRPr lang="en-US" sz="1800" dirty="0">
+                        <a:latin typeface="Noto Sans SC" charset="0"/>
+                        <a:ea typeface="Noto Sans SC" charset="0"/>
+                        <a:cs typeface="Noto Sans SC" charset="0"/>
+                      </a:endParaRPr>
+                    </a:p>
+                  </a:txBody>
+                  <a:tcPr marL="109728" marR="109728" marT="109728" marB="109728" anchor="ctr">
+                    <a:lnL w="8890" cap="flat" cmpd="sng" algn="ctr">
+                      <a:solidFill>
+                        <a:srgbClr val="D8E0DA"/>
+                      </a:solidFill>
+                      <a:prstDash val="solid"/>
+                      <a:round/>
+                      <a:headEnd type="none" w="med" len="med"/>
+                      <a:tailEnd type="none" w="med" len="med"/>
+                    </a:lnL>
+                    <a:lnR w="8890" cap="flat" cmpd="sng" algn="ctr">
+                      <a:solidFill>
+                        <a:srgbClr val="D8E0DA"/>
+                      </a:solidFill>
+                      <a:prstDash val="solid"/>
+                      <a:round/>
+                      <a:headEnd type="none" w="med" len="med"/>
+                      <a:tailEnd type="none" w="med" len="med"/>
+                    </a:lnR>
+                    <a:lnT w="8890" cap="flat" cmpd="sng" algn="ctr">
+                      <a:solidFill>
+                        <a:srgbClr val="D8E0DA"/>
+                      </a:solidFill>
+                      <a:prstDash val="solid"/>
+                      <a:round/>
+                      <a:headEnd type="none" w="med" len="med"/>
+                      <a:tailEnd type="none" w="med" len="med"/>
+                    </a:lnT>
+                    <a:lnB w="8890" cap="flat" cmpd="sng" algn="ctr">
+                      <a:solidFill>
+                        <a:srgbClr val="D8E0DA"/>
+                      </a:solidFill>
+                      <a:prstDash val="solid"/>
+                      <a:round/>
+                      <a:headEnd type="none" w="med" len="med"/>
+                      <a:tailEnd type="none" w="med" len="med"/>
+                    </a:lnB>
+                    <a:solidFill>
+                      <a:srgbClr val="FFFFFF"/>
+                    </a:solidFill>
+                  </a:tcPr>
+                </a:tc>
+                <a:tc>
+                  <a:txBody>
+                    <a:bodyPr/>
+                    <a:lstStyle/>
+                    <a:p>
+                      <a:pPr indent="0" marL="0">
+                        <a:buNone/>
+                      </a:pPr>
+                      <a:r>
+                        <a:rPr lang="en-US" sz="1800" dirty="0">
+                          <a:solidFill>
+                            <a:srgbClr val="172C30"/>
+                          </a:solidFill>
+                          <a:latin typeface="Noto Sans SC" pitchFamily="34" charset="0"/>
+                          <a:ea typeface="Noto Sans SC" pitchFamily="34" charset="-122"/>
+                          <a:cs typeface="Noto Sans SC" pitchFamily="34" charset="-120"/>
+                        </a:rPr>
+                        <a:t>17,340</a:t>
+                      </a:r>
+                      <a:endParaRPr lang="en-US" sz="1800" dirty="0">
+                        <a:latin typeface="Noto Sans SC" charset="0"/>
+                        <a:ea typeface="Noto Sans SC" charset="0"/>
+                        <a:cs typeface="Noto Sans SC" charset="0"/>
+                      </a:endParaRPr>
+                    </a:p>
+                  </a:txBody>
+                  <a:tcPr marL="109728" marR="109728" marT="109728" marB="109728" anchor="ctr">
+                    <a:lnL w="8890" cap="flat" cmpd="sng" algn="ctr">
+                      <a:solidFill>
+                        <a:srgbClr val="D8E0DA"/>
+                      </a:solidFill>
+                      <a:prstDash val="solid"/>
+                      <a:round/>
+                      <a:headEnd type="none" w="med" len="med"/>
+                      <a:tailEnd type="none" w="med" len="med"/>
+                    </a:lnL>
+                    <a:lnR w="8890" cap="flat" cmpd="sng" algn="ctr">
+                      <a:solidFill>
+                        <a:srgbClr val="D8E0DA"/>
+                      </a:solidFill>
+                      <a:prstDash val="solid"/>
+                      <a:round/>
+                      <a:headEnd type="none" w="med" len="med"/>
+                      <a:tailEnd type="none" w="med" len="med"/>
+                    </a:lnR>
+                    <a:lnT w="8890" cap="flat" cmpd="sng" algn="ctr">
+                      <a:solidFill>
+                        <a:srgbClr val="D8E0DA"/>
+                      </a:solidFill>
+                      <a:prstDash val="solid"/>
+                      <a:round/>
+                      <a:headEnd type="none" w="med" len="med"/>
+                      <a:tailEnd type="none" w="med" len="med"/>
+                    </a:lnT>
+                    <a:lnB w="8890" cap="flat" cmpd="sng" algn="ctr">
+                      <a:solidFill>
+                        <a:srgbClr val="D8E0DA"/>
+                      </a:solidFill>
+                      <a:prstDash val="solid"/>
+                      <a:round/>
+                      <a:headEnd type="none" w="med" len="med"/>
+                      <a:tailEnd type="none" w="med" len="med"/>
+                    </a:lnB>
+                    <a:solidFill>
+                      <a:srgbClr val="FFFFFF"/>
+                    </a:solidFill>
+                  </a:tcPr>
+                </a:tc>
+                <a:tc>
+                  <a:txBody>
+                    <a:bodyPr/>
+                    <a:lstStyle/>
+                    <a:p>
+                      <a:pPr indent="0" marL="0">
+                        <a:buNone/>
+                      </a:pPr>
+                      <a:r>
+                        <a:rPr lang="en-US" sz="1800" dirty="0">
+                          <a:solidFill>
+                            <a:srgbClr val="172C30"/>
+                          </a:solidFill>
+                          <a:latin typeface="Noto Sans SC" pitchFamily="34" charset="0"/>
+                          <a:ea typeface="Noto Sans SC" pitchFamily="34" charset="-122"/>
+                          <a:cs typeface="Noto Sans SC" pitchFamily="34" charset="-120"/>
+                        </a:rPr>
+                        <a:t>30</a:t>
+                      </a:r>
+                      <a:endParaRPr lang="en-US" sz="1800" dirty="0">
+                        <a:latin typeface="Noto Sans SC" charset="0"/>
+                        <a:ea typeface="Noto Sans SC" charset="0"/>
+                        <a:cs typeface="Noto Sans SC" charset="0"/>
+                      </a:endParaRPr>
+                    </a:p>
+                  </a:txBody>
+                  <a:tcPr marL="109728" marR="109728" marT="109728" marB="109728" anchor="ctr">
+                    <a:lnL w="8890" cap="flat" cmpd="sng" algn="ctr">
+                      <a:solidFill>
+                        <a:srgbClr val="D8E0DA"/>
+                      </a:solidFill>
+                      <a:prstDash val="solid"/>
+                      <a:round/>
+                      <a:headEnd type="none" w="med" len="med"/>
+                      <a:tailEnd type="none" w="med" len="med"/>
+                    </a:lnL>
+                    <a:lnR w="8890" cap="flat" cmpd="sng" algn="ctr">
+                      <a:solidFill>
+                        <a:srgbClr val="D8E0DA"/>
+                      </a:solidFill>
+                      <a:prstDash val="solid"/>
+                      <a:round/>
+                      <a:headEnd type="none" w="med" len="med"/>
+                      <a:tailEnd type="none" w="med" len="med"/>
+                    </a:lnR>
+                    <a:lnT w="8890" cap="flat" cmpd="sng" algn="ctr">
+                      <a:solidFill>
+                        <a:srgbClr val="D8E0DA"/>
+                      </a:solidFill>
+                      <a:prstDash val="solid"/>
+                      <a:round/>
+                      <a:headEnd type="none" w="med" len="med"/>
+                      <a:tailEnd type="none" w="med" len="med"/>
+                    </a:lnT>
+                    <a:lnB w="8890" cap="flat" cmpd="sng" algn="ctr">
+                      <a:solidFill>
+                        <a:srgbClr val="D8E0DA"/>
+                      </a:solidFill>
+                      <a:prstDash val="solid"/>
+                      <a:round/>
+                      <a:headEnd type="none" w="med" len="med"/>
+                      <a:tailEnd type="none" w="med" len="med"/>
+                    </a:lnB>
+                    <a:solidFill>
+                      <a:srgbClr val="FFFFFF"/>
+                    </a:solidFill>
+                  </a:tcPr>
+                </a:tc>
+                <a:tc>
+                  <a:txBody>
+                    <a:bodyPr/>
+                    <a:lstStyle/>
+                    <a:p>
+                      <a:pPr indent="0" marL="0">
+                        <a:buNone/>
+                      </a:pPr>
+                      <a:r>
+                        <a:rPr lang="en-US" sz="1800" dirty="0">
+                          <a:solidFill>
+                            <a:srgbClr val="172C30"/>
+                          </a:solidFill>
+                          <a:latin typeface="Noto Sans SC" pitchFamily="34" charset="0"/>
+                          <a:ea typeface="Noto Sans SC" pitchFamily="34" charset="-122"/>
+                          <a:cs typeface="Noto Sans SC" pitchFamily="34" charset="-120"/>
+                        </a:rPr>
+                        <a:t>52.020</a:t>
+                      </a:r>
+                      <a:endParaRPr lang="en-US" sz="1800" dirty="0">
                         <a:latin typeface="Noto Sans SC" charset="0"/>
                         <a:ea typeface="Noto Sans SC" charset="0"/>
                         <a:cs typeface="Noto Sans SC" charset="0"/>
@@ -32738,8 +32895,8 @@
         </p:nvSpPr>
         <p:spPr>
           <a:xfrm>
-            <a:off x="731520" y="5431536"/>
-            <a:ext cx="2468880" cy="457200"/>
+            <a:off x="731520" y="5093208"/>
+            <a:ext cx="3749040" cy="512064"/>
           </a:xfrm>
           <a:prstGeom prst="rect">
             <a:avLst/>
@@ -32757,7 +32914,7 @@
               <a:buNone/>
             </a:pPr>
             <a:r>
-              <a:rPr lang="en-US" sz="2900" b="1" dirty="0">
+              <a:rPr lang="en-US" sz="3000" b="1" dirty="0">
                 <a:solidFill>
                   <a:srgbClr val="007C73"/>
                 </a:solidFill>
@@ -32765,9 +32922,9 @@
                 <a:ea typeface="Noto Sans SC" pitchFamily="34" charset="-122"/>
                 <a:cs typeface="Noto Sans SC" pitchFamily="34" charset="-120"/>
               </a:rPr>
-              <a:t>80小时</a:t>
+              <a:t>78.975万元</a:t>
             </a:r>
-            <a:endParaRPr lang="en-US" sz="2900" dirty="0"/>
+            <a:endParaRPr lang="en-US" sz="3000" dirty="0"/>
           </a:p>
         </p:txBody>
       </p:sp>
@@ -32779,8 +32936,8 @@
         </p:nvSpPr>
         <p:spPr>
           <a:xfrm>
-            <a:off x="3200400" y="5422392"/>
-            <a:ext cx="8138160" cy="457200"/>
+            <a:off x="4480560" y="5102352"/>
+            <a:ext cx="6858000" cy="640080"/>
           </a:xfrm>
           <a:prstGeom prst="rect">
             <a:avLst/>
@@ -32798,7 +32955,7 @@
               <a:buNone/>
             </a:pPr>
             <a:r>
-              <a:rPr lang="en-US" sz="2000" dirty="0">
+              <a:rPr lang="en-US" sz="1900" dirty="0">
                 <a:solidFill>
                   <a:srgbClr val="172C30"/>
                 </a:solidFill>
@@ -32806,9 +32963,9 @@
                 <a:ea typeface="Noto Sans SC" pitchFamily="34" charset="-122"/>
                 <a:cs typeface="Noto Sans SC" pitchFamily="34" charset="-120"/>
               </a:rPr>
-              <a:t>作品准备24 + 培训16 + 配置16 + 支持复盘24</a:t>
+              <a:t>外部用户算力采购合计；研发工具与内部算力另列10.800万元。</a:t>
             </a:r>
-            <a:endParaRPr lang="en-US" sz="2000" dirty="0"/>
+            <a:endParaRPr lang="en-US" sz="1900" dirty="0"/>
           </a:p>
         </p:txBody>
       </p:sp>
@@ -32847,7 +33004,7 @@
                 <a:ea typeface="Noto Sans SC" pitchFamily="34" charset="-122"/>
                 <a:cs typeface="Noto Sans SC" pitchFamily="34" charset="-120"/>
               </a:rPr>
-              <a:t>试点服务情景追加资金参考10.30万元；组织订阅、后台建设与算力业务单独核算。</a:t>
+              <a:t>实际云活跃人数 × 各类人均成本；API密钥自带与本地模型按各自方式结算。</a:t>
             </a:r>
             <a:endParaRPr lang="en-US" sz="1100" dirty="0"/>
           </a:p>
@@ -32920,7 +33077,7 @@
                 <a:ea typeface="Noto Sans SC" pitchFamily="34" charset="-122"/>
                 <a:cs typeface="Noto Sans SC" pitchFamily="34" charset="-120"/>
               </a:rPr>
-              <a:t>30 / 财务情景</a:t>
+              <a:t>30 / 持续发展资金</a:t>
             </a:r>
             <a:endParaRPr lang="en-US" sz="1100" dirty="0"/>
           </a:p>
@@ -32961,7 +33118,7 @@
                 <a:ea typeface="Noto Sans SC" pitchFamily="34" charset="-122"/>
                 <a:cs typeface="Noto Sans SC" pitchFamily="34" charset="-120"/>
               </a:rPr>
-              <a:t>试点服务情景的三年经营参考</a:t>
+              <a:t>500万元资金规划，覆盖24个月产品建设</a:t>
             </a:r>
             <a:endParaRPr lang="en-US" sz="3000" dirty="0"/>
           </a:p>
@@ -33002,7 +33159,7 @@
                 <a:ea typeface="Noto Sans SC" pitchFamily="34" charset="-122"/>
                 <a:cs typeface="Noto Sans SC" pitchFamily="34" charset="-120"/>
               </a:rPr>
-              <a:t>2027–2029 · 万元 · 原服务预算；组织与算力订阅另行测算</a:t>
+              <a:t>基准覆盖预算：收入及自有投入确认后抵减；人力3→4等效资源，综合人月2万元。</a:t>
             </a:r>
             <a:endParaRPr lang="en-US" sz="1500" dirty="0"/>
           </a:p>
@@ -33128,20 +33285,19 @@
           </p:nvPr>
         </p:nvGraphicFramePr>
         <p:xfrm>
-          <a:off x="594360" y="2286000"/>
-          <a:ext cx="5760720" cy="914400"/>
+          <a:off x="594360" y="2048256"/>
+          <a:ext cx="10972800" cy="914400"/>
         </p:xfrm>
         <a:graphic>
           <a:graphicData uri="http://schemas.openxmlformats.org/drawingml/2006/table">
             <a:tbl>
               <a:tblPr/>
               <a:tblGrid>
-                <a:gridCol w="1097280"/>
-                <a:gridCol w="1554480"/>
-                <a:gridCol w="1554480"/>
-                <a:gridCol w="1554480"/>
+                <a:gridCol w="3886200"/>
+                <a:gridCol w="1828800"/>
+                <a:gridCol w="5257800"/>
               </a:tblGrid>
-              <a:tr h="704088">
+              <a:tr h="493776">
                 <a:tc>
                   <a:txBody>
                     <a:bodyPr/>
@@ -33159,7 +33315,7 @@
                           <a:ea typeface="Noto Sans SC" pitchFamily="34" charset="-122"/>
                           <a:cs typeface="Noto Sans SC" pitchFamily="34" charset="-120"/>
                         </a:rPr>
-                        <a:t>情景</a:t>
+                        <a:t>资金用途</a:t>
                       </a:r>
                       <a:endParaRPr lang="en-US" sz="1600" dirty="0">
                         <a:latin typeface="Noto Sans SC" charset="0"/>
@@ -33227,7 +33383,7 @@
                           <a:ea typeface="Noto Sans SC" pitchFamily="34" charset="-122"/>
                           <a:cs typeface="Noto Sans SC" pitchFamily="34" charset="-120"/>
                         </a:rPr>
-                        <a:t>三年收入</a:t>
+                        <a:t>预算（万元）</a:t>
                       </a:r>
                       <a:endParaRPr lang="en-US" sz="1600" dirty="0">
                         <a:latin typeface="Noto Sans SC" charset="0"/>
@@ -33295,7 +33451,7 @@
                           <a:ea typeface="Noto Sans SC" pitchFamily="34" charset="-122"/>
                           <a:cs typeface="Noto Sans SC" pitchFamily="34" charset="-120"/>
                         </a:rPr>
-                        <a:t>三年费用</a:t>
+                        <a:t>覆盖范围</a:t>
                       </a:r>
                       <a:endParaRPr lang="en-US" sz="1600" dirty="0">
                         <a:latin typeface="Noto Sans SC" charset="0"/>
@@ -33346,76 +33502,8 @@
                     </a:solidFill>
                   </a:tcPr>
                 </a:tc>
-                <a:tc>
-                  <a:txBody>
-                    <a:bodyPr/>
-                    <a:lstStyle/>
-                    <a:p>
-                      <a:pPr indent="0" marL="0">
-                        <a:buNone/>
-                      </a:pPr>
-                      <a:r>
-                        <a:rPr lang="en-US" sz="1600" b="1" dirty="0">
-                          <a:solidFill>
-                            <a:srgbClr val="007C73"/>
-                          </a:solidFill>
-                          <a:latin typeface="Noto Sans SC" pitchFamily="34" charset="0"/>
-                          <a:ea typeface="Noto Sans SC" pitchFamily="34" charset="-122"/>
-                          <a:cs typeface="Noto Sans SC" pitchFamily="34" charset="-120"/>
-                        </a:rPr>
-                        <a:t>追加资金预算</a:t>
-                      </a:r>
-                      <a:endParaRPr lang="en-US" sz="1600" dirty="0">
-                        <a:latin typeface="Noto Sans SC" charset="0"/>
-                        <a:ea typeface="Noto Sans SC" charset="0"/>
-                        <a:cs typeface="Noto Sans SC" charset="0"/>
-                      </a:endParaRPr>
-                    </a:p>
-                  </a:txBody>
-                  <a:tcPr marL="109728" marR="109728" marT="109728" marB="109728" anchor="ctr">
-                    <a:lnL w="8890" cap="flat" cmpd="sng" algn="ctr">
-                      <a:solidFill>
-                        <a:srgbClr val="D8E0DA"/>
-                      </a:solidFill>
-                      <a:prstDash val="solid"/>
-                      <a:round/>
-                      <a:headEnd type="none" w="med" len="med"/>
-                      <a:tailEnd type="none" w="med" len="med"/>
-                    </a:lnL>
-                    <a:lnR w="8890" cap="flat" cmpd="sng" algn="ctr">
-                      <a:solidFill>
-                        <a:srgbClr val="D8E0DA"/>
-                      </a:solidFill>
-                      <a:prstDash val="solid"/>
-                      <a:round/>
-                      <a:headEnd type="none" w="med" len="med"/>
-                      <a:tailEnd type="none" w="med" len="med"/>
-                    </a:lnR>
-                    <a:lnT w="8890" cap="flat" cmpd="sng" algn="ctr">
-                      <a:solidFill>
-                        <a:srgbClr val="D8E0DA"/>
-                      </a:solidFill>
-                      <a:prstDash val="solid"/>
-                      <a:round/>
-                      <a:headEnd type="none" w="med" len="med"/>
-                      <a:tailEnd type="none" w="med" len="med"/>
-                    </a:lnT>
-                    <a:lnB w="8890" cap="flat" cmpd="sng" algn="ctr">
-                      <a:solidFill>
-                        <a:srgbClr val="D8E0DA"/>
-                      </a:solidFill>
-                      <a:prstDash val="solid"/>
-                      <a:round/>
-                      <a:headEnd type="none" w="med" len="med"/>
-                      <a:tailEnd type="none" w="med" len="med"/>
-                    </a:lnB>
-                    <a:solidFill>
-                      <a:srgbClr val="FFFFFF"/>
-                    </a:solidFill>
-                  </a:tcPr>
-                </a:tc>
               </a:tr>
-              <a:tr h="704088">
+              <a:tr h="493776">
                 <a:tc>
                   <a:txBody>
                     <a:bodyPr/>
@@ -33433,7 +33521,7 @@
                           <a:ea typeface="Noto Sans SC" pitchFamily="34" charset="-122"/>
                           <a:cs typeface="Noto Sans SC" pitchFamily="34" charset="-120"/>
                         </a:rPr>
-                        <a:t>审慎</a:t>
+                        <a:t>人力、研发工具与专项交付</a:t>
                       </a:r>
                       <a:endParaRPr lang="en-US" sz="1600" dirty="0">
                         <a:latin typeface="Noto Sans SC" charset="0"/>
@@ -33501,7 +33589,7 @@
                           <a:ea typeface="Noto Sans SC" pitchFamily="34" charset="-122"/>
                           <a:cs typeface="Noto Sans SC" pitchFamily="34" charset="-120"/>
                         </a:rPr>
-                        <a:t>18.000</a:t>
+                        <a:t>205.800</a:t>
                       </a:r>
                       <a:endParaRPr lang="en-US" sz="1600" dirty="0">
                         <a:latin typeface="Noto Sans SC" charset="0"/>
@@ -33569,7 +33657,77 @@
                           <a:ea typeface="Noto Sans SC" pitchFamily="34" charset="-122"/>
                           <a:cs typeface="Noto Sans SC" pitchFamily="34" charset="-120"/>
                         </a:rPr>
-                        <a:t>45.840</a:t>
+                        <a:t>研发、教研与运营等效资源；跨端和应用交付</a:t>
+                      </a:r>
+                      <a:endParaRPr lang="en-US" sz="1600" dirty="0">
+                        <a:latin typeface="Noto Sans SC" charset="0"/>
+                        <a:ea typeface="Noto Sans SC" charset="0"/>
+                        <a:cs typeface="Noto Sans SC" charset="0"/>
+                      </a:endParaRPr>
+                    </a:p>
+                  </a:txBody>
+                  <a:tcPr marL="109728" marR="109728" marT="109728" marB="109728" anchor="ctr">
+                    <a:lnL w="8890" cap="flat" cmpd="sng" algn="ctr">
+                      <a:solidFill>
+                        <a:srgbClr val="D8E0DA"/>
+                      </a:solidFill>
+                      <a:prstDash val="solid"/>
+                      <a:round/>
+                      <a:headEnd type="none" w="med" len="med"/>
+                      <a:tailEnd type="none" w="med" len="med"/>
+                    </a:lnL>
+                    <a:lnR w="8890" cap="flat" cmpd="sng" algn="ctr">
+                      <a:solidFill>
+                        <a:srgbClr val="D8E0DA"/>
+                      </a:solidFill>
+                      <a:prstDash val="solid"/>
+                      <a:round/>
+                      <a:headEnd type="none" w="med" len="med"/>
+                      <a:tailEnd type="none" w="med" len="med"/>
+                    </a:lnR>
+                    <a:lnT w="8890" cap="flat" cmpd="sng" algn="ctr">
+                      <a:solidFill>
+                        <a:srgbClr val="D8E0DA"/>
+                      </a:solidFill>
+                      <a:prstDash val="solid"/>
+                      <a:round/>
+                      <a:headEnd type="none" w="med" len="med"/>
+                      <a:tailEnd type="none" w="med" len="med"/>
+                    </a:lnT>
+                    <a:lnB w="8890" cap="flat" cmpd="sng" algn="ctr">
+                      <a:solidFill>
+                        <a:srgbClr val="D8E0DA"/>
+                      </a:solidFill>
+                      <a:prstDash val="solid"/>
+                      <a:round/>
+                      <a:headEnd type="none" w="med" len="med"/>
+                      <a:tailEnd type="none" w="med" len="med"/>
+                    </a:lnB>
+                    <a:solidFill>
+                      <a:srgbClr val="FFFFFF"/>
+                    </a:solidFill>
+                  </a:tcPr>
+                </a:tc>
+              </a:tr>
+              <a:tr h="493776">
+                <a:tc>
+                  <a:txBody>
+                    <a:bodyPr/>
+                    <a:lstStyle/>
+                    <a:p>
+                      <a:pPr indent="0" marL="0">
+                        <a:buNone/>
+                      </a:pPr>
+                      <a:r>
+                        <a:rPr lang="en-US" sz="1600" dirty="0">
+                          <a:solidFill>
+                            <a:srgbClr val="172C30"/>
+                          </a:solidFill>
+                          <a:latin typeface="Noto Sans SC" pitchFamily="34" charset="0"/>
+                          <a:ea typeface="Noto Sans SC" pitchFamily="34" charset="-122"/>
+                          <a:cs typeface="Noto Sans SC" pitchFamily="34" charset="-120"/>
+                        </a:rPr>
+                        <a:t>基础设施</a:t>
                       </a:r>
                       <a:endParaRPr lang="en-US" sz="1600" dirty="0">
                         <a:latin typeface="Noto Sans SC" charset="0"/>
@@ -33637,77 +33795,7 @@
                           <a:ea typeface="Noto Sans SC" pitchFamily="34" charset="-122"/>
                           <a:cs typeface="Noto Sans SC" pitchFamily="34" charset="-120"/>
                         </a:rPr>
-                        <a:t>28.110</a:t>
-                      </a:r>
-                      <a:endParaRPr lang="en-US" sz="1600" dirty="0">
-                        <a:latin typeface="Noto Sans SC" charset="0"/>
-                        <a:ea typeface="Noto Sans SC" charset="0"/>
-                        <a:cs typeface="Noto Sans SC" charset="0"/>
-                      </a:endParaRPr>
-                    </a:p>
-                  </a:txBody>
-                  <a:tcPr marL="109728" marR="109728" marT="109728" marB="109728" anchor="ctr">
-                    <a:lnL w="8890" cap="flat" cmpd="sng" algn="ctr">
-                      <a:solidFill>
-                        <a:srgbClr val="D8E0DA"/>
-                      </a:solidFill>
-                      <a:prstDash val="solid"/>
-                      <a:round/>
-                      <a:headEnd type="none" w="med" len="med"/>
-                      <a:tailEnd type="none" w="med" len="med"/>
-                    </a:lnL>
-                    <a:lnR w="8890" cap="flat" cmpd="sng" algn="ctr">
-                      <a:solidFill>
-                        <a:srgbClr val="D8E0DA"/>
-                      </a:solidFill>
-                      <a:prstDash val="solid"/>
-                      <a:round/>
-                      <a:headEnd type="none" w="med" len="med"/>
-                      <a:tailEnd type="none" w="med" len="med"/>
-                    </a:lnR>
-                    <a:lnT w="8890" cap="flat" cmpd="sng" algn="ctr">
-                      <a:solidFill>
-                        <a:srgbClr val="D8E0DA"/>
-                      </a:solidFill>
-                      <a:prstDash val="solid"/>
-                      <a:round/>
-                      <a:headEnd type="none" w="med" len="med"/>
-                      <a:tailEnd type="none" w="med" len="med"/>
-                    </a:lnT>
-                    <a:lnB w="8890" cap="flat" cmpd="sng" algn="ctr">
-                      <a:solidFill>
-                        <a:srgbClr val="D8E0DA"/>
-                      </a:solidFill>
-                      <a:prstDash val="solid"/>
-                      <a:round/>
-                      <a:headEnd type="none" w="med" len="med"/>
-                      <a:tailEnd type="none" w="med" len="med"/>
-                    </a:lnB>
-                    <a:solidFill>
-                      <a:srgbClr val="FFFFFF"/>
-                    </a:solidFill>
-                  </a:tcPr>
-                </a:tc>
-              </a:tr>
-              <a:tr h="704088">
-                <a:tc>
-                  <a:txBody>
-                    <a:bodyPr/>
-                    <a:lstStyle/>
-                    <a:p>
-                      <a:pPr indent="0" marL="0">
-                        <a:buNone/>
-                      </a:pPr>
-                      <a:r>
-                        <a:rPr lang="en-US" sz="1600" dirty="0">
-                          <a:solidFill>
-                            <a:srgbClr val="172C30"/>
-                          </a:solidFill>
-                          <a:latin typeface="Noto Sans SC" pitchFamily="34" charset="0"/>
-                          <a:ea typeface="Noto Sans SC" pitchFamily="34" charset="-122"/>
-                          <a:cs typeface="Noto Sans SC" pitchFamily="34" charset="-120"/>
-                        </a:rPr>
-                        <a:t>基准</a:t>
+                        <a:t>16.200</a:t>
                       </a:r>
                       <a:endParaRPr lang="en-US" sz="1600" dirty="0">
                         <a:latin typeface="Noto Sans SC" charset="0"/>
@@ -33775,7 +33863,77 @@
                           <a:ea typeface="Noto Sans SC" pitchFamily="34" charset="-122"/>
                           <a:cs typeface="Noto Sans SC" pitchFamily="34" charset="-120"/>
                         </a:rPr>
-                        <a:t>57.600</a:t>
+                        <a:t>账户、组织后台、存储与运行监测</a:t>
+                      </a:r>
+                      <a:endParaRPr lang="en-US" sz="1600" dirty="0">
+                        <a:latin typeface="Noto Sans SC" charset="0"/>
+                        <a:ea typeface="Noto Sans SC" charset="0"/>
+                        <a:cs typeface="Noto Sans SC" charset="0"/>
+                      </a:endParaRPr>
+                    </a:p>
+                  </a:txBody>
+                  <a:tcPr marL="109728" marR="109728" marT="109728" marB="109728" anchor="ctr">
+                    <a:lnL w="8890" cap="flat" cmpd="sng" algn="ctr">
+                      <a:solidFill>
+                        <a:srgbClr val="D8E0DA"/>
+                      </a:solidFill>
+                      <a:prstDash val="solid"/>
+                      <a:round/>
+                      <a:headEnd type="none" w="med" len="med"/>
+                      <a:tailEnd type="none" w="med" len="med"/>
+                    </a:lnL>
+                    <a:lnR w="8890" cap="flat" cmpd="sng" algn="ctr">
+                      <a:solidFill>
+                        <a:srgbClr val="D8E0DA"/>
+                      </a:solidFill>
+                      <a:prstDash val="solid"/>
+                      <a:round/>
+                      <a:headEnd type="none" w="med" len="med"/>
+                      <a:tailEnd type="none" w="med" len="med"/>
+                    </a:lnR>
+                    <a:lnT w="8890" cap="flat" cmpd="sng" algn="ctr">
+                      <a:solidFill>
+                        <a:srgbClr val="D8E0DA"/>
+                      </a:solidFill>
+                      <a:prstDash val="solid"/>
+                      <a:round/>
+                      <a:headEnd type="none" w="med" len="med"/>
+                      <a:tailEnd type="none" w="med" len="med"/>
+                    </a:lnT>
+                    <a:lnB w="8890" cap="flat" cmpd="sng" algn="ctr">
+                      <a:solidFill>
+                        <a:srgbClr val="D8E0DA"/>
+                      </a:solidFill>
+                      <a:prstDash val="solid"/>
+                      <a:round/>
+                      <a:headEnd type="none" w="med" len="med"/>
+                      <a:tailEnd type="none" w="med" len="med"/>
+                    </a:lnB>
+                    <a:solidFill>
+                      <a:srgbClr val="FFFFFF"/>
+                    </a:solidFill>
+                  </a:tcPr>
+                </a:tc>
+              </a:tr>
+              <a:tr h="493776">
+                <a:tc>
+                  <a:txBody>
+                    <a:bodyPr/>
+                    <a:lstStyle/>
+                    <a:p>
+                      <a:pPr indent="0" marL="0">
+                        <a:buNone/>
+                      </a:pPr>
+                      <a:r>
+                        <a:rPr lang="en-US" sz="1600" dirty="0">
+                          <a:solidFill>
+                            <a:srgbClr val="172C30"/>
+                          </a:solidFill>
+                          <a:latin typeface="Noto Sans SC" pitchFamily="34" charset="0"/>
+                          <a:ea typeface="Noto Sans SC" pitchFamily="34" charset="-122"/>
+                          <a:cs typeface="Noto Sans SC" pitchFamily="34" charset="-120"/>
+                        </a:rPr>
+                        <a:t>外部用户算力</a:t>
                       </a:r>
                       <a:endParaRPr lang="en-US" sz="1600" dirty="0">
                         <a:latin typeface="Noto Sans SC" charset="0"/>
@@ -33843,7 +34001,7 @@
                           <a:ea typeface="Noto Sans SC" pitchFamily="34" charset="-122"/>
                           <a:cs typeface="Noto Sans SC" pitchFamily="34" charset="-120"/>
                         </a:rPr>
-                        <a:t>59.072</a:t>
+                        <a:t>78.975</a:t>
                       </a:r>
                       <a:endParaRPr lang="en-US" sz="1600" dirty="0">
                         <a:latin typeface="Noto Sans SC" charset="0"/>
@@ -33911,7 +34069,7 @@
                           <a:ea typeface="Noto Sans SC" pitchFamily="34" charset="-122"/>
                           <a:cs typeface="Noto Sans SC" pitchFamily="34" charset="-120"/>
                         </a:rPr>
-                        <a:t>10.300</a:t>
+                        <a:t>随学生、教师、个人云活跃人数增长</a:t>
                       </a:r>
                       <a:endParaRPr lang="en-US" sz="1600" dirty="0">
                         <a:latin typeface="Noto Sans SC" charset="0"/>
@@ -33963,7 +34121,7 @@
                   </a:tcPr>
                 </a:tc>
               </a:tr>
-              <a:tr h="704088">
+              <a:tr h="493776">
                 <a:tc>
                   <a:txBody>
                     <a:bodyPr/>
@@ -33981,7 +34139,7 @@
                           <a:ea typeface="Noto Sans SC" pitchFamily="34" charset="-122"/>
                           <a:cs typeface="Noto Sans SC" pitchFamily="34" charset="-120"/>
                         </a:rPr>
-                        <a:t>积极</a:t>
+                        <a:t>教学、社区与一般运营</a:t>
                       </a:r>
                       <a:endParaRPr lang="en-US" sz="1600" dirty="0">
                         <a:latin typeface="Noto Sans SC" charset="0"/>
@@ -34049,7 +34207,7 @@
                           <a:ea typeface="Noto Sans SC" pitchFamily="34" charset="-122"/>
                           <a:cs typeface="Noto Sans SC" pitchFamily="34" charset="-120"/>
                         </a:rPr>
-                        <a:t>96.800</a:t>
+                        <a:t>32.100</a:t>
                       </a:r>
                       <a:endParaRPr lang="en-US" sz="1600" dirty="0">
                         <a:latin typeface="Noto Sans SC" charset="0"/>
@@ -34117,7 +34275,77 @@
                           <a:ea typeface="Noto Sans SC" pitchFamily="34" charset="-122"/>
                           <a:cs typeface="Noto Sans SC" pitchFamily="34" charset="-120"/>
                         </a:rPr>
-                        <a:t>78.756</a:t>
+                        <a:t>活动与材料、共创推广、行政与合规支持</a:t>
+                      </a:r>
+                      <a:endParaRPr lang="en-US" sz="1600" dirty="0">
+                        <a:latin typeface="Noto Sans SC" charset="0"/>
+                        <a:ea typeface="Noto Sans SC" charset="0"/>
+                        <a:cs typeface="Noto Sans SC" charset="0"/>
+                      </a:endParaRPr>
+                    </a:p>
+                  </a:txBody>
+                  <a:tcPr marL="109728" marR="109728" marT="109728" marB="109728" anchor="ctr">
+                    <a:lnL w="8890" cap="flat" cmpd="sng" algn="ctr">
+                      <a:solidFill>
+                        <a:srgbClr val="D8E0DA"/>
+                      </a:solidFill>
+                      <a:prstDash val="solid"/>
+                      <a:round/>
+                      <a:headEnd type="none" w="med" len="med"/>
+                      <a:tailEnd type="none" w="med" len="med"/>
+                    </a:lnL>
+                    <a:lnR w="8890" cap="flat" cmpd="sng" algn="ctr">
+                      <a:solidFill>
+                        <a:srgbClr val="D8E0DA"/>
+                      </a:solidFill>
+                      <a:prstDash val="solid"/>
+                      <a:round/>
+                      <a:headEnd type="none" w="med" len="med"/>
+                      <a:tailEnd type="none" w="med" len="med"/>
+                    </a:lnR>
+                    <a:lnT w="8890" cap="flat" cmpd="sng" algn="ctr">
+                      <a:solidFill>
+                        <a:srgbClr val="D8E0DA"/>
+                      </a:solidFill>
+                      <a:prstDash val="solid"/>
+                      <a:round/>
+                      <a:headEnd type="none" w="med" len="med"/>
+                      <a:tailEnd type="none" w="med" len="med"/>
+                    </a:lnT>
+                    <a:lnB w="8890" cap="flat" cmpd="sng" algn="ctr">
+                      <a:solidFill>
+                        <a:srgbClr val="D8E0DA"/>
+                      </a:solidFill>
+                      <a:prstDash val="solid"/>
+                      <a:round/>
+                      <a:headEnd type="none" w="med" len="med"/>
+                      <a:tailEnd type="none" w="med" len="med"/>
+                    </a:lnB>
+                    <a:solidFill>
+                      <a:srgbClr val="FFFFFF"/>
+                    </a:solidFill>
+                  </a:tcPr>
+                </a:tc>
+              </a:tr>
+              <a:tr h="493776">
+                <a:tc>
+                  <a:txBody>
+                    <a:bodyPr/>
+                    <a:lstStyle/>
+                    <a:p>
+                      <a:pPr indent="0" marL="0">
+                        <a:buNone/>
+                      </a:pPr>
+                      <a:r>
+                        <a:rPr lang="en-US" sz="1600" dirty="0">
+                          <a:solidFill>
+                            <a:srgbClr val="172C30"/>
+                          </a:solidFill>
+                          <a:latin typeface="Noto Sans SC" pitchFamily="34" charset="0"/>
+                          <a:ea typeface="Noto Sans SC" pitchFamily="34" charset="-122"/>
+                          <a:cs typeface="Noto Sans SC" pitchFamily="34" charset="-120"/>
+                        </a:rPr>
+                        <a:t>测试设备</a:t>
                       </a:r>
                       <a:endParaRPr lang="en-US" sz="1600" dirty="0">
                         <a:latin typeface="Noto Sans SC" charset="0"/>
@@ -34185,7 +34413,281 @@
                           <a:ea typeface="Noto Sans SC" pitchFamily="34" charset="-122"/>
                           <a:cs typeface="Noto Sans SC" pitchFamily="34" charset="-120"/>
                         </a:rPr>
-                        <a:t>7.543</a:t>
+                        <a:t>8.000</a:t>
+                      </a:r>
+                      <a:endParaRPr lang="en-US" sz="1600" dirty="0">
+                        <a:latin typeface="Noto Sans SC" charset="0"/>
+                        <a:ea typeface="Noto Sans SC" charset="0"/>
+                        <a:cs typeface="Noto Sans SC" charset="0"/>
+                      </a:endParaRPr>
+                    </a:p>
+                  </a:txBody>
+                  <a:tcPr marL="109728" marR="109728" marT="109728" marB="109728" anchor="ctr">
+                    <a:lnL w="8890" cap="flat" cmpd="sng" algn="ctr">
+                      <a:solidFill>
+                        <a:srgbClr val="D8E0DA"/>
+                      </a:solidFill>
+                      <a:prstDash val="solid"/>
+                      <a:round/>
+                      <a:headEnd type="none" w="med" len="med"/>
+                      <a:tailEnd type="none" w="med" len="med"/>
+                    </a:lnL>
+                    <a:lnR w="8890" cap="flat" cmpd="sng" algn="ctr">
+                      <a:solidFill>
+                        <a:srgbClr val="D8E0DA"/>
+                      </a:solidFill>
+                      <a:prstDash val="solid"/>
+                      <a:round/>
+                      <a:headEnd type="none" w="med" len="med"/>
+                      <a:tailEnd type="none" w="med" len="med"/>
+                    </a:lnR>
+                    <a:lnT w="8890" cap="flat" cmpd="sng" algn="ctr">
+                      <a:solidFill>
+                        <a:srgbClr val="D8E0DA"/>
+                      </a:solidFill>
+                      <a:prstDash val="solid"/>
+                      <a:round/>
+                      <a:headEnd type="none" w="med" len="med"/>
+                      <a:tailEnd type="none" w="med" len="med"/>
+                    </a:lnT>
+                    <a:lnB w="8890" cap="flat" cmpd="sng" algn="ctr">
+                      <a:solidFill>
+                        <a:srgbClr val="D8E0DA"/>
+                      </a:solidFill>
+                      <a:prstDash val="solid"/>
+                      <a:round/>
+                      <a:headEnd type="none" w="med" len="med"/>
+                      <a:tailEnd type="none" w="med" len="med"/>
+                    </a:lnB>
+                    <a:solidFill>
+                      <a:srgbClr val="FFFFFF"/>
+                    </a:solidFill>
+                  </a:tcPr>
+                </a:tc>
+                <a:tc>
+                  <a:txBody>
+                    <a:bodyPr/>
+                    <a:lstStyle/>
+                    <a:p>
+                      <a:pPr indent="0" marL="0">
+                        <a:buNone/>
+                      </a:pPr>
+                      <a:r>
+                        <a:rPr lang="en-US" sz="1600" dirty="0">
+                          <a:solidFill>
+                            <a:srgbClr val="172C30"/>
+                          </a:solidFill>
+                          <a:latin typeface="Noto Sans SC" pitchFamily="34" charset="0"/>
+                          <a:ea typeface="Noto Sans SC" pitchFamily="34" charset="-122"/>
+                          <a:cs typeface="Noto Sans SC" pitchFamily="34" charset="-120"/>
+                        </a:rPr>
+                        <a:t>桌面与移动端设备购置</a:t>
+                      </a:r>
+                      <a:endParaRPr lang="en-US" sz="1600" dirty="0">
+                        <a:latin typeface="Noto Sans SC" charset="0"/>
+                        <a:ea typeface="Noto Sans SC" charset="0"/>
+                        <a:cs typeface="Noto Sans SC" charset="0"/>
+                      </a:endParaRPr>
+                    </a:p>
+                  </a:txBody>
+                  <a:tcPr marL="109728" marR="109728" marT="109728" marB="109728" anchor="ctr">
+                    <a:lnL w="8890" cap="flat" cmpd="sng" algn="ctr">
+                      <a:solidFill>
+                        <a:srgbClr val="D8E0DA"/>
+                      </a:solidFill>
+                      <a:prstDash val="solid"/>
+                      <a:round/>
+                      <a:headEnd type="none" w="med" len="med"/>
+                      <a:tailEnd type="none" w="med" len="med"/>
+                    </a:lnL>
+                    <a:lnR w="8890" cap="flat" cmpd="sng" algn="ctr">
+                      <a:solidFill>
+                        <a:srgbClr val="D8E0DA"/>
+                      </a:solidFill>
+                      <a:prstDash val="solid"/>
+                      <a:round/>
+                      <a:headEnd type="none" w="med" len="med"/>
+                      <a:tailEnd type="none" w="med" len="med"/>
+                    </a:lnR>
+                    <a:lnT w="8890" cap="flat" cmpd="sng" algn="ctr">
+                      <a:solidFill>
+                        <a:srgbClr val="D8E0DA"/>
+                      </a:solidFill>
+                      <a:prstDash val="solid"/>
+                      <a:round/>
+                      <a:headEnd type="none" w="med" len="med"/>
+                      <a:tailEnd type="none" w="med" len="med"/>
+                    </a:lnT>
+                    <a:lnB w="8890" cap="flat" cmpd="sng" algn="ctr">
+                      <a:solidFill>
+                        <a:srgbClr val="D8E0DA"/>
+                      </a:solidFill>
+                      <a:prstDash val="solid"/>
+                      <a:round/>
+                      <a:headEnd type="none" w="med" len="med"/>
+                      <a:tailEnd type="none" w="med" len="med"/>
+                    </a:lnB>
+                    <a:solidFill>
+                      <a:srgbClr val="FFFFFF"/>
+                    </a:solidFill>
+                  </a:tcPr>
+                </a:tc>
+              </a:tr>
+              <a:tr h="493776">
+                <a:tc>
+                  <a:txBody>
+                    <a:bodyPr/>
+                    <a:lstStyle/>
+                    <a:p>
+                      <a:pPr indent="0" marL="0">
+                        <a:buNone/>
+                      </a:pPr>
+                      <a:r>
+                        <a:rPr lang="en-US" sz="1600" dirty="0">
+                          <a:solidFill>
+                            <a:srgbClr val="172C30"/>
+                          </a:solidFill>
+                          <a:latin typeface="Noto Sans SC" pitchFamily="34" charset="0"/>
+                          <a:ea typeface="Noto Sans SC" pitchFamily="34" charset="-122"/>
+                          <a:cs typeface="Noto Sans SC" pitchFamily="34" charset="-120"/>
+                        </a:rPr>
+                        <a:t>现金储备、预留与取整余量</a:t>
+                      </a:r>
+                      <a:endParaRPr lang="en-US" sz="1600" dirty="0">
+                        <a:latin typeface="Noto Sans SC" charset="0"/>
+                        <a:ea typeface="Noto Sans SC" charset="0"/>
+                        <a:cs typeface="Noto Sans SC" charset="0"/>
+                      </a:endParaRPr>
+                    </a:p>
+                  </a:txBody>
+                  <a:tcPr marL="109728" marR="109728" marT="109728" marB="109728" anchor="ctr">
+                    <a:lnL w="8890" cap="flat" cmpd="sng" algn="ctr">
+                      <a:solidFill>
+                        <a:srgbClr val="D8E0DA"/>
+                      </a:solidFill>
+                      <a:prstDash val="solid"/>
+                      <a:round/>
+                      <a:headEnd type="none" w="med" len="med"/>
+                      <a:tailEnd type="none" w="med" len="med"/>
+                    </a:lnL>
+                    <a:lnR w="8890" cap="flat" cmpd="sng" algn="ctr">
+                      <a:solidFill>
+                        <a:srgbClr val="D8E0DA"/>
+                      </a:solidFill>
+                      <a:prstDash val="solid"/>
+                      <a:round/>
+                      <a:headEnd type="none" w="med" len="med"/>
+                      <a:tailEnd type="none" w="med" len="med"/>
+                    </a:lnR>
+                    <a:lnT w="8890" cap="flat" cmpd="sng" algn="ctr">
+                      <a:solidFill>
+                        <a:srgbClr val="D8E0DA"/>
+                      </a:solidFill>
+                      <a:prstDash val="solid"/>
+                      <a:round/>
+                      <a:headEnd type="none" w="med" len="med"/>
+                      <a:tailEnd type="none" w="med" len="med"/>
+                    </a:lnT>
+                    <a:lnB w="8890" cap="flat" cmpd="sng" algn="ctr">
+                      <a:solidFill>
+                        <a:srgbClr val="D8E0DA"/>
+                      </a:solidFill>
+                      <a:prstDash val="solid"/>
+                      <a:round/>
+                      <a:headEnd type="none" w="med" len="med"/>
+                      <a:tailEnd type="none" w="med" len="med"/>
+                    </a:lnB>
+                    <a:solidFill>
+                      <a:srgbClr val="FFFFFF"/>
+                    </a:solidFill>
+                  </a:tcPr>
+                </a:tc>
+                <a:tc>
+                  <a:txBody>
+                    <a:bodyPr/>
+                    <a:lstStyle/>
+                    <a:p>
+                      <a:pPr indent="0" marL="0">
+                        <a:buNone/>
+                      </a:pPr>
+                      <a:r>
+                        <a:rPr lang="en-US" sz="1600" dirty="0">
+                          <a:solidFill>
+                            <a:srgbClr val="172C30"/>
+                          </a:solidFill>
+                          <a:latin typeface="Noto Sans SC" pitchFamily="34" charset="0"/>
+                          <a:ea typeface="Noto Sans SC" pitchFamily="34" charset="-122"/>
+                          <a:cs typeface="Noto Sans SC" pitchFamily="34" charset="-120"/>
+                        </a:rPr>
+                        <a:t>158.925</a:t>
+                      </a:r>
+                      <a:endParaRPr lang="en-US" sz="1600" dirty="0">
+                        <a:latin typeface="Noto Sans SC" charset="0"/>
+                        <a:ea typeface="Noto Sans SC" charset="0"/>
+                        <a:cs typeface="Noto Sans SC" charset="0"/>
+                      </a:endParaRPr>
+                    </a:p>
+                  </a:txBody>
+                  <a:tcPr marL="109728" marR="109728" marT="109728" marB="109728" anchor="ctr">
+                    <a:lnL w="8890" cap="flat" cmpd="sng" algn="ctr">
+                      <a:solidFill>
+                        <a:srgbClr val="D8E0DA"/>
+                      </a:solidFill>
+                      <a:prstDash val="solid"/>
+                      <a:round/>
+                      <a:headEnd type="none" w="med" len="med"/>
+                      <a:tailEnd type="none" w="med" len="med"/>
+                    </a:lnL>
+                    <a:lnR w="8890" cap="flat" cmpd="sng" algn="ctr">
+                      <a:solidFill>
+                        <a:srgbClr val="D8E0DA"/>
+                      </a:solidFill>
+                      <a:prstDash val="solid"/>
+                      <a:round/>
+                      <a:headEnd type="none" w="med" len="med"/>
+                      <a:tailEnd type="none" w="med" len="med"/>
+                    </a:lnR>
+                    <a:lnT w="8890" cap="flat" cmpd="sng" algn="ctr">
+                      <a:solidFill>
+                        <a:srgbClr val="D8E0DA"/>
+                      </a:solidFill>
+                      <a:prstDash val="solid"/>
+                      <a:round/>
+                      <a:headEnd type="none" w="med" len="med"/>
+                      <a:tailEnd type="none" w="med" len="med"/>
+                    </a:lnT>
+                    <a:lnB w="8890" cap="flat" cmpd="sng" algn="ctr">
+                      <a:solidFill>
+                        <a:srgbClr val="D8E0DA"/>
+                      </a:solidFill>
+                      <a:prstDash val="solid"/>
+                      <a:round/>
+                      <a:headEnd type="none" w="med" len="med"/>
+                      <a:tailEnd type="none" w="med" len="med"/>
+                    </a:lnB>
+                    <a:solidFill>
+                      <a:srgbClr val="FFFFFF"/>
+                    </a:solidFill>
+                  </a:tcPr>
+                </a:tc>
+                <a:tc>
+                  <a:txBody>
+                    <a:bodyPr/>
+                    <a:lstStyle/>
+                    <a:p>
+                      <a:pPr indent="0" marL="0">
+                        <a:buNone/>
+                      </a:pPr>
+                      <a:r>
+                        <a:rPr lang="en-US" sz="1600" dirty="0">
+                          <a:solidFill>
+                            <a:srgbClr val="172C30"/>
+                          </a:solidFill>
+                          <a:latin typeface="Noto Sans SC" pitchFamily="34" charset="0"/>
+                          <a:ea typeface="Noto Sans SC" pitchFamily="34" charset="-122"/>
+                          <a:cs typeface="Noto Sans SC" pitchFamily="34" charset="-120"/>
+                        </a:rPr>
+                        <a:t>正常运营储备、风险预留、厂商合作预留及余量</a:t>
                       </a:r>
                       <a:endParaRPr lang="en-US" sz="1600" dirty="0">
                         <a:latin typeface="Noto Sans SC" charset="0"/>
@@ -34241,32 +34743,16 @@
           </a:graphicData>
         </a:graphic>
       </p:graphicFrame>
-      <p:graphicFrame>
-        <p:nvGraphicFramePr>
-          <p:cNvPr id="9" name="Chart 0" descr=""/>
-          <p:cNvGraphicFramePr/>
-          <p:nvPr/>
-        </p:nvGraphicFramePr>
-        <p:xfrm>
-          <a:off x="6629400" y="2286000"/>
-          <a:ext cx="4937760" cy="2862072"/>
-        </p:xfrm>
-        <a:graphic xmlns:a="http://schemas.openxmlformats.org/drawingml/2006/main">
-          <a:graphicData uri="http://schemas.openxmlformats.org/drawingml/2006/chart">
-            <c:chart xmlns:c="http://schemas.openxmlformats.org/drawingml/2006/chart" r:id="rId1"/>
-          </a:graphicData>
-        </a:graphic>
-      </p:graphicFrame>
-      <p:sp>
-        <p:nvSpPr>
-          <p:cNvPr id="10" name="Text 6"/>
+      <p:sp>
+        <p:nvSpPr>
+          <p:cNvPr id="9" name="Text 6"/>
           <p:cNvSpPr/>
           <p:nvPr/>
         </p:nvSpPr>
         <p:spPr>
           <a:xfrm>
-            <a:off x="731520" y="5413248"/>
-            <a:ext cx="2194560" cy="438912"/>
+            <a:off x="731520" y="5806440"/>
+            <a:ext cx="6492240" cy="347472"/>
           </a:xfrm>
           <a:prstGeom prst="rect">
             <a:avLst/>
@@ -34284,7 +34770,7 @@
               <a:buNone/>
             </a:pPr>
             <a:r>
-              <a:rPr lang="en-US" sz="2400" b="1" dirty="0">
+              <a:rPr lang="en-US" sz="2300" b="1" dirty="0">
                 <a:solidFill>
                   <a:srgbClr val="007C73"/>
                 </a:solidFill>
@@ -34292,22 +34778,22 @@
                 <a:ea typeface="Noto Sans SC" pitchFamily="34" charset="-122"/>
                 <a:cs typeface="Noto Sans SC" pitchFamily="34" charset="-120"/>
               </a:rPr>
-              <a:t>基准年度</a:t>
+              <a:t>最低追加需求 463.025万元</a:t>
             </a:r>
-            <a:endParaRPr lang="en-US" sz="2400" dirty="0"/>
+            <a:endParaRPr lang="en-US" sz="2300" dirty="0"/>
           </a:p>
         </p:txBody>
       </p:sp>
       <p:sp>
         <p:nvSpPr>
-          <p:cNvPr id="11" name="Text 7"/>
+          <p:cNvPr id="10" name="Text 7"/>
           <p:cNvSpPr/>
           <p:nvPr/>
         </p:nvSpPr>
         <p:spPr>
           <a:xfrm>
-            <a:off x="3017520" y="5349240"/>
-            <a:ext cx="2651760" cy="768096"/>
+            <a:off x="7406640" y="5815584"/>
+            <a:ext cx="4069080" cy="356616"/>
           </a:xfrm>
           <a:prstGeom prst="rect">
             <a:avLst/>
@@ -34325,150 +34811,17 @@
               <a:buNone/>
             </a:pPr>
             <a:r>
-              <a:rPr lang="en-US" sz="1700" dirty="0">
+              <a:rPr lang="en-US" sz="2200" b="1" dirty="0">
                 <a:solidFill>
-                  <a:srgbClr val="172C30"/>
+                  <a:srgbClr val="7550A4"/>
                 </a:solidFill>
                 <a:latin typeface="Noto Sans SC" pitchFamily="34" charset="0"/>
                 <a:ea typeface="Noto Sans SC" pitchFamily="34" charset="-122"/>
                 <a:cs typeface="Noto Sans SC" pitchFamily="34" charset="-120"/>
               </a:rPr>
-              <a:t>2027 收入 7.20</a:t>
+              <a:t>资金规划目标 500万元</a:t>
             </a:r>
-            <a:endParaRPr lang="en-US" sz="1700" dirty="0"/>
-          </a:p>
-          <a:p>
-            <a:pPr indent="0" marL="0">
-              <a:buNone/>
-            </a:pPr>
-            <a:r>
-              <a:rPr lang="en-US" sz="1700" dirty="0">
-                <a:solidFill>
-                  <a:srgbClr val="172C30"/>
-                </a:solidFill>
-                <a:latin typeface="Noto Sans SC" pitchFamily="34" charset="0"/>
-                <a:ea typeface="Noto Sans SC" pitchFamily="34" charset="-122"/>
-                <a:cs typeface="Noto Sans SC" pitchFamily="34" charset="-120"/>
-              </a:rPr>
-              <a:t>费用 13.264</a:t>
-            </a:r>
-            <a:endParaRPr lang="en-US" sz="1700" dirty="0"/>
-          </a:p>
-        </p:txBody>
-      </p:sp>
-      <p:sp>
-        <p:nvSpPr>
-          <p:cNvPr id="12" name="Text 8"/>
-          <p:cNvSpPr/>
-          <p:nvPr/>
-        </p:nvSpPr>
-        <p:spPr>
-          <a:xfrm>
-            <a:off x="5833872" y="5349240"/>
-            <a:ext cx="2651760" cy="768096"/>
-          </a:xfrm>
-          <a:prstGeom prst="rect">
-            <a:avLst/>
-          </a:prstGeom>
-          <a:noFill/>
-          <a:ln/>
-        </p:spPr>
-        <p:txBody>
-          <a:bodyPr wrap="square" lIns="0" tIns="0" rIns="0" bIns="0" rtlCol="0" anchor="ctr">
-            <a:spAutoFit/>
-          </a:bodyPr>
-          <a:lstStyle/>
-          <a:p>
-            <a:pPr indent="0" marL="0">
-              <a:buNone/>
-            </a:pPr>
-            <a:r>
-              <a:rPr lang="en-US" sz="1700" dirty="0">
-                <a:solidFill>
-                  <a:srgbClr val="172C30"/>
-                </a:solidFill>
-                <a:latin typeface="Noto Sans SC" pitchFamily="34" charset="0"/>
-                <a:ea typeface="Noto Sans SC" pitchFamily="34" charset="-122"/>
-                <a:cs typeface="Noto Sans SC" pitchFamily="34" charset="-120"/>
-              </a:rPr>
-              <a:t>2028 收入 18.00</a:t>
-            </a:r>
-            <a:endParaRPr lang="en-US" sz="1700" dirty="0"/>
-          </a:p>
-          <a:p>
-            <a:pPr indent="0" marL="0">
-              <a:buNone/>
-            </a:pPr>
-            <a:r>
-              <a:rPr lang="en-US" sz="1700" dirty="0">
-                <a:solidFill>
-                  <a:srgbClr val="172C30"/>
-                </a:solidFill>
-                <a:latin typeface="Noto Sans SC" pitchFamily="34" charset="0"/>
-                <a:ea typeface="Noto Sans SC" pitchFamily="34" charset="-122"/>
-                <a:cs typeface="Noto Sans SC" pitchFamily="34" charset="-120"/>
-              </a:rPr>
-              <a:t>费用 18.840</a:t>
-            </a:r>
-            <a:endParaRPr lang="en-US" sz="1700" dirty="0"/>
-          </a:p>
-        </p:txBody>
-      </p:sp>
-      <p:sp>
-        <p:nvSpPr>
-          <p:cNvPr id="13" name="Text 9"/>
-          <p:cNvSpPr/>
-          <p:nvPr/>
-        </p:nvSpPr>
-        <p:spPr>
-          <a:xfrm>
-            <a:off x="8650224" y="5349240"/>
-            <a:ext cx="2651760" cy="768096"/>
-          </a:xfrm>
-          <a:prstGeom prst="rect">
-            <a:avLst/>
-          </a:prstGeom>
-          <a:noFill/>
-          <a:ln/>
-        </p:spPr>
-        <p:txBody>
-          <a:bodyPr wrap="square" lIns="0" tIns="0" rIns="0" bIns="0" rtlCol="0" anchor="ctr">
-            <a:spAutoFit/>
-          </a:bodyPr>
-          <a:lstStyle/>
-          <a:p>
-            <a:pPr indent="0" marL="0">
-              <a:buNone/>
-            </a:pPr>
-            <a:r>
-              <a:rPr lang="en-US" sz="1700" dirty="0">
-                <a:solidFill>
-                  <a:srgbClr val="172C30"/>
-                </a:solidFill>
-                <a:latin typeface="Noto Sans SC" pitchFamily="34" charset="0"/>
-                <a:ea typeface="Noto Sans SC" pitchFamily="34" charset="-122"/>
-                <a:cs typeface="Noto Sans SC" pitchFamily="34" charset="-120"/>
-              </a:rPr>
-              <a:t>2029 收入 32.40</a:t>
-            </a:r>
-            <a:endParaRPr lang="en-US" sz="1700" dirty="0"/>
-          </a:p>
-          <a:p>
-            <a:pPr indent="0" marL="0">
-              <a:buNone/>
-            </a:pPr>
-            <a:r>
-              <a:rPr lang="en-US" sz="1700" dirty="0">
-                <a:solidFill>
-                  <a:srgbClr val="172C30"/>
-                </a:solidFill>
-                <a:latin typeface="Noto Sans SC" pitchFamily="34" charset="0"/>
-                <a:ea typeface="Noto Sans SC" pitchFamily="34" charset="-122"/>
-                <a:cs typeface="Noto Sans SC" pitchFamily="34" charset="-120"/>
-              </a:rPr>
-              <a:t>费用 26.968</a:t>
-            </a:r>
-            <a:endParaRPr lang="en-US" sz="1700" dirty="0"/>
+            <a:endParaRPr lang="en-US" sz="2200" dirty="0"/>
           </a:p>
         </p:txBody>
       </p:sp>
@@ -34539,7 +34892,7 @@
                 <a:ea typeface="Noto Sans SC" pitchFamily="34" charset="-122"/>
                 <a:cs typeface="Noto Sans SC" pitchFamily="34" charset="-120"/>
               </a:rPr>
-              <a:t>31 / 工时与现金</a:t>
+              <a:t>31 / 厂商合作与结算</a:t>
             </a:r>
             <a:endParaRPr lang="en-US" sz="1100" dirty="0"/>
           </a:p>
@@ -34580,7 +34933,7 @@
                 <a:ea typeface="Noto Sans SC" pitchFamily="34" charset="-122"/>
                 <a:cs typeface="Noto Sans SC" pitchFamily="34" charset="-120"/>
               </a:rPr>
-              <a:t>让服务范围、交付产能和资金节奏匹配</a:t>
+              <a:t>把合作费用、预付额度和保证金分开管理</a:t>
             </a:r>
             <a:endParaRPr lang="en-US" sz="3000" dirty="0"/>
           </a:p>
@@ -34621,7 +34974,7 @@
                 <a:ea typeface="Noto Sans SC" pitchFamily="34" charset="-122"/>
                 <a:cs typeface="Noto Sans SC" pitchFamily="34" charset="-120"/>
               </a:rPr>
-              <a:t>单变量工时比较 · 服务价与其他直接费用保持不变</a:t>
+              <a:t>预算先预留合作现金30万元；取得厂商条款后，按具体用途更新。</a:t>
             </a:r>
             <a:endParaRPr lang="en-US" sz="1500" dirty="0"/>
           </a:p>
@@ -34747,7 +35100,7 @@
           </p:nvPr>
         </p:nvGraphicFramePr>
         <p:xfrm>
-          <a:off x="594360" y="2286000"/>
+          <a:off x="594360" y="2148840"/>
           <a:ext cx="10972800" cy="914400"/>
         </p:xfrm>
         <a:graphic>
@@ -34755,11 +35108,11 @@
             <a:tbl>
               <a:tblPr/>
               <a:tblGrid>
-                <a:gridCol w="3108960"/>
-                <a:gridCol w="3749040"/>
-                <a:gridCol w="4114800"/>
+                <a:gridCol w="2834640"/>
+                <a:gridCol w="3703320"/>
+                <a:gridCol w="4434840"/>
               </a:tblGrid>
-              <a:tr h="649224">
+              <a:tr h="704088">
                 <a:tc>
                   <a:txBody>
                     <a:bodyPr/>
@@ -34769,7 +35122,7 @@
                         <a:buNone/>
                       </a:pPr>
                       <a:r>
-                        <a:rPr lang="en-US" sz="2000" b="1" dirty="0">
+                        <a:rPr lang="en-US" sz="1800" b="1" dirty="0">
                           <a:solidFill>
                             <a:srgbClr val="007C73"/>
                           </a:solidFill>
@@ -34777,9 +35130,9 @@
                           <a:ea typeface="Noto Sans SC" pitchFamily="34" charset="-122"/>
                           <a:cs typeface="Noto Sans SC" pitchFamily="34" charset="-120"/>
                         </a:rPr>
-                        <a:t>交付工时</a:t>
+                        <a:t>合作项目</a:t>
                       </a:r>
-                      <a:endParaRPr lang="en-US" sz="2000" dirty="0">
+                      <a:endParaRPr lang="en-US" sz="1800" dirty="0">
                         <a:latin typeface="Noto Sans SC" charset="0"/>
                         <a:ea typeface="Noto Sans SC" charset="0"/>
                         <a:cs typeface="Noto Sans SC" charset="0"/>
@@ -34837,7 +35190,7 @@
                         <a:buNone/>
                       </a:pPr>
                       <a:r>
-                        <a:rPr lang="en-US" sz="2000" b="1" dirty="0">
+                        <a:rPr lang="en-US" sz="1800" b="1" dirty="0">
                           <a:solidFill>
                             <a:srgbClr val="007C73"/>
                           </a:solidFill>
@@ -34845,9 +35198,9 @@
                           <a:ea typeface="Noto Sans SC" pitchFamily="34" charset="-122"/>
                           <a:cs typeface="Noto Sans SC" pitchFamily="34" charset="-120"/>
                         </a:rPr>
-                        <a:t>人工成本（元）</a:t>
+                        <a:t>现金如何占用</a:t>
                       </a:r>
-                      <a:endParaRPr lang="en-US" sz="2000" dirty="0">
+                      <a:endParaRPr lang="en-US" sz="1800" dirty="0">
                         <a:latin typeface="Noto Sans SC" charset="0"/>
                         <a:ea typeface="Noto Sans SC" charset="0"/>
                         <a:cs typeface="Noto Sans SC" charset="0"/>
@@ -34905,7 +35258,7 @@
                         <a:buNone/>
                       </a:pPr>
                       <a:r>
-                        <a:rPr lang="en-US" sz="2000" b="1" dirty="0">
+                        <a:rPr lang="en-US" sz="1800" b="1" dirty="0">
                           <a:solidFill>
                             <a:srgbClr val="007C73"/>
                           </a:solidFill>
@@ -34913,9 +35266,9 @@
                           <a:ea typeface="Noto Sans SC" pitchFamily="34" charset="-122"/>
                           <a:cs typeface="Noto Sans SC" pitchFamily="34" charset="-120"/>
                         </a:rPr>
-                        <a:t>固定费用前贡献（元）</a:t>
+                        <a:t>费用与资产如何记录</a:t>
                       </a:r>
-                      <a:endParaRPr lang="en-US" sz="2000" dirty="0">
+                      <a:endParaRPr lang="en-US" sz="1800" dirty="0">
                         <a:latin typeface="Noto Sans SC" charset="0"/>
                         <a:ea typeface="Noto Sans SC" charset="0"/>
                         <a:cs typeface="Noto Sans SC" charset="0"/>
@@ -34965,7 +35318,7 @@
                   </a:tcPr>
                 </a:tc>
               </a:tr>
-              <a:tr h="649224">
+              <a:tr h="704088">
                 <a:tc>
                   <a:txBody>
                     <a:bodyPr/>
@@ -34975,7 +35328,7 @@
                         <a:buNone/>
                       </a:pPr>
                       <a:r>
-                        <a:rPr lang="en-US" sz="2000" dirty="0">
+                        <a:rPr lang="en-US" sz="1800" dirty="0">
                           <a:solidFill>
                             <a:srgbClr val="172C30"/>
                           </a:solidFill>
@@ -34983,9 +35336,9 @@
                           <a:ea typeface="Noto Sans SC" pitchFamily="34" charset="-122"/>
                           <a:cs typeface="Noto Sans SC" pitchFamily="34" charset="-120"/>
                         </a:rPr>
-                        <a:t>80小时</a:t>
+                        <a:t>不可退还的合作费</a:t>
                       </a:r>
-                      <a:endParaRPr lang="en-US" sz="2000" dirty="0">
+                      <a:endParaRPr lang="en-US" sz="1800" dirty="0">
                         <a:latin typeface="Noto Sans SC" charset="0"/>
                         <a:ea typeface="Noto Sans SC" charset="0"/>
                         <a:cs typeface="Noto Sans SC" charset="0"/>
@@ -35043,7 +35396,7 @@
                         <a:buNone/>
                       </a:pPr>
                       <a:r>
-                        <a:rPr lang="en-US" sz="2000" dirty="0">
+                        <a:rPr lang="en-US" sz="1800" dirty="0">
                           <a:solidFill>
                             <a:srgbClr val="172C30"/>
                           </a:solidFill>
@@ -35051,9 +35404,9 @@
                           <a:ea typeface="Noto Sans SC" pitchFamily="34" charset="-122"/>
                           <a:cs typeface="Noto Sans SC" pitchFamily="34" charset="-120"/>
                         </a:rPr>
-                        <a:t>6,400</a:t>
+                        <a:t>按合同约定时间支付</a:t>
                       </a:r>
-                      <a:endParaRPr lang="en-US" sz="2000" dirty="0">
+                      <a:endParaRPr lang="en-US" sz="1800" dirty="0">
                         <a:latin typeface="Noto Sans SC" charset="0"/>
                         <a:ea typeface="Noto Sans SC" charset="0"/>
                         <a:cs typeface="Noto Sans SC" charset="0"/>
@@ -35111,7 +35464,7 @@
                         <a:buNone/>
                       </a:pPr>
                       <a:r>
-                        <a:rPr lang="en-US" sz="2000" dirty="0">
+                        <a:rPr lang="en-US" sz="1800" dirty="0">
                           <a:solidFill>
                             <a:srgbClr val="172C30"/>
                           </a:solidFill>
@@ -35119,9 +35472,9 @@
                           <a:ea typeface="Noto Sans SC" pitchFamily="34" charset="-122"/>
                           <a:cs typeface="Noto Sans SC" pitchFamily="34" charset="-120"/>
                         </a:rPr>
-                        <a:t>9,240</a:t>
+                        <a:t>计入费用，并占用合作预留</a:t>
                       </a:r>
-                      <a:endParaRPr lang="en-US" sz="2000" dirty="0">
+                      <a:endParaRPr lang="en-US" sz="1800" dirty="0">
                         <a:latin typeface="Noto Sans SC" charset="0"/>
                         <a:ea typeface="Noto Sans SC" charset="0"/>
                         <a:cs typeface="Noto Sans SC" charset="0"/>
@@ -35171,7 +35524,7 @@
                   </a:tcPr>
                 </a:tc>
               </a:tr>
-              <a:tr h="649224">
+              <a:tr h="704088">
                 <a:tc>
                   <a:txBody>
                     <a:bodyPr/>
@@ -35181,7 +35534,7 @@
                         <a:buNone/>
                       </a:pPr>
                       <a:r>
-                        <a:rPr lang="en-US" sz="2000" dirty="0">
+                        <a:rPr lang="en-US" sz="1800" dirty="0">
                           <a:solidFill>
                             <a:srgbClr val="172C30"/>
                           </a:solidFill>
@@ -35189,9 +35542,9 @@
                           <a:ea typeface="Noto Sans SC" pitchFamily="34" charset="-122"/>
                           <a:cs typeface="Noto Sans SC" pitchFamily="34" charset="-120"/>
                         </a:rPr>
-                        <a:t>100小时</a:t>
+                        <a:t>可消费的预付算力额度</a:t>
                       </a:r>
-                      <a:endParaRPr lang="en-US" sz="2000" dirty="0">
+                      <a:endParaRPr lang="en-US" sz="1800" dirty="0">
                         <a:latin typeface="Noto Sans SC" charset="0"/>
                         <a:ea typeface="Noto Sans SC" charset="0"/>
                         <a:cs typeface="Noto Sans SC" charset="0"/>
@@ -35249,7 +35602,7 @@
                         <a:buNone/>
                       </a:pPr>
                       <a:r>
-                        <a:rPr lang="en-US" sz="2000" dirty="0">
+                        <a:rPr lang="en-US" sz="1800" dirty="0">
                           <a:solidFill>
                             <a:srgbClr val="172C30"/>
                           </a:solidFill>
@@ -35257,9 +35610,9 @@
                           <a:ea typeface="Noto Sans SC" pitchFamily="34" charset="-122"/>
                           <a:cs typeface="Noto Sans SC" pitchFamily="34" charset="-120"/>
                         </a:rPr>
-                        <a:t>8,000</a:t>
+                        <a:t>充值时先支付现金</a:t>
                       </a:r>
-                      <a:endParaRPr lang="en-US" sz="2000" dirty="0">
+                      <a:endParaRPr lang="en-US" sz="1800" dirty="0">
                         <a:latin typeface="Noto Sans SC" charset="0"/>
                         <a:ea typeface="Noto Sans SC" charset="0"/>
                         <a:cs typeface="Noto Sans SC" charset="0"/>
@@ -35317,7 +35670,7 @@
                         <a:buNone/>
                       </a:pPr>
                       <a:r>
-                        <a:rPr lang="en-US" sz="2000" dirty="0">
+                        <a:rPr lang="en-US" sz="1800" dirty="0">
                           <a:solidFill>
                             <a:srgbClr val="172C30"/>
                           </a:solidFill>
@@ -35325,9 +35678,9 @@
                           <a:ea typeface="Noto Sans SC" pitchFamily="34" charset="-122"/>
                           <a:cs typeface="Noto Sans SC" pitchFamily="34" charset="-120"/>
                         </a:rPr>
-                        <a:t>7,640</a:t>
+                        <a:t>留作额度资产，消耗后抵扣采购成本</a:t>
                       </a:r>
-                      <a:endParaRPr lang="en-US" sz="2000" dirty="0">
+                      <a:endParaRPr lang="en-US" sz="1800" dirty="0">
                         <a:latin typeface="Noto Sans SC" charset="0"/>
                         <a:ea typeface="Noto Sans SC" charset="0"/>
                         <a:cs typeface="Noto Sans SC" charset="0"/>
@@ -35377,7 +35730,7 @@
                   </a:tcPr>
                 </a:tc>
               </a:tr>
-              <a:tr h="649224">
+              <a:tr h="704088">
                 <a:tc>
                   <a:txBody>
                     <a:bodyPr/>
@@ -35387,7 +35740,7 @@
                         <a:buNone/>
                       </a:pPr>
                       <a:r>
-                        <a:rPr lang="en-US" sz="2000" dirty="0">
+                        <a:rPr lang="en-US" sz="1800" dirty="0">
                           <a:solidFill>
                             <a:srgbClr val="172C30"/>
                           </a:solidFill>
@@ -35395,9 +35748,9 @@
                           <a:ea typeface="Noto Sans SC" pitchFamily="34" charset="-122"/>
                           <a:cs typeface="Noto Sans SC" pitchFamily="34" charset="-120"/>
                         </a:rPr>
-                        <a:t>120小时</a:t>
+                        <a:t>可退还的保证金</a:t>
                       </a:r>
-                      <a:endParaRPr lang="en-US" sz="2000" dirty="0">
+                      <a:endParaRPr lang="en-US" sz="1800" dirty="0">
                         <a:latin typeface="Noto Sans SC" charset="0"/>
                         <a:ea typeface="Noto Sans SC" charset="0"/>
                         <a:cs typeface="Noto Sans SC" charset="0"/>
@@ -35455,7 +35808,7 @@
                         <a:buNone/>
                       </a:pPr>
                       <a:r>
-                        <a:rPr lang="en-US" sz="2000" dirty="0">
+                        <a:rPr lang="en-US" sz="1800" dirty="0">
                           <a:solidFill>
                             <a:srgbClr val="172C30"/>
                           </a:solidFill>
@@ -35463,9 +35816,9 @@
                           <a:ea typeface="Noto Sans SC" pitchFamily="34" charset="-122"/>
                           <a:cs typeface="Noto Sans SC" pitchFamily="34" charset="-120"/>
                         </a:rPr>
-                        <a:t>9,600</a:t>
+                        <a:t>签约时支付，按条件收回</a:t>
                       </a:r>
-                      <a:endParaRPr lang="en-US" sz="2000" dirty="0">
+                      <a:endParaRPr lang="en-US" sz="1800" dirty="0">
                         <a:latin typeface="Noto Sans SC" charset="0"/>
                         <a:ea typeface="Noto Sans SC" charset="0"/>
                         <a:cs typeface="Noto Sans SC" charset="0"/>
@@ -35523,7 +35876,7 @@
                         <a:buNone/>
                       </a:pPr>
                       <a:r>
-                        <a:rPr lang="en-US" sz="2000" dirty="0">
+                        <a:rPr lang="en-US" sz="1800" dirty="0">
                           <a:solidFill>
                             <a:srgbClr val="172C30"/>
                           </a:solidFill>
@@ -35531,9 +35884,9 @@
                           <a:ea typeface="Noto Sans SC" pitchFamily="34" charset="-122"/>
                           <a:cs typeface="Noto Sans SC" pitchFamily="34" charset="-120"/>
                         </a:rPr>
-                        <a:t>6,040</a:t>
+                        <a:t>单列保证金资产，跟踪返还时间</a:t>
                       </a:r>
-                      <a:endParaRPr lang="en-US" sz="2000" dirty="0">
+                      <a:endParaRPr lang="en-US" sz="1800" dirty="0">
                         <a:latin typeface="Noto Sans SC" charset="0"/>
                         <a:ea typeface="Noto Sans SC" charset="0"/>
                         <a:cs typeface="Noto Sans SC" charset="0"/>
@@ -35595,8 +35948,8 @@
         </p:nvSpPr>
         <p:spPr>
           <a:xfrm>
-            <a:off x="731520" y="5212080"/>
-            <a:ext cx="2926080" cy="429768"/>
+            <a:off x="777240" y="5230368"/>
+            <a:ext cx="10698480" cy="365760"/>
           </a:xfrm>
           <a:prstGeom prst="rect">
             <a:avLst/>
@@ -35614,7 +35967,7 @@
               <a:buNone/>
             </a:pPr>
             <a:r>
-              <a:rPr lang="en-US" sz="2400" b="1" dirty="0">
+              <a:rPr lang="en-US" sz="1900" b="1" dirty="0">
                 <a:solidFill>
                   <a:srgbClr val="007C73"/>
                 </a:solidFill>
@@ -35622,9 +35975,9 @@
                 <a:ea typeface="Noto Sans SC" pitchFamily="34" charset="-122"/>
                 <a:cs typeface="Noto Sans SC" pitchFamily="34" charset="-120"/>
               </a:rPr>
-              <a:t>基准资金安排</a:t>
+              <a:t>按合同输入金额与时间，分别追踪充值、消耗与保证金返还。</a:t>
             </a:r>
-            <a:endParaRPr lang="en-US" sz="2400" dirty="0"/>
+            <a:endParaRPr lang="en-US" sz="1900" dirty="0"/>
           </a:p>
         </p:txBody>
       </p:sp>
@@ -35636,8 +35989,8 @@
         </p:nvSpPr>
         <p:spPr>
           <a:xfrm>
-            <a:off x="3749040" y="5111496"/>
-            <a:ext cx="7589520" cy="905256"/>
+            <a:off x="777240" y="5715000"/>
+            <a:ext cx="10698480" cy="365760"/>
           </a:xfrm>
           <a:prstGeom prst="rect">
             <a:avLst/>
@@ -35663,24 +36016,7 @@
                 <a:ea typeface="Noto Sans SC" pitchFamily="34" charset="-122"/>
                 <a:cs typeface="Noto Sans SC" pitchFamily="34" charset="-120"/>
               </a:rPr>
-              <a:t>试点情景：期初自有资金2万元；追加预算10.30万元</a:t>
-            </a:r>
-            <a:endParaRPr lang="en-US" sz="1900" dirty="0"/>
-          </a:p>
-          <a:p>
-            <a:pPr indent="0" marL="0">
-              <a:buNone/>
-            </a:pPr>
-            <a:r>
-              <a:rPr lang="en-US" sz="1900" dirty="0">
-                <a:solidFill>
-                  <a:srgbClr val="172C30"/>
-                </a:solidFill>
-                <a:latin typeface="Noto Sans SC" pitchFamily="34" charset="0"/>
-                <a:ea typeface="Noto Sans SC" pitchFamily="34" charset="-122"/>
-                <a:cs typeface="Noto Sans SC" pitchFamily="34" charset="-120"/>
-              </a:rPr>
-              <a:t>由8.30万元现金需求与2万元储备组成</a:t>
+              <a:t>组织额度池、个人订阅与加量，随实际用量和回款更新预算。</a:t>
             </a:r>
             <a:endParaRPr lang="en-US" sz="1900" dirty="0"/>
           </a:p>
@@ -35753,7 +36089,7 @@
                 <a:ea typeface="Noto Sans SC" pitchFamily="34" charset="-122"/>
                 <a:cs typeface="Noto Sans SC" pitchFamily="34" charset="-120"/>
               </a:rPr>
-              <a:t>32 / 成果与路线</a:t>
+              <a:t>32 / 订阅回款与资金</a:t>
             </a:r>
             <a:endParaRPr lang="en-US" sz="1100" dirty="0"/>
           </a:p>
@@ -35794,7 +36130,7 @@
                 <a:ea typeface="Noto Sans SC" pitchFamily="34" charset="-122"/>
                 <a:cs typeface="Noto Sans SC" pitchFamily="34" charset="-120"/>
               </a:rPr>
-              <a:t>推进小学作品、开源社区与组织方案</a:t>
+              <a:t>用回款与合作条款，校准资金计划</a:t>
             </a:r>
             <a:endParaRPr lang="en-US" sz="3000" dirty="0"/>
           </a:p>
@@ -35835,7 +36171,7 @@
                 <a:ea typeface="Noto Sans SC" pitchFamily="34" charset="-122"/>
                 <a:cs typeface="Noto Sans SC" pitchFamily="34" charset="-120"/>
               </a:rPr>
-              <a:t>已有桌面能力支持教学共创，开源与组织后台按阶段建设。</a:t>
+              <a:t>单位：万元 · 同一基准预算下的条件测算 · 订阅销售价格另行设计。</a:t>
             </a:r>
             <a:endParaRPr lang="en-US" sz="1500" dirty="0"/>
           </a:p>
@@ -35949,6 +36285,2920 @@
       <p:graphicFrame>
         <p:nvGraphicFramePr>
           <p:cNvPr id="34" name="Table 0"/>
+          <p:cNvGraphicFramePr>
+            <a:graphicFrameLocks noGrp="1"/>
+          </p:cNvGraphicFramePr>
+          <p:nvPr>
+            <p:extLst>
+              <p:ext uri="{D42A27DB-BD31-4B8C-83A1-F6EECF244321}">
+                <p14:modId xmlns:p14="http://schemas.microsoft.com/office/powerpoint/2010/main" val="1579011935"/>
+              </p:ext>
+            </p:extLst>
+          </p:nvPr>
+        </p:nvGraphicFramePr>
+        <p:xfrm>
+          <a:off x="594360" y="2194560"/>
+          <a:ext cx="10972800" cy="914400"/>
+        </p:xfrm>
+        <a:graphic>
+          <a:graphicData uri="http://schemas.openxmlformats.org/drawingml/2006/table">
+            <a:tbl>
+              <a:tblPr/>
+              <a:tblGrid>
+                <a:gridCol w="5852160"/>
+                <a:gridCol w="2560320"/>
+                <a:gridCol w="2560320"/>
+              </a:tblGrid>
+              <a:tr h="667512">
+                <a:tc>
+                  <a:txBody>
+                    <a:bodyPr/>
+                    <a:lstStyle/>
+                    <a:p>
+                      <a:pPr indent="0" marL="0">
+                        <a:buNone/>
+                      </a:pPr>
+                      <a:r>
+                        <a:rPr lang="en-US" sz="1900" b="1" dirty="0">
+                          <a:solidFill>
+                            <a:srgbClr val="007C73"/>
+                          </a:solidFill>
+                          <a:latin typeface="Noto Sans SC" pitchFamily="34" charset="0"/>
+                          <a:ea typeface="Noto Sans SC" pitchFamily="34" charset="-122"/>
+                          <a:cs typeface="Noto Sans SC" pitchFamily="34" charset="-120"/>
+                        </a:rPr>
+                        <a:t>调整条件</a:t>
+                      </a:r>
+                      <a:endParaRPr lang="en-US" sz="1900" dirty="0">
+                        <a:latin typeface="Noto Sans SC" charset="0"/>
+                        <a:ea typeface="Noto Sans SC" charset="0"/>
+                        <a:cs typeface="Noto Sans SC" charset="0"/>
+                      </a:endParaRPr>
+                    </a:p>
+                  </a:txBody>
+                  <a:tcPr marL="109728" marR="109728" marT="109728" marB="109728" anchor="ctr">
+                    <a:lnL w="8890" cap="flat" cmpd="sng" algn="ctr">
+                      <a:solidFill>
+                        <a:srgbClr val="D8E0DA"/>
+                      </a:solidFill>
+                      <a:prstDash val="solid"/>
+                      <a:round/>
+                      <a:headEnd type="none" w="med" len="med"/>
+                      <a:tailEnd type="none" w="med" len="med"/>
+                    </a:lnL>
+                    <a:lnR w="8890" cap="flat" cmpd="sng" algn="ctr">
+                      <a:solidFill>
+                        <a:srgbClr val="D8E0DA"/>
+                      </a:solidFill>
+                      <a:prstDash val="solid"/>
+                      <a:round/>
+                      <a:headEnd type="none" w="med" len="med"/>
+                      <a:tailEnd type="none" w="med" len="med"/>
+                    </a:lnR>
+                    <a:lnT w="8890" cap="flat" cmpd="sng" algn="ctr">
+                      <a:solidFill>
+                        <a:srgbClr val="D8E0DA"/>
+                      </a:solidFill>
+                      <a:prstDash val="solid"/>
+                      <a:round/>
+                      <a:headEnd type="none" w="med" len="med"/>
+                      <a:tailEnd type="none" w="med" len="med"/>
+                    </a:lnT>
+                    <a:lnB w="8890" cap="flat" cmpd="sng" algn="ctr">
+                      <a:solidFill>
+                        <a:srgbClr val="D8E0DA"/>
+                      </a:solidFill>
+                      <a:prstDash val="solid"/>
+                      <a:round/>
+                      <a:headEnd type="none" w="med" len="med"/>
+                      <a:tailEnd type="none" w="med" len="med"/>
+                    </a:lnB>
+                    <a:solidFill>
+                      <a:srgbClr val="FFFFFF"/>
+                    </a:solidFill>
+                  </a:tcPr>
+                </a:tc>
+                <a:tc>
+                  <a:txBody>
+                    <a:bodyPr/>
+                    <a:lstStyle/>
+                    <a:p>
+                      <a:pPr indent="0" marL="0">
+                        <a:buNone/>
+                      </a:pPr>
+                      <a:r>
+                        <a:rPr lang="en-US" sz="1900" b="1" dirty="0">
+                          <a:solidFill>
+                            <a:srgbClr val="007C73"/>
+                          </a:solidFill>
+                          <a:latin typeface="Noto Sans SC" pitchFamily="34" charset="0"/>
+                          <a:ea typeface="Noto Sans SC" pitchFamily="34" charset="-122"/>
+                          <a:cs typeface="Noto Sans SC" pitchFamily="34" charset="-120"/>
+                        </a:rPr>
+                        <a:t>最低追加需求</a:t>
+                      </a:r>
+                      <a:endParaRPr lang="en-US" sz="1900" dirty="0">
+                        <a:latin typeface="Noto Sans SC" charset="0"/>
+                        <a:ea typeface="Noto Sans SC" charset="0"/>
+                        <a:cs typeface="Noto Sans SC" charset="0"/>
+                      </a:endParaRPr>
+                    </a:p>
+                  </a:txBody>
+                  <a:tcPr marL="109728" marR="109728" marT="109728" marB="109728" anchor="ctr">
+                    <a:lnL w="8890" cap="flat" cmpd="sng" algn="ctr">
+                      <a:solidFill>
+                        <a:srgbClr val="D8E0DA"/>
+                      </a:solidFill>
+                      <a:prstDash val="solid"/>
+                      <a:round/>
+                      <a:headEnd type="none" w="med" len="med"/>
+                      <a:tailEnd type="none" w="med" len="med"/>
+                    </a:lnL>
+                    <a:lnR w="8890" cap="flat" cmpd="sng" algn="ctr">
+                      <a:solidFill>
+                        <a:srgbClr val="D8E0DA"/>
+                      </a:solidFill>
+                      <a:prstDash val="solid"/>
+                      <a:round/>
+                      <a:headEnd type="none" w="med" len="med"/>
+                      <a:tailEnd type="none" w="med" len="med"/>
+                    </a:lnR>
+                    <a:lnT w="8890" cap="flat" cmpd="sng" algn="ctr">
+                      <a:solidFill>
+                        <a:srgbClr val="D8E0DA"/>
+                      </a:solidFill>
+                      <a:prstDash val="solid"/>
+                      <a:round/>
+                      <a:headEnd type="none" w="med" len="med"/>
+                      <a:tailEnd type="none" w="med" len="med"/>
+                    </a:lnT>
+                    <a:lnB w="8890" cap="flat" cmpd="sng" algn="ctr">
+                      <a:solidFill>
+                        <a:srgbClr val="D8E0DA"/>
+                      </a:solidFill>
+                      <a:prstDash val="solid"/>
+                      <a:round/>
+                      <a:headEnd type="none" w="med" len="med"/>
+                      <a:tailEnd type="none" w="med" len="med"/>
+                    </a:lnB>
+                    <a:solidFill>
+                      <a:srgbClr val="FFFFFF"/>
+                    </a:solidFill>
+                  </a:tcPr>
+                </a:tc>
+                <a:tc>
+                  <a:txBody>
+                    <a:bodyPr/>
+                    <a:lstStyle/>
+                    <a:p>
+                      <a:pPr indent="0" marL="0">
+                        <a:buNone/>
+                      </a:pPr>
+                      <a:r>
+                        <a:rPr lang="en-US" sz="1900" b="1" dirty="0">
+                          <a:solidFill>
+                            <a:srgbClr val="007C73"/>
+                          </a:solidFill>
+                          <a:latin typeface="Noto Sans SC" pitchFamily="34" charset="0"/>
+                          <a:ea typeface="Noto Sans SC" pitchFamily="34" charset="-122"/>
+                          <a:cs typeface="Noto Sans SC" pitchFamily="34" charset="-120"/>
+                        </a:rPr>
+                        <a:t>资金目标</a:t>
+                      </a:r>
+                      <a:endParaRPr lang="en-US" sz="1900" dirty="0">
+                        <a:latin typeface="Noto Sans SC" charset="0"/>
+                        <a:ea typeface="Noto Sans SC" charset="0"/>
+                        <a:cs typeface="Noto Sans SC" charset="0"/>
+                      </a:endParaRPr>
+                    </a:p>
+                  </a:txBody>
+                  <a:tcPr marL="109728" marR="109728" marT="109728" marB="109728" anchor="ctr">
+                    <a:lnL w="8890" cap="flat" cmpd="sng" algn="ctr">
+                      <a:solidFill>
+                        <a:srgbClr val="D8E0DA"/>
+                      </a:solidFill>
+                      <a:prstDash val="solid"/>
+                      <a:round/>
+                      <a:headEnd type="none" w="med" len="med"/>
+                      <a:tailEnd type="none" w="med" len="med"/>
+                    </a:lnL>
+                    <a:lnR w="8890" cap="flat" cmpd="sng" algn="ctr">
+                      <a:solidFill>
+                        <a:srgbClr val="D8E0DA"/>
+                      </a:solidFill>
+                      <a:prstDash val="solid"/>
+                      <a:round/>
+                      <a:headEnd type="none" w="med" len="med"/>
+                      <a:tailEnd type="none" w="med" len="med"/>
+                    </a:lnR>
+                    <a:lnT w="8890" cap="flat" cmpd="sng" algn="ctr">
+                      <a:solidFill>
+                        <a:srgbClr val="D8E0DA"/>
+                      </a:solidFill>
+                      <a:prstDash val="solid"/>
+                      <a:round/>
+                      <a:headEnd type="none" w="med" len="med"/>
+                      <a:tailEnd type="none" w="med" len="med"/>
+                    </a:lnT>
+                    <a:lnB w="8890" cap="flat" cmpd="sng" algn="ctr">
+                      <a:solidFill>
+                        <a:srgbClr val="D8E0DA"/>
+                      </a:solidFill>
+                      <a:prstDash val="solid"/>
+                      <a:round/>
+                      <a:headEnd type="none" w="med" len="med"/>
+                      <a:tailEnd type="none" w="med" len="med"/>
+                    </a:lnB>
+                    <a:solidFill>
+                      <a:srgbClr val="FFFFFF"/>
+                    </a:solidFill>
+                  </a:tcPr>
+                </a:tc>
+              </a:tr>
+              <a:tr h="667512">
+                <a:tc>
+                  <a:txBody>
+                    <a:bodyPr/>
+                    <a:lstStyle/>
+                    <a:p>
+                      <a:pPr indent="0" marL="0">
+                        <a:buNone/>
+                      </a:pPr>
+                      <a:r>
+                        <a:rPr lang="en-US" sz="1900" dirty="0">
+                          <a:solidFill>
+                            <a:srgbClr val="172C30"/>
+                          </a:solidFill>
+                          <a:latin typeface="Noto Sans SC" pitchFamily="34" charset="0"/>
+                          <a:ea typeface="Noto Sans SC" pitchFamily="34" charset="-122"/>
+                          <a:cs typeface="Noto Sans SC" pitchFamily="34" charset="-120"/>
+                        </a:rPr>
+                        <a:t>基准覆盖预算</a:t>
+                      </a:r>
+                      <a:endParaRPr lang="en-US" sz="1900" dirty="0">
+                        <a:latin typeface="Noto Sans SC" charset="0"/>
+                        <a:ea typeface="Noto Sans SC" charset="0"/>
+                        <a:cs typeface="Noto Sans SC" charset="0"/>
+                      </a:endParaRPr>
+                    </a:p>
+                  </a:txBody>
+                  <a:tcPr marL="109728" marR="109728" marT="109728" marB="109728" anchor="ctr">
+                    <a:lnL w="8890" cap="flat" cmpd="sng" algn="ctr">
+                      <a:solidFill>
+                        <a:srgbClr val="D8E0DA"/>
+                      </a:solidFill>
+                      <a:prstDash val="solid"/>
+                      <a:round/>
+                      <a:headEnd type="none" w="med" len="med"/>
+                      <a:tailEnd type="none" w="med" len="med"/>
+                    </a:lnL>
+                    <a:lnR w="8890" cap="flat" cmpd="sng" algn="ctr">
+                      <a:solidFill>
+                        <a:srgbClr val="D8E0DA"/>
+                      </a:solidFill>
+                      <a:prstDash val="solid"/>
+                      <a:round/>
+                      <a:headEnd type="none" w="med" len="med"/>
+                      <a:tailEnd type="none" w="med" len="med"/>
+                    </a:lnR>
+                    <a:lnT w="8890" cap="flat" cmpd="sng" algn="ctr">
+                      <a:solidFill>
+                        <a:srgbClr val="D8E0DA"/>
+                      </a:solidFill>
+                      <a:prstDash val="solid"/>
+                      <a:round/>
+                      <a:headEnd type="none" w="med" len="med"/>
+                      <a:tailEnd type="none" w="med" len="med"/>
+                    </a:lnT>
+                    <a:lnB w="8890" cap="flat" cmpd="sng" algn="ctr">
+                      <a:solidFill>
+                        <a:srgbClr val="D8E0DA"/>
+                      </a:solidFill>
+                      <a:prstDash val="solid"/>
+                      <a:round/>
+                      <a:headEnd type="none" w="med" len="med"/>
+                      <a:tailEnd type="none" w="med" len="med"/>
+                    </a:lnB>
+                    <a:solidFill>
+                      <a:srgbClr val="FFFFFF"/>
+                    </a:solidFill>
+                  </a:tcPr>
+                </a:tc>
+                <a:tc>
+                  <a:txBody>
+                    <a:bodyPr/>
+                    <a:lstStyle/>
+                    <a:p>
+                      <a:pPr indent="0" marL="0">
+                        <a:buNone/>
+                      </a:pPr>
+                      <a:r>
+                        <a:rPr lang="en-US" sz="1900" dirty="0">
+                          <a:solidFill>
+                            <a:srgbClr val="172C30"/>
+                          </a:solidFill>
+                          <a:latin typeface="Noto Sans SC" pitchFamily="34" charset="0"/>
+                          <a:ea typeface="Noto Sans SC" pitchFamily="34" charset="-122"/>
+                          <a:cs typeface="Noto Sans SC" pitchFamily="34" charset="-120"/>
+                        </a:rPr>
+                        <a:t>463.025</a:t>
+                      </a:r>
+                      <a:endParaRPr lang="en-US" sz="1900" dirty="0">
+                        <a:latin typeface="Noto Sans SC" charset="0"/>
+                        <a:ea typeface="Noto Sans SC" charset="0"/>
+                        <a:cs typeface="Noto Sans SC" charset="0"/>
+                      </a:endParaRPr>
+                    </a:p>
+                  </a:txBody>
+                  <a:tcPr marL="109728" marR="109728" marT="109728" marB="109728" anchor="ctr">
+                    <a:lnL w="8890" cap="flat" cmpd="sng" algn="ctr">
+                      <a:solidFill>
+                        <a:srgbClr val="D8E0DA"/>
+                      </a:solidFill>
+                      <a:prstDash val="solid"/>
+                      <a:round/>
+                      <a:headEnd type="none" w="med" len="med"/>
+                      <a:tailEnd type="none" w="med" len="med"/>
+                    </a:lnL>
+                    <a:lnR w="8890" cap="flat" cmpd="sng" algn="ctr">
+                      <a:solidFill>
+                        <a:srgbClr val="D8E0DA"/>
+                      </a:solidFill>
+                      <a:prstDash val="solid"/>
+                      <a:round/>
+                      <a:headEnd type="none" w="med" len="med"/>
+                      <a:tailEnd type="none" w="med" len="med"/>
+                    </a:lnR>
+                    <a:lnT w="8890" cap="flat" cmpd="sng" algn="ctr">
+                      <a:solidFill>
+                        <a:srgbClr val="D8E0DA"/>
+                      </a:solidFill>
+                      <a:prstDash val="solid"/>
+                      <a:round/>
+                      <a:headEnd type="none" w="med" len="med"/>
+                      <a:tailEnd type="none" w="med" len="med"/>
+                    </a:lnT>
+                    <a:lnB w="8890" cap="flat" cmpd="sng" algn="ctr">
+                      <a:solidFill>
+                        <a:srgbClr val="D8E0DA"/>
+                      </a:solidFill>
+                      <a:prstDash val="solid"/>
+                      <a:round/>
+                      <a:headEnd type="none" w="med" len="med"/>
+                      <a:tailEnd type="none" w="med" len="med"/>
+                    </a:lnB>
+                    <a:solidFill>
+                      <a:srgbClr val="FFFFFF"/>
+                    </a:solidFill>
+                  </a:tcPr>
+                </a:tc>
+                <a:tc>
+                  <a:txBody>
+                    <a:bodyPr/>
+                    <a:lstStyle/>
+                    <a:p>
+                      <a:pPr indent="0" marL="0">
+                        <a:buNone/>
+                      </a:pPr>
+                      <a:r>
+                        <a:rPr lang="en-US" sz="1900" dirty="0">
+                          <a:solidFill>
+                            <a:srgbClr val="172C30"/>
+                          </a:solidFill>
+                          <a:latin typeface="Noto Sans SC" pitchFamily="34" charset="0"/>
+                          <a:ea typeface="Noto Sans SC" pitchFamily="34" charset="-122"/>
+                          <a:cs typeface="Noto Sans SC" pitchFamily="34" charset="-120"/>
+                        </a:rPr>
+                        <a:t>500.000</a:t>
+                      </a:r>
+                      <a:endParaRPr lang="en-US" sz="1900" dirty="0">
+                        <a:latin typeface="Noto Sans SC" charset="0"/>
+                        <a:ea typeface="Noto Sans SC" charset="0"/>
+                        <a:cs typeface="Noto Sans SC" charset="0"/>
+                      </a:endParaRPr>
+                    </a:p>
+                  </a:txBody>
+                  <a:tcPr marL="109728" marR="109728" marT="109728" marB="109728" anchor="ctr">
+                    <a:lnL w="8890" cap="flat" cmpd="sng" algn="ctr">
+                      <a:solidFill>
+                        <a:srgbClr val="D8E0DA"/>
+                      </a:solidFill>
+                      <a:prstDash val="solid"/>
+                      <a:round/>
+                      <a:headEnd type="none" w="med" len="med"/>
+                      <a:tailEnd type="none" w="med" len="med"/>
+                    </a:lnL>
+                    <a:lnR w="8890" cap="flat" cmpd="sng" algn="ctr">
+                      <a:solidFill>
+                        <a:srgbClr val="D8E0DA"/>
+                      </a:solidFill>
+                      <a:prstDash val="solid"/>
+                      <a:round/>
+                      <a:headEnd type="none" w="med" len="med"/>
+                      <a:tailEnd type="none" w="med" len="med"/>
+                    </a:lnR>
+                    <a:lnT w="8890" cap="flat" cmpd="sng" algn="ctr">
+                      <a:solidFill>
+                        <a:srgbClr val="D8E0DA"/>
+                      </a:solidFill>
+                      <a:prstDash val="solid"/>
+                      <a:round/>
+                      <a:headEnd type="none" w="med" len="med"/>
+                      <a:tailEnd type="none" w="med" len="med"/>
+                    </a:lnT>
+                    <a:lnB w="8890" cap="flat" cmpd="sng" algn="ctr">
+                      <a:solidFill>
+                        <a:srgbClr val="D8E0DA"/>
+                      </a:solidFill>
+                      <a:prstDash val="solid"/>
+                      <a:round/>
+                      <a:headEnd type="none" w="med" len="med"/>
+                      <a:tailEnd type="none" w="med" len="med"/>
+                    </a:lnB>
+                    <a:solidFill>
+                      <a:srgbClr val="FFFFFF"/>
+                    </a:solidFill>
+                  </a:tcPr>
+                </a:tc>
+              </a:tr>
+              <a:tr h="667512">
+                <a:tc>
+                  <a:txBody>
+                    <a:bodyPr/>
+                    <a:lstStyle/>
+                    <a:p>
+                      <a:pPr indent="0" marL="0">
+                        <a:buNone/>
+                      </a:pPr>
+                      <a:r>
+                        <a:rPr lang="en-US" sz="1900" dirty="0">
+                          <a:solidFill>
+                            <a:srgbClr val="172C30"/>
+                          </a:solidFill>
+                          <a:latin typeface="Noto Sans SC" pitchFamily="34" charset="0"/>
+                          <a:ea typeface="Noto Sans SC" pitchFamily="34" charset="-122"/>
+                          <a:cs typeface="Noto Sans SC" pitchFamily="34" charset="-120"/>
+                        </a:rPr>
+                        <a:t>算力成本回收80%，当月收款</a:t>
+                      </a:r>
+                      <a:endParaRPr lang="en-US" sz="1900" dirty="0">
+                        <a:latin typeface="Noto Sans SC" charset="0"/>
+                        <a:ea typeface="Noto Sans SC" charset="0"/>
+                        <a:cs typeface="Noto Sans SC" charset="0"/>
+                      </a:endParaRPr>
+                    </a:p>
+                  </a:txBody>
+                  <a:tcPr marL="109728" marR="109728" marT="109728" marB="109728" anchor="ctr">
+                    <a:lnL w="8890" cap="flat" cmpd="sng" algn="ctr">
+                      <a:solidFill>
+                        <a:srgbClr val="D8E0DA"/>
+                      </a:solidFill>
+                      <a:prstDash val="solid"/>
+                      <a:round/>
+                      <a:headEnd type="none" w="med" len="med"/>
+                      <a:tailEnd type="none" w="med" len="med"/>
+                    </a:lnL>
+                    <a:lnR w="8890" cap="flat" cmpd="sng" algn="ctr">
+                      <a:solidFill>
+                        <a:srgbClr val="D8E0DA"/>
+                      </a:solidFill>
+                      <a:prstDash val="solid"/>
+                      <a:round/>
+                      <a:headEnd type="none" w="med" len="med"/>
+                      <a:tailEnd type="none" w="med" len="med"/>
+                    </a:lnR>
+                    <a:lnT w="8890" cap="flat" cmpd="sng" algn="ctr">
+                      <a:solidFill>
+                        <a:srgbClr val="D8E0DA"/>
+                      </a:solidFill>
+                      <a:prstDash val="solid"/>
+                      <a:round/>
+                      <a:headEnd type="none" w="med" len="med"/>
+                      <a:tailEnd type="none" w="med" len="med"/>
+                    </a:lnT>
+                    <a:lnB w="8890" cap="flat" cmpd="sng" algn="ctr">
+                      <a:solidFill>
+                        <a:srgbClr val="D8E0DA"/>
+                      </a:solidFill>
+                      <a:prstDash val="solid"/>
+                      <a:round/>
+                      <a:headEnd type="none" w="med" len="med"/>
+                      <a:tailEnd type="none" w="med" len="med"/>
+                    </a:lnB>
+                    <a:solidFill>
+                      <a:srgbClr val="FFFFFF"/>
+                    </a:solidFill>
+                  </a:tcPr>
+                </a:tc>
+                <a:tc>
+                  <a:txBody>
+                    <a:bodyPr/>
+                    <a:lstStyle/>
+                    <a:p>
+                      <a:pPr indent="0" marL="0">
+                        <a:buNone/>
+                      </a:pPr>
+                      <a:r>
+                        <a:rPr lang="en-US" sz="1900" dirty="0">
+                          <a:solidFill>
+                            <a:srgbClr val="172C30"/>
+                          </a:solidFill>
+                          <a:latin typeface="Noto Sans SC" pitchFamily="34" charset="0"/>
+                          <a:ea typeface="Noto Sans SC" pitchFamily="34" charset="-122"/>
+                          <a:cs typeface="Noto Sans SC" pitchFamily="34" charset="-120"/>
+                        </a:rPr>
+                        <a:t>373.205</a:t>
+                      </a:r>
+                      <a:endParaRPr lang="en-US" sz="1900" dirty="0">
+                        <a:latin typeface="Noto Sans SC" charset="0"/>
+                        <a:ea typeface="Noto Sans SC" charset="0"/>
+                        <a:cs typeface="Noto Sans SC" charset="0"/>
+                      </a:endParaRPr>
+                    </a:p>
+                  </a:txBody>
+                  <a:tcPr marL="109728" marR="109728" marT="109728" marB="109728" anchor="ctr">
+                    <a:lnL w="8890" cap="flat" cmpd="sng" algn="ctr">
+                      <a:solidFill>
+                        <a:srgbClr val="D8E0DA"/>
+                      </a:solidFill>
+                      <a:prstDash val="solid"/>
+                      <a:round/>
+                      <a:headEnd type="none" w="med" len="med"/>
+                      <a:tailEnd type="none" w="med" len="med"/>
+                    </a:lnL>
+                    <a:lnR w="8890" cap="flat" cmpd="sng" algn="ctr">
+                      <a:solidFill>
+                        <a:srgbClr val="D8E0DA"/>
+                      </a:solidFill>
+                      <a:prstDash val="solid"/>
+                      <a:round/>
+                      <a:headEnd type="none" w="med" len="med"/>
+                      <a:tailEnd type="none" w="med" len="med"/>
+                    </a:lnR>
+                    <a:lnT w="8890" cap="flat" cmpd="sng" algn="ctr">
+                      <a:solidFill>
+                        <a:srgbClr val="D8E0DA"/>
+                      </a:solidFill>
+                      <a:prstDash val="solid"/>
+                      <a:round/>
+                      <a:headEnd type="none" w="med" len="med"/>
+                      <a:tailEnd type="none" w="med" len="med"/>
+                    </a:lnT>
+                    <a:lnB w="8890" cap="flat" cmpd="sng" algn="ctr">
+                      <a:solidFill>
+                        <a:srgbClr val="D8E0DA"/>
+                      </a:solidFill>
+                      <a:prstDash val="solid"/>
+                      <a:round/>
+                      <a:headEnd type="none" w="med" len="med"/>
+                      <a:tailEnd type="none" w="med" len="med"/>
+                    </a:lnB>
+                    <a:solidFill>
+                      <a:srgbClr val="FFFFFF"/>
+                    </a:solidFill>
+                  </a:tcPr>
+                </a:tc>
+                <a:tc>
+                  <a:txBody>
+                    <a:bodyPr/>
+                    <a:lstStyle/>
+                    <a:p>
+                      <a:pPr indent="0" marL="0">
+                        <a:buNone/>
+                      </a:pPr>
+                      <a:r>
+                        <a:rPr lang="en-US" sz="1900" dirty="0">
+                          <a:solidFill>
+                            <a:srgbClr val="172C30"/>
+                          </a:solidFill>
+                          <a:latin typeface="Noto Sans SC" pitchFamily="34" charset="0"/>
+                          <a:ea typeface="Noto Sans SC" pitchFamily="34" charset="-122"/>
+                          <a:cs typeface="Noto Sans SC" pitchFamily="34" charset="-120"/>
+                        </a:rPr>
+                        <a:t>400.000</a:t>
+                      </a:r>
+                      <a:endParaRPr lang="en-US" sz="1900" dirty="0">
+                        <a:latin typeface="Noto Sans SC" charset="0"/>
+                        <a:ea typeface="Noto Sans SC" charset="0"/>
+                        <a:cs typeface="Noto Sans SC" charset="0"/>
+                      </a:endParaRPr>
+                    </a:p>
+                  </a:txBody>
+                  <a:tcPr marL="109728" marR="109728" marT="109728" marB="109728" anchor="ctr">
+                    <a:lnL w="8890" cap="flat" cmpd="sng" algn="ctr">
+                      <a:solidFill>
+                        <a:srgbClr val="D8E0DA"/>
+                      </a:solidFill>
+                      <a:prstDash val="solid"/>
+                      <a:round/>
+                      <a:headEnd type="none" w="med" len="med"/>
+                      <a:tailEnd type="none" w="med" len="med"/>
+                    </a:lnL>
+                    <a:lnR w="8890" cap="flat" cmpd="sng" algn="ctr">
+                      <a:solidFill>
+                        <a:srgbClr val="D8E0DA"/>
+                      </a:solidFill>
+                      <a:prstDash val="solid"/>
+                      <a:round/>
+                      <a:headEnd type="none" w="med" len="med"/>
+                      <a:tailEnd type="none" w="med" len="med"/>
+                    </a:lnR>
+                    <a:lnT w="8890" cap="flat" cmpd="sng" algn="ctr">
+                      <a:solidFill>
+                        <a:srgbClr val="D8E0DA"/>
+                      </a:solidFill>
+                      <a:prstDash val="solid"/>
+                      <a:round/>
+                      <a:headEnd type="none" w="med" len="med"/>
+                      <a:tailEnd type="none" w="med" len="med"/>
+                    </a:lnT>
+                    <a:lnB w="8890" cap="flat" cmpd="sng" algn="ctr">
+                      <a:solidFill>
+                        <a:srgbClr val="D8E0DA"/>
+                      </a:solidFill>
+                      <a:prstDash val="solid"/>
+                      <a:round/>
+                      <a:headEnd type="none" w="med" len="med"/>
+                      <a:tailEnd type="none" w="med" len="med"/>
+                    </a:lnB>
+                    <a:solidFill>
+                      <a:srgbClr val="FFFFFF"/>
+                    </a:solidFill>
+                  </a:tcPr>
+                </a:tc>
+              </a:tr>
+              <a:tr h="667512">
+                <a:tc>
+                  <a:txBody>
+                    <a:bodyPr/>
+                    <a:lstStyle/>
+                    <a:p>
+                      <a:pPr indent="0" marL="0">
+                        <a:buNone/>
+                      </a:pPr>
+                      <a:r>
+                        <a:rPr lang="en-US" sz="1900" dirty="0">
+                          <a:solidFill>
+                            <a:srgbClr val="172C30"/>
+                          </a:solidFill>
+                          <a:latin typeface="Noto Sans SC" pitchFamily="34" charset="0"/>
+                          <a:ea typeface="Noto Sans SC" pitchFamily="34" charset="-122"/>
+                          <a:cs typeface="Noto Sans SC" pitchFamily="34" charset="-120"/>
+                        </a:rPr>
+                        <a:t>成本回收80%，延迟2个月</a:t>
+                      </a:r>
+                      <a:endParaRPr lang="en-US" sz="1900" dirty="0">
+                        <a:latin typeface="Noto Sans SC" charset="0"/>
+                        <a:ea typeface="Noto Sans SC" charset="0"/>
+                        <a:cs typeface="Noto Sans SC" charset="0"/>
+                      </a:endParaRPr>
+                    </a:p>
+                  </a:txBody>
+                  <a:tcPr marL="109728" marR="109728" marT="109728" marB="109728" anchor="ctr">
+                    <a:lnL w="8890" cap="flat" cmpd="sng" algn="ctr">
+                      <a:solidFill>
+                        <a:srgbClr val="D8E0DA"/>
+                      </a:solidFill>
+                      <a:prstDash val="solid"/>
+                      <a:round/>
+                      <a:headEnd type="none" w="med" len="med"/>
+                      <a:tailEnd type="none" w="med" len="med"/>
+                    </a:lnL>
+                    <a:lnR w="8890" cap="flat" cmpd="sng" algn="ctr">
+                      <a:solidFill>
+                        <a:srgbClr val="D8E0DA"/>
+                      </a:solidFill>
+                      <a:prstDash val="solid"/>
+                      <a:round/>
+                      <a:headEnd type="none" w="med" len="med"/>
+                      <a:tailEnd type="none" w="med" len="med"/>
+                    </a:lnR>
+                    <a:lnT w="8890" cap="flat" cmpd="sng" algn="ctr">
+                      <a:solidFill>
+                        <a:srgbClr val="D8E0DA"/>
+                      </a:solidFill>
+                      <a:prstDash val="solid"/>
+                      <a:round/>
+                      <a:headEnd type="none" w="med" len="med"/>
+                      <a:tailEnd type="none" w="med" len="med"/>
+                    </a:lnT>
+                    <a:lnB w="8890" cap="flat" cmpd="sng" algn="ctr">
+                      <a:solidFill>
+                        <a:srgbClr val="D8E0DA"/>
+                      </a:solidFill>
+                      <a:prstDash val="solid"/>
+                      <a:round/>
+                      <a:headEnd type="none" w="med" len="med"/>
+                      <a:tailEnd type="none" w="med" len="med"/>
+                    </a:lnB>
+                    <a:solidFill>
+                      <a:srgbClr val="FFFFFF"/>
+                    </a:solidFill>
+                  </a:tcPr>
+                </a:tc>
+                <a:tc>
+                  <a:txBody>
+                    <a:bodyPr/>
+                    <a:lstStyle/>
+                    <a:p>
+                      <a:pPr indent="0" marL="0">
+                        <a:buNone/>
+                      </a:pPr>
+                      <a:r>
+                        <a:rPr lang="en-US" sz="1900" dirty="0">
+                          <a:solidFill>
+                            <a:srgbClr val="172C30"/>
+                          </a:solidFill>
+                          <a:latin typeface="Noto Sans SC" pitchFamily="34" charset="0"/>
+                          <a:ea typeface="Noto Sans SC" pitchFamily="34" charset="-122"/>
+                          <a:cs typeface="Noto Sans SC" pitchFamily="34" charset="-120"/>
+                        </a:rPr>
+                        <a:t>390.965</a:t>
+                      </a:r>
+                      <a:endParaRPr lang="en-US" sz="1900" dirty="0">
+                        <a:latin typeface="Noto Sans SC" charset="0"/>
+                        <a:ea typeface="Noto Sans SC" charset="0"/>
+                        <a:cs typeface="Noto Sans SC" charset="0"/>
+                      </a:endParaRPr>
+                    </a:p>
+                  </a:txBody>
+                  <a:tcPr marL="109728" marR="109728" marT="109728" marB="109728" anchor="ctr">
+                    <a:lnL w="8890" cap="flat" cmpd="sng" algn="ctr">
+                      <a:solidFill>
+                        <a:srgbClr val="D8E0DA"/>
+                      </a:solidFill>
+                      <a:prstDash val="solid"/>
+                      <a:round/>
+                      <a:headEnd type="none" w="med" len="med"/>
+                      <a:tailEnd type="none" w="med" len="med"/>
+                    </a:lnL>
+                    <a:lnR w="8890" cap="flat" cmpd="sng" algn="ctr">
+                      <a:solidFill>
+                        <a:srgbClr val="D8E0DA"/>
+                      </a:solidFill>
+                      <a:prstDash val="solid"/>
+                      <a:round/>
+                      <a:headEnd type="none" w="med" len="med"/>
+                      <a:tailEnd type="none" w="med" len="med"/>
+                    </a:lnR>
+                    <a:lnT w="8890" cap="flat" cmpd="sng" algn="ctr">
+                      <a:solidFill>
+                        <a:srgbClr val="D8E0DA"/>
+                      </a:solidFill>
+                      <a:prstDash val="solid"/>
+                      <a:round/>
+                      <a:headEnd type="none" w="med" len="med"/>
+                      <a:tailEnd type="none" w="med" len="med"/>
+                    </a:lnT>
+                    <a:lnB w="8890" cap="flat" cmpd="sng" algn="ctr">
+                      <a:solidFill>
+                        <a:srgbClr val="D8E0DA"/>
+                      </a:solidFill>
+                      <a:prstDash val="solid"/>
+                      <a:round/>
+                      <a:headEnd type="none" w="med" len="med"/>
+                      <a:tailEnd type="none" w="med" len="med"/>
+                    </a:lnB>
+                    <a:solidFill>
+                      <a:srgbClr val="FFFFFF"/>
+                    </a:solidFill>
+                  </a:tcPr>
+                </a:tc>
+                <a:tc>
+                  <a:txBody>
+                    <a:bodyPr/>
+                    <a:lstStyle/>
+                    <a:p>
+                      <a:pPr indent="0" marL="0">
+                        <a:buNone/>
+                      </a:pPr>
+                      <a:r>
+                        <a:rPr lang="en-US" sz="1900" dirty="0">
+                          <a:solidFill>
+                            <a:srgbClr val="172C30"/>
+                          </a:solidFill>
+                          <a:latin typeface="Noto Sans SC" pitchFamily="34" charset="0"/>
+                          <a:ea typeface="Noto Sans SC" pitchFamily="34" charset="-122"/>
+                          <a:cs typeface="Noto Sans SC" pitchFamily="34" charset="-120"/>
+                        </a:rPr>
+                        <a:t>400.000</a:t>
+                      </a:r>
+                      <a:endParaRPr lang="en-US" sz="1900" dirty="0">
+                        <a:latin typeface="Noto Sans SC" charset="0"/>
+                        <a:ea typeface="Noto Sans SC" charset="0"/>
+                        <a:cs typeface="Noto Sans SC" charset="0"/>
+                      </a:endParaRPr>
+                    </a:p>
+                  </a:txBody>
+                  <a:tcPr marL="109728" marR="109728" marT="109728" marB="109728" anchor="ctr">
+                    <a:lnL w="8890" cap="flat" cmpd="sng" algn="ctr">
+                      <a:solidFill>
+                        <a:srgbClr val="D8E0DA"/>
+                      </a:solidFill>
+                      <a:prstDash val="solid"/>
+                      <a:round/>
+                      <a:headEnd type="none" w="med" len="med"/>
+                      <a:tailEnd type="none" w="med" len="med"/>
+                    </a:lnL>
+                    <a:lnR w="8890" cap="flat" cmpd="sng" algn="ctr">
+                      <a:solidFill>
+                        <a:srgbClr val="D8E0DA"/>
+                      </a:solidFill>
+                      <a:prstDash val="solid"/>
+                      <a:round/>
+                      <a:headEnd type="none" w="med" len="med"/>
+                      <a:tailEnd type="none" w="med" len="med"/>
+                    </a:lnR>
+                    <a:lnT w="8890" cap="flat" cmpd="sng" algn="ctr">
+                      <a:solidFill>
+                        <a:srgbClr val="D8E0DA"/>
+                      </a:solidFill>
+                      <a:prstDash val="solid"/>
+                      <a:round/>
+                      <a:headEnd type="none" w="med" len="med"/>
+                      <a:tailEnd type="none" w="med" len="med"/>
+                    </a:lnT>
+                    <a:lnB w="8890" cap="flat" cmpd="sng" algn="ctr">
+                      <a:solidFill>
+                        <a:srgbClr val="D8E0DA"/>
+                      </a:solidFill>
+                      <a:prstDash val="solid"/>
+                      <a:round/>
+                      <a:headEnd type="none" w="med" len="med"/>
+                      <a:tailEnd type="none" w="med" len="med"/>
+                    </a:lnB>
+                    <a:solidFill>
+                      <a:srgbClr val="FFFFFF"/>
+                    </a:solidFill>
+                  </a:tcPr>
+                </a:tc>
+              </a:tr>
+              <a:tr h="667512">
+                <a:tc>
+                  <a:txBody>
+                    <a:bodyPr/>
+                    <a:lstStyle/>
+                    <a:p>
+                      <a:pPr indent="0" marL="0">
+                        <a:buNone/>
+                      </a:pPr>
+                      <a:r>
+                        <a:rPr lang="en-US" sz="1900" dirty="0">
+                          <a:solidFill>
+                            <a:srgbClr val="172C30"/>
+                          </a:solidFill>
+                          <a:latin typeface="Noto Sans SC" pitchFamily="34" charset="0"/>
+                          <a:ea typeface="Noto Sans SC" pitchFamily="34" charset="-122"/>
+                          <a:cs typeface="Noto Sans SC" pitchFamily="34" charset="-120"/>
+                        </a:rPr>
+                        <a:t>不可退合作费100万元</a:t>
+                      </a:r>
+                      <a:endParaRPr lang="en-US" sz="1900" dirty="0">
+                        <a:latin typeface="Noto Sans SC" charset="0"/>
+                        <a:ea typeface="Noto Sans SC" charset="0"/>
+                        <a:cs typeface="Noto Sans SC" charset="0"/>
+                      </a:endParaRPr>
+                    </a:p>
+                  </a:txBody>
+                  <a:tcPr marL="109728" marR="109728" marT="109728" marB="109728" anchor="ctr">
+                    <a:lnL w="8890" cap="flat" cmpd="sng" algn="ctr">
+                      <a:solidFill>
+                        <a:srgbClr val="D8E0DA"/>
+                      </a:solidFill>
+                      <a:prstDash val="solid"/>
+                      <a:round/>
+                      <a:headEnd type="none" w="med" len="med"/>
+                      <a:tailEnd type="none" w="med" len="med"/>
+                    </a:lnL>
+                    <a:lnR w="8890" cap="flat" cmpd="sng" algn="ctr">
+                      <a:solidFill>
+                        <a:srgbClr val="D8E0DA"/>
+                      </a:solidFill>
+                      <a:prstDash val="solid"/>
+                      <a:round/>
+                      <a:headEnd type="none" w="med" len="med"/>
+                      <a:tailEnd type="none" w="med" len="med"/>
+                    </a:lnR>
+                    <a:lnT w="8890" cap="flat" cmpd="sng" algn="ctr">
+                      <a:solidFill>
+                        <a:srgbClr val="D8E0DA"/>
+                      </a:solidFill>
+                      <a:prstDash val="solid"/>
+                      <a:round/>
+                      <a:headEnd type="none" w="med" len="med"/>
+                      <a:tailEnd type="none" w="med" len="med"/>
+                    </a:lnT>
+                    <a:lnB w="8890" cap="flat" cmpd="sng" algn="ctr">
+                      <a:solidFill>
+                        <a:srgbClr val="D8E0DA"/>
+                      </a:solidFill>
+                      <a:prstDash val="solid"/>
+                      <a:round/>
+                      <a:headEnd type="none" w="med" len="med"/>
+                      <a:tailEnd type="none" w="med" len="med"/>
+                    </a:lnB>
+                    <a:solidFill>
+                      <a:srgbClr val="FFFFFF"/>
+                    </a:solidFill>
+                  </a:tcPr>
+                </a:tc>
+                <a:tc>
+                  <a:txBody>
+                    <a:bodyPr/>
+                    <a:lstStyle/>
+                    <a:p>
+                      <a:pPr indent="0" marL="0">
+                        <a:buNone/>
+                      </a:pPr>
+                      <a:r>
+                        <a:rPr lang="en-US" sz="1900" dirty="0">
+                          <a:solidFill>
+                            <a:srgbClr val="172C30"/>
+                          </a:solidFill>
+                          <a:latin typeface="Noto Sans SC" pitchFamily="34" charset="0"/>
+                          <a:ea typeface="Noto Sans SC" pitchFamily="34" charset="-122"/>
+                          <a:cs typeface="Noto Sans SC" pitchFamily="34" charset="-120"/>
+                        </a:rPr>
+                        <a:t>533.025</a:t>
+                      </a:r>
+                      <a:endParaRPr lang="en-US" sz="1900" dirty="0">
+                        <a:latin typeface="Noto Sans SC" charset="0"/>
+                        <a:ea typeface="Noto Sans SC" charset="0"/>
+                        <a:cs typeface="Noto Sans SC" charset="0"/>
+                      </a:endParaRPr>
+                    </a:p>
+                  </a:txBody>
+                  <a:tcPr marL="109728" marR="109728" marT="109728" marB="109728" anchor="ctr">
+                    <a:lnL w="8890" cap="flat" cmpd="sng" algn="ctr">
+                      <a:solidFill>
+                        <a:srgbClr val="D8E0DA"/>
+                      </a:solidFill>
+                      <a:prstDash val="solid"/>
+                      <a:round/>
+                      <a:headEnd type="none" w="med" len="med"/>
+                      <a:tailEnd type="none" w="med" len="med"/>
+                    </a:lnL>
+                    <a:lnR w="8890" cap="flat" cmpd="sng" algn="ctr">
+                      <a:solidFill>
+                        <a:srgbClr val="D8E0DA"/>
+                      </a:solidFill>
+                      <a:prstDash val="solid"/>
+                      <a:round/>
+                      <a:headEnd type="none" w="med" len="med"/>
+                      <a:tailEnd type="none" w="med" len="med"/>
+                    </a:lnR>
+                    <a:lnT w="8890" cap="flat" cmpd="sng" algn="ctr">
+                      <a:solidFill>
+                        <a:srgbClr val="D8E0DA"/>
+                      </a:solidFill>
+                      <a:prstDash val="solid"/>
+                      <a:round/>
+                      <a:headEnd type="none" w="med" len="med"/>
+                      <a:tailEnd type="none" w="med" len="med"/>
+                    </a:lnT>
+                    <a:lnB w="8890" cap="flat" cmpd="sng" algn="ctr">
+                      <a:solidFill>
+                        <a:srgbClr val="D8E0DA"/>
+                      </a:solidFill>
+                      <a:prstDash val="solid"/>
+                      <a:round/>
+                      <a:headEnd type="none" w="med" len="med"/>
+                      <a:tailEnd type="none" w="med" len="med"/>
+                    </a:lnB>
+                    <a:solidFill>
+                      <a:srgbClr val="FFFFFF"/>
+                    </a:solidFill>
+                  </a:tcPr>
+                </a:tc>
+                <a:tc>
+                  <a:txBody>
+                    <a:bodyPr/>
+                    <a:lstStyle/>
+                    <a:p>
+                      <a:pPr indent="0" marL="0">
+                        <a:buNone/>
+                      </a:pPr>
+                      <a:r>
+                        <a:rPr lang="en-US" sz="1900" dirty="0">
+                          <a:solidFill>
+                            <a:srgbClr val="172C30"/>
+                          </a:solidFill>
+                          <a:latin typeface="Noto Sans SC" pitchFamily="34" charset="0"/>
+                          <a:ea typeface="Noto Sans SC" pitchFamily="34" charset="-122"/>
+                          <a:cs typeface="Noto Sans SC" pitchFamily="34" charset="-120"/>
+                        </a:rPr>
+                        <a:t>550.000</a:t>
+                      </a:r>
+                      <a:endParaRPr lang="en-US" sz="1900" dirty="0">
+                        <a:latin typeface="Noto Sans SC" charset="0"/>
+                        <a:ea typeface="Noto Sans SC" charset="0"/>
+                        <a:cs typeface="Noto Sans SC" charset="0"/>
+                      </a:endParaRPr>
+                    </a:p>
+                  </a:txBody>
+                  <a:tcPr marL="109728" marR="109728" marT="109728" marB="109728" anchor="ctr">
+                    <a:lnL w="8890" cap="flat" cmpd="sng" algn="ctr">
+                      <a:solidFill>
+                        <a:srgbClr val="D8E0DA"/>
+                      </a:solidFill>
+                      <a:prstDash val="solid"/>
+                      <a:round/>
+                      <a:headEnd type="none" w="med" len="med"/>
+                      <a:tailEnd type="none" w="med" len="med"/>
+                    </a:lnL>
+                    <a:lnR w="8890" cap="flat" cmpd="sng" algn="ctr">
+                      <a:solidFill>
+                        <a:srgbClr val="D8E0DA"/>
+                      </a:solidFill>
+                      <a:prstDash val="solid"/>
+                      <a:round/>
+                      <a:headEnd type="none" w="med" len="med"/>
+                      <a:tailEnd type="none" w="med" len="med"/>
+                    </a:lnR>
+                    <a:lnT w="8890" cap="flat" cmpd="sng" algn="ctr">
+                      <a:solidFill>
+                        <a:srgbClr val="D8E0DA"/>
+                      </a:solidFill>
+                      <a:prstDash val="solid"/>
+                      <a:round/>
+                      <a:headEnd type="none" w="med" len="med"/>
+                      <a:tailEnd type="none" w="med" len="med"/>
+                    </a:lnT>
+                    <a:lnB w="8890" cap="flat" cmpd="sng" algn="ctr">
+                      <a:solidFill>
+                        <a:srgbClr val="D8E0DA"/>
+                      </a:solidFill>
+                      <a:prstDash val="solid"/>
+                      <a:round/>
+                      <a:headEnd type="none" w="med" len="med"/>
+                      <a:tailEnd type="none" w="med" len="med"/>
+                    </a:lnB>
+                    <a:solidFill>
+                      <a:srgbClr val="FFFFFF"/>
+                    </a:solidFill>
+                  </a:tcPr>
+                </a:tc>
+              </a:tr>
+            </a:tbl>
+          </a:graphicData>
+        </a:graphic>
+      </p:graphicFrame>
+      <p:sp>
+        <p:nvSpPr>
+          <p:cNvPr id="9" name="Text 6"/>
+          <p:cNvSpPr/>
+          <p:nvPr/>
+        </p:nvSpPr>
+        <p:spPr>
+          <a:xfrm>
+            <a:off x="731520" y="5623560"/>
+            <a:ext cx="4572000" cy="347472"/>
+          </a:xfrm>
+          <a:prstGeom prst="rect">
+            <a:avLst/>
+          </a:prstGeom>
+          <a:noFill/>
+          <a:ln/>
+        </p:spPr>
+        <p:txBody>
+          <a:bodyPr wrap="square" lIns="0" tIns="0" rIns="0" bIns="0" rtlCol="0" anchor="ctr">
+            <a:spAutoFit/>
+          </a:bodyPr>
+          <a:lstStyle/>
+          <a:p>
+            <a:pPr indent="0" marL="0">
+              <a:buNone/>
+            </a:pPr>
+            <a:r>
+              <a:rPr lang="en-US" sz="2200" b="1" dirty="0">
+                <a:solidFill>
+                  <a:srgbClr val="007C73"/>
+                </a:solidFill>
+                <a:latin typeface="Noto Sans SC" pitchFamily="34" charset="0"/>
+                <a:ea typeface="Noto Sans SC" pitchFamily="34" charset="-122"/>
+                <a:cs typeface="Noto Sans SC" pitchFamily="34" charset="-120"/>
+              </a:rPr>
+              <a:t>回款改变的是现金占用</a:t>
+            </a:r>
+            <a:endParaRPr lang="en-US" sz="2200" dirty="0"/>
+          </a:p>
+        </p:txBody>
+      </p:sp>
+      <p:sp>
+        <p:nvSpPr>
+          <p:cNvPr id="10" name="Text 7"/>
+          <p:cNvSpPr/>
+          <p:nvPr/>
+        </p:nvSpPr>
+        <p:spPr>
+          <a:xfrm>
+            <a:off x="5486400" y="5623560"/>
+            <a:ext cx="5943600" cy="347472"/>
+          </a:xfrm>
+          <a:prstGeom prst="rect">
+            <a:avLst/>
+          </a:prstGeom>
+          <a:noFill/>
+          <a:ln/>
+        </p:spPr>
+        <p:txBody>
+          <a:bodyPr wrap="square" lIns="0" tIns="0" rIns="0" bIns="0" rtlCol="0" anchor="ctr">
+            <a:spAutoFit/>
+          </a:bodyPr>
+          <a:lstStyle/>
+          <a:p>
+            <a:pPr indent="0" marL="0">
+              <a:buNone/>
+            </a:pPr>
+            <a:r>
+              <a:rPr lang="en-US" sz="2000" dirty="0">
+                <a:solidFill>
+                  <a:srgbClr val="172C30"/>
+                </a:solidFill>
+                <a:latin typeface="Noto Sans SC" pitchFamily="34" charset="0"/>
+                <a:ea typeface="Noto Sans SC" pitchFamily="34" charset="-122"/>
+                <a:cs typeface="Noto Sans SC" pitchFamily="34" charset="-120"/>
+              </a:rPr>
+              <a:t>按实际采购、订阅收款与账期持续更新</a:t>
+            </a:r>
+            <a:endParaRPr lang="en-US" sz="2000" dirty="0"/>
+          </a:p>
+        </p:txBody>
+      </p:sp>
+    </p:spTree>
+  </p:cSld>
+  <p:clrMapOvr>
+    <a:masterClrMapping/>
+  </p:clrMapOvr>
+</p:sld>
+</file>
+
+<file path=ppt/slides/slide34.xml><?xml version="1.0" encoding="utf-8"?>
+<p:sld xmlns:a="http://schemas.openxmlformats.org/drawingml/2006/main" xmlns:r="http://schemas.openxmlformats.org/officeDocument/2006/relationships" xmlns:p="http://schemas.openxmlformats.org/presentationml/2006/main">
+  <p:cSld name="Slide 34">
+    <p:bg>
+      <p:bgPr>
+        <a:solidFill>
+          <a:srgbClr val="F7F6F0"/>
+        </a:solidFill>
+      </p:bgPr>
+    </p:bg>
+    <p:spTree>
+      <p:nvGrpSpPr>
+        <p:cNvPr id="1" name=""/>
+        <p:cNvGrpSpPr/>
+        <p:nvPr/>
+      </p:nvGrpSpPr>
+      <p:grpSpPr>
+        <a:xfrm>
+          <a:off x="0" y="0"/>
+          <a:ext cx="0" cy="0"/>
+          <a:chOff x="0" y="0"/>
+          <a:chExt cx="0" cy="0"/>
+        </a:xfrm>
+      </p:grpSpPr>
+      <p:sp>
+        <p:nvSpPr>
+          <p:cNvPr id="2" name="Text 0"/>
+          <p:cNvSpPr/>
+          <p:nvPr/>
+        </p:nvSpPr>
+        <p:spPr>
+          <a:xfrm>
+            <a:off x="548640" y="274320"/>
+            <a:ext cx="10972800" cy="256032"/>
+          </a:xfrm>
+          <a:prstGeom prst="rect">
+            <a:avLst/>
+          </a:prstGeom>
+          <a:noFill/>
+          <a:ln/>
+        </p:spPr>
+        <p:txBody>
+          <a:bodyPr wrap="square" lIns="0" tIns="0" rIns="0" bIns="0" rtlCol="0" anchor="ctr">
+            <a:spAutoFit/>
+          </a:bodyPr>
+          <a:lstStyle/>
+          <a:p>
+            <a:pPr indent="0" marL="0">
+              <a:buNone/>
+            </a:pPr>
+            <a:r>
+              <a:rPr lang="en-US" sz="1100" b="1" dirty="0">
+                <a:solidFill>
+                  <a:srgbClr val="007C73"/>
+                </a:solidFill>
+                <a:latin typeface="Noto Sans SC" pitchFamily="34" charset="0"/>
+                <a:ea typeface="Noto Sans SC" pitchFamily="34" charset="-122"/>
+                <a:cs typeface="Noto Sans SC" pitchFamily="34" charset="-120"/>
+              </a:rPr>
+              <a:t>33 / 资源与用量情景</a:t>
+            </a:r>
+            <a:endParaRPr lang="en-US" sz="1100" dirty="0"/>
+          </a:p>
+        </p:txBody>
+      </p:sp>
+      <p:sp>
+        <p:nvSpPr>
+          <p:cNvPr id="3" name="Text 1"/>
+          <p:cNvSpPr/>
+          <p:nvPr/>
+        </p:nvSpPr>
+        <p:spPr>
+          <a:xfrm>
+            <a:off x="548640" y="749808"/>
+            <a:ext cx="11064240" cy="749808"/>
+          </a:xfrm>
+          <a:prstGeom prst="rect">
+            <a:avLst/>
+          </a:prstGeom>
+          <a:noFill/>
+          <a:ln/>
+        </p:spPr>
+        <p:txBody>
+          <a:bodyPr wrap="square" lIns="0" tIns="0" rIns="0" bIns="0" rtlCol="0" anchor="ctr">
+            <a:spAutoFit/>
+          </a:bodyPr>
+          <a:lstStyle/>
+          <a:p>
+            <a:pPr indent="0" marL="0">
+              <a:buNone/>
+            </a:pPr>
+            <a:r>
+              <a:rPr lang="en-US" sz="3000" b="1" dirty="0">
+                <a:solidFill>
+                  <a:srgbClr val="172C30"/>
+                </a:solidFill>
+                <a:latin typeface="Noto Sans SC" pitchFamily="34" charset="0"/>
+                <a:ea typeface="Noto Sans SC" pitchFamily="34" charset="-122"/>
+                <a:cs typeface="Noto Sans SC" pitchFamily="34" charset="-120"/>
+              </a:rPr>
+              <a:t>按建设能力和用户规模，安排不同资金强度</a:t>
+            </a:r>
+            <a:endParaRPr lang="en-US" sz="3000" dirty="0"/>
+          </a:p>
+        </p:txBody>
+      </p:sp>
+      <p:sp>
+        <p:nvSpPr>
+          <p:cNvPr id="4" name="Text 2"/>
+          <p:cNvSpPr/>
+          <p:nvPr/>
+        </p:nvSpPr>
+        <p:spPr>
+          <a:xfrm>
+            <a:off x="585216" y="1581912"/>
+            <a:ext cx="10972800" cy="438912"/>
+          </a:xfrm>
+          <a:prstGeom prst="rect">
+            <a:avLst/>
+          </a:prstGeom>
+          <a:noFill/>
+          <a:ln/>
+        </p:spPr>
+        <p:txBody>
+          <a:bodyPr wrap="square" lIns="0" tIns="0" rIns="0" bIns="0" rtlCol="0" anchor="ctr">
+            <a:spAutoFit/>
+          </a:bodyPr>
+          <a:lstStyle/>
+          <a:p>
+            <a:pPr indent="0" marL="0">
+              <a:buNone/>
+            </a:pPr>
+            <a:r>
+              <a:rPr lang="en-US" sz="1500" dirty="0">
+                <a:solidFill>
+                  <a:srgbClr val="53696B"/>
+                </a:solidFill>
+                <a:latin typeface="Noto Sans SC" pitchFamily="34" charset="0"/>
+                <a:ea typeface="Noto Sans SC" pitchFamily="34" charset="-122"/>
+                <a:cs typeface="Noto Sans SC" pitchFamily="34" charset="-120"/>
+              </a:rPr>
+              <a:t>24个月规划 · 各情景同时调整人力、用户规模与采购成本。</a:t>
+            </a:r>
+            <a:endParaRPr lang="en-US" sz="1500" dirty="0"/>
+          </a:p>
+        </p:txBody>
+      </p:sp>
+      <p:sp>
+        <p:nvSpPr>
+          <p:cNvPr id="5" name="Shape 3"/>
+          <p:cNvSpPr/>
+          <p:nvPr/>
+        </p:nvSpPr>
+        <p:spPr>
+          <a:xfrm>
+            <a:off x="548640" y="6419088"/>
+            <a:ext cx="11064240" cy="0"/>
+          </a:xfrm>
+          <a:prstGeom prst="line">
+            <a:avLst/>
+          </a:prstGeom>
+          <a:noFill/>
+          <a:ln w="10160">
+            <a:solidFill>
+              <a:srgbClr val="D8E0DA"/>
+            </a:solidFill>
+            <a:prstDash val="solid"/>
+          </a:ln>
+        </p:spPr>
+      </p:sp>
+      <p:sp>
+        <p:nvSpPr>
+          <p:cNvPr id="6" name="Text 4"/>
+          <p:cNvSpPr/>
+          <p:nvPr/>
+        </p:nvSpPr>
+        <p:spPr>
+          <a:xfrm>
+            <a:off x="576072" y="6519672"/>
+            <a:ext cx="9144000" cy="173736"/>
+          </a:xfrm>
+          <a:prstGeom prst="rect">
+            <a:avLst/>
+          </a:prstGeom>
+          <a:noFill/>
+          <a:ln/>
+        </p:spPr>
+        <p:txBody>
+          <a:bodyPr wrap="square" lIns="0" tIns="0" rIns="0" bIns="0" rtlCol="0" anchor="ctr">
+            <a:spAutoFit/>
+          </a:bodyPr>
+          <a:lstStyle/>
+          <a:p>
+            <a:pPr indent="0" marL="0">
+              <a:buNone/>
+            </a:pPr>
+            <a:r>
+              <a:rPr lang="en-US" sz="900" dirty="0">
+                <a:solidFill>
+                  <a:srgbClr val="53696B"/>
+                </a:solidFill>
+                <a:latin typeface="Noto Sans SC" pitchFamily="34" charset="0"/>
+                <a:ea typeface="Noto Sans SC" pitchFamily="34" charset="-122"/>
+                <a:cs typeface="Noto Sans SC" pitchFamily="34" charset="-120"/>
+              </a:rPr>
+              <a:t>Blocky Studio  /  小学 Agent 创作教育</a:t>
+            </a:r>
+            <a:endParaRPr lang="en-US" sz="900" dirty="0"/>
+          </a:p>
+        </p:txBody>
+      </p:sp>
+      <p:sp>
+        <p:nvSpPr>
+          <p:cNvPr id="7" name="Text 5"/>
+          <p:cNvSpPr/>
+          <p:nvPr/>
+        </p:nvSpPr>
+        <p:spPr>
+          <a:xfrm>
+            <a:off x="11009376" y="6492240"/>
+            <a:ext cx="594360" cy="228600"/>
+          </a:xfrm>
+          <a:prstGeom prst="rect">
+            <a:avLst/>
+          </a:prstGeom>
+          <a:noFill/>
+          <a:ln/>
+        </p:spPr>
+        <p:txBody>
+          <a:bodyPr wrap="square" lIns="0" tIns="0" rIns="0" bIns="0" rtlCol="0" anchor="ctr">
+            <a:spAutoFit/>
+          </a:bodyPr>
+          <a:lstStyle/>
+          <a:p>
+            <a:pPr algn="r" indent="0" marL="0">
+              <a:buNone/>
+            </a:pPr>
+            <a:r>
+              <a:rPr lang="en-US" sz="1000" dirty="0">
+                <a:solidFill>
+                  <a:srgbClr val="53696B"/>
+                </a:solidFill>
+                <a:latin typeface="Noto Sans SC" pitchFamily="34" charset="0"/>
+                <a:ea typeface="Noto Sans SC" pitchFamily="34" charset="-122"/>
+                <a:cs typeface="Noto Sans SC" pitchFamily="34" charset="-120"/>
+              </a:rPr>
+              <a:t>34</a:t>
+            </a:r>
+            <a:endParaRPr lang="en-US" sz="1000" dirty="0"/>
+          </a:p>
+        </p:txBody>
+      </p:sp>
+      <p:graphicFrame>
+        <p:nvGraphicFramePr>
+          <p:cNvPr id="35" name="Table 0"/>
+          <p:cNvGraphicFramePr>
+            <a:graphicFrameLocks noGrp="1"/>
+          </p:cNvGraphicFramePr>
+          <p:nvPr>
+            <p:extLst>
+              <p:ext uri="{D42A27DB-BD31-4B8C-83A1-F6EECF244321}">
+                <p14:modId xmlns:p14="http://schemas.microsoft.com/office/powerpoint/2010/main" val="1579011935"/>
+              </p:ext>
+            </p:extLst>
+          </p:nvPr>
+        </p:nvGraphicFramePr>
+        <p:xfrm>
+          <a:off x="594360" y="2148840"/>
+          <a:ext cx="10972800" cy="914400"/>
+        </p:xfrm>
+        <a:graphic>
+          <a:graphicData uri="http://schemas.openxmlformats.org/drawingml/2006/table">
+            <a:tbl>
+              <a:tblPr/>
+              <a:tblGrid>
+                <a:gridCol w="2331720"/>
+                <a:gridCol w="2743200"/>
+                <a:gridCol w="3429000"/>
+                <a:gridCol w="2468880"/>
+              </a:tblGrid>
+              <a:tr h="676656">
+                <a:tc>
+                  <a:txBody>
+                    <a:bodyPr/>
+                    <a:lstStyle/>
+                    <a:p>
+                      <a:pPr indent="0" marL="0">
+                        <a:buNone/>
+                      </a:pPr>
+                      <a:r>
+                        <a:rPr lang="en-US" sz="1800" b="1" dirty="0">
+                          <a:solidFill>
+                            <a:srgbClr val="007C73"/>
+                          </a:solidFill>
+                          <a:latin typeface="Noto Sans SC" pitchFamily="34" charset="0"/>
+                          <a:ea typeface="Noto Sans SC" pitchFamily="34" charset="-122"/>
+                          <a:cs typeface="Noto Sans SC" pitchFamily="34" charset="-120"/>
+                        </a:rPr>
+                        <a:t>资源情景</a:t>
+                      </a:r>
+                      <a:endParaRPr lang="en-US" sz="1800" dirty="0">
+                        <a:latin typeface="Noto Sans SC" charset="0"/>
+                        <a:ea typeface="Noto Sans SC" charset="0"/>
+                        <a:cs typeface="Noto Sans SC" charset="0"/>
+                      </a:endParaRPr>
+                    </a:p>
+                  </a:txBody>
+                  <a:tcPr marL="109728" marR="109728" marT="109728" marB="109728" anchor="ctr">
+                    <a:lnL w="8890" cap="flat" cmpd="sng" algn="ctr">
+                      <a:solidFill>
+                        <a:srgbClr val="D8E0DA"/>
+                      </a:solidFill>
+                      <a:prstDash val="solid"/>
+                      <a:round/>
+                      <a:headEnd type="none" w="med" len="med"/>
+                      <a:tailEnd type="none" w="med" len="med"/>
+                    </a:lnL>
+                    <a:lnR w="8890" cap="flat" cmpd="sng" algn="ctr">
+                      <a:solidFill>
+                        <a:srgbClr val="D8E0DA"/>
+                      </a:solidFill>
+                      <a:prstDash val="solid"/>
+                      <a:round/>
+                      <a:headEnd type="none" w="med" len="med"/>
+                      <a:tailEnd type="none" w="med" len="med"/>
+                    </a:lnR>
+                    <a:lnT w="8890" cap="flat" cmpd="sng" algn="ctr">
+                      <a:solidFill>
+                        <a:srgbClr val="D8E0DA"/>
+                      </a:solidFill>
+                      <a:prstDash val="solid"/>
+                      <a:round/>
+                      <a:headEnd type="none" w="med" len="med"/>
+                      <a:tailEnd type="none" w="med" len="med"/>
+                    </a:lnT>
+                    <a:lnB w="8890" cap="flat" cmpd="sng" algn="ctr">
+                      <a:solidFill>
+                        <a:srgbClr val="D8E0DA"/>
+                      </a:solidFill>
+                      <a:prstDash val="solid"/>
+                      <a:round/>
+                      <a:headEnd type="none" w="med" len="med"/>
+                      <a:tailEnd type="none" w="med" len="med"/>
+                    </a:lnB>
+                    <a:solidFill>
+                      <a:srgbClr val="FFFFFF"/>
+                    </a:solidFill>
+                  </a:tcPr>
+                </a:tc>
+                <a:tc>
+                  <a:txBody>
+                    <a:bodyPr/>
+                    <a:lstStyle/>
+                    <a:p>
+                      <a:pPr indent="0" marL="0">
+                        <a:buNone/>
+                      </a:pPr>
+                      <a:r>
+                        <a:rPr lang="en-US" sz="1800" b="1" dirty="0">
+                          <a:solidFill>
+                            <a:srgbClr val="007C73"/>
+                          </a:solidFill>
+                          <a:latin typeface="Noto Sans SC" pitchFamily="34" charset="0"/>
+                          <a:ea typeface="Noto Sans SC" pitchFamily="34" charset="-122"/>
+                          <a:cs typeface="Noto Sans SC" pitchFamily="34" charset="-120"/>
+                        </a:rPr>
+                        <a:t>期末云活跃人头</a:t>
+                      </a:r>
+                      <a:endParaRPr lang="en-US" sz="1800" dirty="0">
+                        <a:latin typeface="Noto Sans SC" charset="0"/>
+                        <a:ea typeface="Noto Sans SC" charset="0"/>
+                        <a:cs typeface="Noto Sans SC" charset="0"/>
+                      </a:endParaRPr>
+                    </a:p>
+                  </a:txBody>
+                  <a:tcPr marL="109728" marR="109728" marT="109728" marB="109728" anchor="ctr">
+                    <a:lnL w="8890" cap="flat" cmpd="sng" algn="ctr">
+                      <a:solidFill>
+                        <a:srgbClr val="D8E0DA"/>
+                      </a:solidFill>
+                      <a:prstDash val="solid"/>
+                      <a:round/>
+                      <a:headEnd type="none" w="med" len="med"/>
+                      <a:tailEnd type="none" w="med" len="med"/>
+                    </a:lnL>
+                    <a:lnR w="8890" cap="flat" cmpd="sng" algn="ctr">
+                      <a:solidFill>
+                        <a:srgbClr val="D8E0DA"/>
+                      </a:solidFill>
+                      <a:prstDash val="solid"/>
+                      <a:round/>
+                      <a:headEnd type="none" w="med" len="med"/>
+                      <a:tailEnd type="none" w="med" len="med"/>
+                    </a:lnR>
+                    <a:lnT w="8890" cap="flat" cmpd="sng" algn="ctr">
+                      <a:solidFill>
+                        <a:srgbClr val="D8E0DA"/>
+                      </a:solidFill>
+                      <a:prstDash val="solid"/>
+                      <a:round/>
+                      <a:headEnd type="none" w="med" len="med"/>
+                      <a:tailEnd type="none" w="med" len="med"/>
+                    </a:lnT>
+                    <a:lnB w="8890" cap="flat" cmpd="sng" algn="ctr">
+                      <a:solidFill>
+                        <a:srgbClr val="D8E0DA"/>
+                      </a:solidFill>
+                      <a:prstDash val="solid"/>
+                      <a:round/>
+                      <a:headEnd type="none" w="med" len="med"/>
+                      <a:tailEnd type="none" w="med" len="med"/>
+                    </a:lnB>
+                    <a:solidFill>
+                      <a:srgbClr val="FFFFFF"/>
+                    </a:solidFill>
+                  </a:tcPr>
+                </a:tc>
+                <a:tc>
+                  <a:txBody>
+                    <a:bodyPr/>
+                    <a:lstStyle/>
+                    <a:p>
+                      <a:pPr indent="0" marL="0">
+                        <a:buNone/>
+                      </a:pPr>
+                      <a:r>
+                        <a:rPr lang="en-US" sz="1800" b="1" dirty="0">
+                          <a:solidFill>
+                            <a:srgbClr val="007C73"/>
+                          </a:solidFill>
+                          <a:latin typeface="Noto Sans SC" pitchFamily="34" charset="0"/>
+                          <a:ea typeface="Noto Sans SC" pitchFamily="34" charset="-122"/>
+                          <a:cs typeface="Noto Sans SC" pitchFamily="34" charset="-120"/>
+                        </a:rPr>
+                        <a:t>24月现金支出（万元）</a:t>
+                      </a:r>
+                      <a:endParaRPr lang="en-US" sz="1800" dirty="0">
+                        <a:latin typeface="Noto Sans SC" charset="0"/>
+                        <a:ea typeface="Noto Sans SC" charset="0"/>
+                        <a:cs typeface="Noto Sans SC" charset="0"/>
+                      </a:endParaRPr>
+                    </a:p>
+                  </a:txBody>
+                  <a:tcPr marL="109728" marR="109728" marT="109728" marB="109728" anchor="ctr">
+                    <a:lnL w="8890" cap="flat" cmpd="sng" algn="ctr">
+                      <a:solidFill>
+                        <a:srgbClr val="D8E0DA"/>
+                      </a:solidFill>
+                      <a:prstDash val="solid"/>
+                      <a:round/>
+                      <a:headEnd type="none" w="med" len="med"/>
+                      <a:tailEnd type="none" w="med" len="med"/>
+                    </a:lnL>
+                    <a:lnR w="8890" cap="flat" cmpd="sng" algn="ctr">
+                      <a:solidFill>
+                        <a:srgbClr val="D8E0DA"/>
+                      </a:solidFill>
+                      <a:prstDash val="solid"/>
+                      <a:round/>
+                      <a:headEnd type="none" w="med" len="med"/>
+                      <a:tailEnd type="none" w="med" len="med"/>
+                    </a:lnR>
+                    <a:lnT w="8890" cap="flat" cmpd="sng" algn="ctr">
+                      <a:solidFill>
+                        <a:srgbClr val="D8E0DA"/>
+                      </a:solidFill>
+                      <a:prstDash val="solid"/>
+                      <a:round/>
+                      <a:headEnd type="none" w="med" len="med"/>
+                      <a:tailEnd type="none" w="med" len="med"/>
+                    </a:lnT>
+                    <a:lnB w="8890" cap="flat" cmpd="sng" algn="ctr">
+                      <a:solidFill>
+                        <a:srgbClr val="D8E0DA"/>
+                      </a:solidFill>
+                      <a:prstDash val="solid"/>
+                      <a:round/>
+                      <a:headEnd type="none" w="med" len="med"/>
+                      <a:tailEnd type="none" w="med" len="med"/>
+                    </a:lnB>
+                    <a:solidFill>
+                      <a:srgbClr val="FFFFFF"/>
+                    </a:solidFill>
+                  </a:tcPr>
+                </a:tc>
+                <a:tc>
+                  <a:txBody>
+                    <a:bodyPr/>
+                    <a:lstStyle/>
+                    <a:p>
+                      <a:pPr indent="0" marL="0">
+                        <a:buNone/>
+                      </a:pPr>
+                      <a:r>
+                        <a:rPr lang="en-US" sz="1800" b="1" dirty="0">
+                          <a:solidFill>
+                            <a:srgbClr val="007C73"/>
+                          </a:solidFill>
+                          <a:latin typeface="Noto Sans SC" pitchFamily="34" charset="0"/>
+                          <a:ea typeface="Noto Sans SC" pitchFamily="34" charset="-122"/>
+                          <a:cs typeface="Noto Sans SC" pitchFamily="34" charset="-120"/>
+                        </a:rPr>
+                        <a:t>资金目标（万元）</a:t>
+                      </a:r>
+                      <a:endParaRPr lang="en-US" sz="1800" dirty="0">
+                        <a:latin typeface="Noto Sans SC" charset="0"/>
+                        <a:ea typeface="Noto Sans SC" charset="0"/>
+                        <a:cs typeface="Noto Sans SC" charset="0"/>
+                      </a:endParaRPr>
+                    </a:p>
+                  </a:txBody>
+                  <a:tcPr marL="109728" marR="109728" marT="109728" marB="109728" anchor="ctr">
+                    <a:lnL w="8890" cap="flat" cmpd="sng" algn="ctr">
+                      <a:solidFill>
+                        <a:srgbClr val="D8E0DA"/>
+                      </a:solidFill>
+                      <a:prstDash val="solid"/>
+                      <a:round/>
+                      <a:headEnd type="none" w="med" len="med"/>
+                      <a:tailEnd type="none" w="med" len="med"/>
+                    </a:lnL>
+                    <a:lnR w="8890" cap="flat" cmpd="sng" algn="ctr">
+                      <a:solidFill>
+                        <a:srgbClr val="D8E0DA"/>
+                      </a:solidFill>
+                      <a:prstDash val="solid"/>
+                      <a:round/>
+                      <a:headEnd type="none" w="med" len="med"/>
+                      <a:tailEnd type="none" w="med" len="med"/>
+                    </a:lnR>
+                    <a:lnT w="8890" cap="flat" cmpd="sng" algn="ctr">
+                      <a:solidFill>
+                        <a:srgbClr val="D8E0DA"/>
+                      </a:solidFill>
+                      <a:prstDash val="solid"/>
+                      <a:round/>
+                      <a:headEnd type="none" w="med" len="med"/>
+                      <a:tailEnd type="none" w="med" len="med"/>
+                    </a:lnT>
+                    <a:lnB w="8890" cap="flat" cmpd="sng" algn="ctr">
+                      <a:solidFill>
+                        <a:srgbClr val="D8E0DA"/>
+                      </a:solidFill>
+                      <a:prstDash val="solid"/>
+                      <a:round/>
+                      <a:headEnd type="none" w="med" len="med"/>
+                      <a:tailEnd type="none" w="med" len="med"/>
+                    </a:lnB>
+                    <a:solidFill>
+                      <a:srgbClr val="FFFFFF"/>
+                    </a:solidFill>
+                  </a:tcPr>
+                </a:tc>
+              </a:tr>
+              <a:tr h="676656">
+                <a:tc>
+                  <a:txBody>
+                    <a:bodyPr/>
+                    <a:lstStyle/>
+                    <a:p>
+                      <a:pPr indent="0" marL="0">
+                        <a:buNone/>
+                      </a:pPr>
+                      <a:r>
+                        <a:rPr lang="en-US" sz="1800" dirty="0">
+                          <a:solidFill>
+                            <a:srgbClr val="172C30"/>
+                          </a:solidFill>
+                          <a:latin typeface="Noto Sans SC" pitchFamily="34" charset="0"/>
+                          <a:ea typeface="Noto Sans SC" pitchFamily="34" charset="-122"/>
+                          <a:cs typeface="Noto Sans SC" pitchFamily="34" charset="-120"/>
+                        </a:rPr>
+                        <a:t>精简推进</a:t>
+                      </a:r>
+                      <a:endParaRPr lang="en-US" sz="1800" dirty="0">
+                        <a:latin typeface="Noto Sans SC" charset="0"/>
+                        <a:ea typeface="Noto Sans SC" charset="0"/>
+                        <a:cs typeface="Noto Sans SC" charset="0"/>
+                      </a:endParaRPr>
+                    </a:p>
+                  </a:txBody>
+                  <a:tcPr marL="109728" marR="109728" marT="109728" marB="109728" anchor="ctr">
+                    <a:lnL w="8890" cap="flat" cmpd="sng" algn="ctr">
+                      <a:solidFill>
+                        <a:srgbClr val="D8E0DA"/>
+                      </a:solidFill>
+                      <a:prstDash val="solid"/>
+                      <a:round/>
+                      <a:headEnd type="none" w="med" len="med"/>
+                      <a:tailEnd type="none" w="med" len="med"/>
+                    </a:lnL>
+                    <a:lnR w="8890" cap="flat" cmpd="sng" algn="ctr">
+                      <a:solidFill>
+                        <a:srgbClr val="D8E0DA"/>
+                      </a:solidFill>
+                      <a:prstDash val="solid"/>
+                      <a:round/>
+                      <a:headEnd type="none" w="med" len="med"/>
+                      <a:tailEnd type="none" w="med" len="med"/>
+                    </a:lnR>
+                    <a:lnT w="8890" cap="flat" cmpd="sng" algn="ctr">
+                      <a:solidFill>
+                        <a:srgbClr val="D8E0DA"/>
+                      </a:solidFill>
+                      <a:prstDash val="solid"/>
+                      <a:round/>
+                      <a:headEnd type="none" w="med" len="med"/>
+                      <a:tailEnd type="none" w="med" len="med"/>
+                    </a:lnT>
+                    <a:lnB w="8890" cap="flat" cmpd="sng" algn="ctr">
+                      <a:solidFill>
+                        <a:srgbClr val="D8E0DA"/>
+                      </a:solidFill>
+                      <a:prstDash val="solid"/>
+                      <a:round/>
+                      <a:headEnd type="none" w="med" len="med"/>
+                      <a:tailEnd type="none" w="med" len="med"/>
+                    </a:lnB>
+                    <a:solidFill>
+                      <a:srgbClr val="FFFFFF"/>
+                    </a:solidFill>
+                  </a:tcPr>
+                </a:tc>
+                <a:tc>
+                  <a:txBody>
+                    <a:bodyPr/>
+                    <a:lstStyle/>
+                    <a:p>
+                      <a:pPr indent="0" marL="0">
+                        <a:buNone/>
+                      </a:pPr>
+                      <a:r>
+                        <a:rPr lang="en-US" sz="1800" dirty="0">
+                          <a:solidFill>
+                            <a:srgbClr val="172C30"/>
+                          </a:solidFill>
+                          <a:latin typeface="Noto Sans SC" pitchFamily="34" charset="0"/>
+                          <a:ea typeface="Noto Sans SC" pitchFamily="34" charset="-122"/>
+                          <a:cs typeface="Noto Sans SC" pitchFamily="34" charset="-120"/>
+                        </a:rPr>
+                        <a:t>2,056</a:t>
+                      </a:r>
+                      <a:endParaRPr lang="en-US" sz="1800" dirty="0">
+                        <a:latin typeface="Noto Sans SC" charset="0"/>
+                        <a:ea typeface="Noto Sans SC" charset="0"/>
+                        <a:cs typeface="Noto Sans SC" charset="0"/>
+                      </a:endParaRPr>
+                    </a:p>
+                  </a:txBody>
+                  <a:tcPr marL="109728" marR="109728" marT="109728" marB="109728" anchor="ctr">
+                    <a:lnL w="8890" cap="flat" cmpd="sng" algn="ctr">
+                      <a:solidFill>
+                        <a:srgbClr val="D8E0DA"/>
+                      </a:solidFill>
+                      <a:prstDash val="solid"/>
+                      <a:round/>
+                      <a:headEnd type="none" w="med" len="med"/>
+                      <a:tailEnd type="none" w="med" len="med"/>
+                    </a:lnL>
+                    <a:lnR w="8890" cap="flat" cmpd="sng" algn="ctr">
+                      <a:solidFill>
+                        <a:srgbClr val="D8E0DA"/>
+                      </a:solidFill>
+                      <a:prstDash val="solid"/>
+                      <a:round/>
+                      <a:headEnd type="none" w="med" len="med"/>
+                      <a:tailEnd type="none" w="med" len="med"/>
+                    </a:lnR>
+                    <a:lnT w="8890" cap="flat" cmpd="sng" algn="ctr">
+                      <a:solidFill>
+                        <a:srgbClr val="D8E0DA"/>
+                      </a:solidFill>
+                      <a:prstDash val="solid"/>
+                      <a:round/>
+                      <a:headEnd type="none" w="med" len="med"/>
+                      <a:tailEnd type="none" w="med" len="med"/>
+                    </a:lnT>
+                    <a:lnB w="8890" cap="flat" cmpd="sng" algn="ctr">
+                      <a:solidFill>
+                        <a:srgbClr val="D8E0DA"/>
+                      </a:solidFill>
+                      <a:prstDash val="solid"/>
+                      <a:round/>
+                      <a:headEnd type="none" w="med" len="med"/>
+                      <a:tailEnd type="none" w="med" len="med"/>
+                    </a:lnB>
+                    <a:solidFill>
+                      <a:srgbClr val="FFFFFF"/>
+                    </a:solidFill>
+                  </a:tcPr>
+                </a:tc>
+                <a:tc>
+                  <a:txBody>
+                    <a:bodyPr/>
+                    <a:lstStyle/>
+                    <a:p>
+                      <a:pPr indent="0" marL="0">
+                        <a:buNone/>
+                      </a:pPr>
+                      <a:r>
+                        <a:rPr lang="en-US" sz="1800" dirty="0">
+                          <a:solidFill>
+                            <a:srgbClr val="172C30"/>
+                          </a:solidFill>
+                          <a:latin typeface="Noto Sans SC" pitchFamily="34" charset="0"/>
+                          <a:ea typeface="Noto Sans SC" pitchFamily="34" charset="-122"/>
+                          <a:cs typeface="Noto Sans SC" pitchFamily="34" charset="-120"/>
+                        </a:rPr>
+                        <a:t>183.969</a:t>
+                      </a:r>
+                      <a:endParaRPr lang="en-US" sz="1800" dirty="0">
+                        <a:latin typeface="Noto Sans SC" charset="0"/>
+                        <a:ea typeface="Noto Sans SC" charset="0"/>
+                        <a:cs typeface="Noto Sans SC" charset="0"/>
+                      </a:endParaRPr>
+                    </a:p>
+                  </a:txBody>
+                  <a:tcPr marL="109728" marR="109728" marT="109728" marB="109728" anchor="ctr">
+                    <a:lnL w="8890" cap="flat" cmpd="sng" algn="ctr">
+                      <a:solidFill>
+                        <a:srgbClr val="D8E0DA"/>
+                      </a:solidFill>
+                      <a:prstDash val="solid"/>
+                      <a:round/>
+                      <a:headEnd type="none" w="med" len="med"/>
+                      <a:tailEnd type="none" w="med" len="med"/>
+                    </a:lnL>
+                    <a:lnR w="8890" cap="flat" cmpd="sng" algn="ctr">
+                      <a:solidFill>
+                        <a:srgbClr val="D8E0DA"/>
+                      </a:solidFill>
+                      <a:prstDash val="solid"/>
+                      <a:round/>
+                      <a:headEnd type="none" w="med" len="med"/>
+                      <a:tailEnd type="none" w="med" len="med"/>
+                    </a:lnR>
+                    <a:lnT w="8890" cap="flat" cmpd="sng" algn="ctr">
+                      <a:solidFill>
+                        <a:srgbClr val="D8E0DA"/>
+                      </a:solidFill>
+                      <a:prstDash val="solid"/>
+                      <a:round/>
+                      <a:headEnd type="none" w="med" len="med"/>
+                      <a:tailEnd type="none" w="med" len="med"/>
+                    </a:lnT>
+                    <a:lnB w="8890" cap="flat" cmpd="sng" algn="ctr">
+                      <a:solidFill>
+                        <a:srgbClr val="D8E0DA"/>
+                      </a:solidFill>
+                      <a:prstDash val="solid"/>
+                      <a:round/>
+                      <a:headEnd type="none" w="med" len="med"/>
+                      <a:tailEnd type="none" w="med" len="med"/>
+                    </a:lnB>
+                    <a:solidFill>
+                      <a:srgbClr val="FFFFFF"/>
+                    </a:solidFill>
+                  </a:tcPr>
+                </a:tc>
+                <a:tc>
+                  <a:txBody>
+                    <a:bodyPr/>
+                    <a:lstStyle/>
+                    <a:p>
+                      <a:pPr indent="0" marL="0">
+                        <a:buNone/>
+                      </a:pPr>
+                      <a:r>
+                        <a:rPr lang="en-US" sz="1800" dirty="0">
+                          <a:solidFill>
+                            <a:srgbClr val="172C30"/>
+                          </a:solidFill>
+                          <a:latin typeface="Noto Sans SC" pitchFamily="34" charset="0"/>
+                          <a:ea typeface="Noto Sans SC" pitchFamily="34" charset="-122"/>
+                          <a:cs typeface="Noto Sans SC" pitchFamily="34" charset="-120"/>
+                        </a:rPr>
+                        <a:t>250.000</a:t>
+                      </a:r>
+                      <a:endParaRPr lang="en-US" sz="1800" dirty="0">
+                        <a:latin typeface="Noto Sans SC" charset="0"/>
+                        <a:ea typeface="Noto Sans SC" charset="0"/>
+                        <a:cs typeface="Noto Sans SC" charset="0"/>
+                      </a:endParaRPr>
+                    </a:p>
+                  </a:txBody>
+                  <a:tcPr marL="109728" marR="109728" marT="109728" marB="109728" anchor="ctr">
+                    <a:lnL w="8890" cap="flat" cmpd="sng" algn="ctr">
+                      <a:solidFill>
+                        <a:srgbClr val="D8E0DA"/>
+                      </a:solidFill>
+                      <a:prstDash val="solid"/>
+                      <a:round/>
+                      <a:headEnd type="none" w="med" len="med"/>
+                      <a:tailEnd type="none" w="med" len="med"/>
+                    </a:lnL>
+                    <a:lnR w="8890" cap="flat" cmpd="sng" algn="ctr">
+                      <a:solidFill>
+                        <a:srgbClr val="D8E0DA"/>
+                      </a:solidFill>
+                      <a:prstDash val="solid"/>
+                      <a:round/>
+                      <a:headEnd type="none" w="med" len="med"/>
+                      <a:tailEnd type="none" w="med" len="med"/>
+                    </a:lnR>
+                    <a:lnT w="8890" cap="flat" cmpd="sng" algn="ctr">
+                      <a:solidFill>
+                        <a:srgbClr val="D8E0DA"/>
+                      </a:solidFill>
+                      <a:prstDash val="solid"/>
+                      <a:round/>
+                      <a:headEnd type="none" w="med" len="med"/>
+                      <a:tailEnd type="none" w="med" len="med"/>
+                    </a:lnT>
+                    <a:lnB w="8890" cap="flat" cmpd="sng" algn="ctr">
+                      <a:solidFill>
+                        <a:srgbClr val="D8E0DA"/>
+                      </a:solidFill>
+                      <a:prstDash val="solid"/>
+                      <a:round/>
+                      <a:headEnd type="none" w="med" len="med"/>
+                      <a:tailEnd type="none" w="med" len="med"/>
+                    </a:lnB>
+                    <a:solidFill>
+                      <a:srgbClr val="FFFFFF"/>
+                    </a:solidFill>
+                  </a:tcPr>
+                </a:tc>
+              </a:tr>
+              <a:tr h="676656">
+                <a:tc>
+                  <a:txBody>
+                    <a:bodyPr/>
+                    <a:lstStyle/>
+                    <a:p>
+                      <a:pPr indent="0" marL="0">
+                        <a:buNone/>
+                      </a:pPr>
+                      <a:r>
+                        <a:rPr lang="en-US" sz="1800" dirty="0">
+                          <a:solidFill>
+                            <a:srgbClr val="172C30"/>
+                          </a:solidFill>
+                          <a:latin typeface="Noto Sans SC" pitchFamily="34" charset="0"/>
+                          <a:ea typeface="Noto Sans SC" pitchFamily="34" charset="-122"/>
+                          <a:cs typeface="Noto Sans SC" pitchFamily="34" charset="-120"/>
+                        </a:rPr>
+                        <a:t>基准建设</a:t>
+                      </a:r>
+                      <a:endParaRPr lang="en-US" sz="1800" dirty="0">
+                        <a:latin typeface="Noto Sans SC" charset="0"/>
+                        <a:ea typeface="Noto Sans SC" charset="0"/>
+                        <a:cs typeface="Noto Sans SC" charset="0"/>
+                      </a:endParaRPr>
+                    </a:p>
+                  </a:txBody>
+                  <a:tcPr marL="109728" marR="109728" marT="109728" marB="109728" anchor="ctr">
+                    <a:lnL w="8890" cap="flat" cmpd="sng" algn="ctr">
+                      <a:solidFill>
+                        <a:srgbClr val="D8E0DA"/>
+                      </a:solidFill>
+                      <a:prstDash val="solid"/>
+                      <a:round/>
+                      <a:headEnd type="none" w="med" len="med"/>
+                      <a:tailEnd type="none" w="med" len="med"/>
+                    </a:lnL>
+                    <a:lnR w="8890" cap="flat" cmpd="sng" algn="ctr">
+                      <a:solidFill>
+                        <a:srgbClr val="D8E0DA"/>
+                      </a:solidFill>
+                      <a:prstDash val="solid"/>
+                      <a:round/>
+                      <a:headEnd type="none" w="med" len="med"/>
+                      <a:tailEnd type="none" w="med" len="med"/>
+                    </a:lnR>
+                    <a:lnT w="8890" cap="flat" cmpd="sng" algn="ctr">
+                      <a:solidFill>
+                        <a:srgbClr val="D8E0DA"/>
+                      </a:solidFill>
+                      <a:prstDash val="solid"/>
+                      <a:round/>
+                      <a:headEnd type="none" w="med" len="med"/>
+                      <a:tailEnd type="none" w="med" len="med"/>
+                    </a:lnT>
+                    <a:lnB w="8890" cap="flat" cmpd="sng" algn="ctr">
+                      <a:solidFill>
+                        <a:srgbClr val="D8E0DA"/>
+                      </a:solidFill>
+                      <a:prstDash val="solid"/>
+                      <a:round/>
+                      <a:headEnd type="none" w="med" len="med"/>
+                      <a:tailEnd type="none" w="med" len="med"/>
+                    </a:lnB>
+                    <a:solidFill>
+                      <a:srgbClr val="FFFFFF"/>
+                    </a:solidFill>
+                  </a:tcPr>
+                </a:tc>
+                <a:tc>
+                  <a:txBody>
+                    <a:bodyPr/>
+                    <a:lstStyle/>
+                    <a:p>
+                      <a:pPr indent="0" marL="0">
+                        <a:buNone/>
+                      </a:pPr>
+                      <a:r>
+                        <a:rPr lang="en-US" sz="1800" dirty="0">
+                          <a:solidFill>
+                            <a:srgbClr val="172C30"/>
+                          </a:solidFill>
+                          <a:latin typeface="Noto Sans SC" pitchFamily="34" charset="0"/>
+                          <a:ea typeface="Noto Sans SC" pitchFamily="34" charset="-122"/>
+                          <a:cs typeface="Noto Sans SC" pitchFamily="34" charset="-120"/>
+                        </a:rPr>
+                        <a:t>5,140</a:t>
+                      </a:r>
+                      <a:endParaRPr lang="en-US" sz="1800" dirty="0">
+                        <a:latin typeface="Noto Sans SC" charset="0"/>
+                        <a:ea typeface="Noto Sans SC" charset="0"/>
+                        <a:cs typeface="Noto Sans SC" charset="0"/>
+                      </a:endParaRPr>
+                    </a:p>
+                  </a:txBody>
+                  <a:tcPr marL="109728" marR="109728" marT="109728" marB="109728" anchor="ctr">
+                    <a:lnL w="8890" cap="flat" cmpd="sng" algn="ctr">
+                      <a:solidFill>
+                        <a:srgbClr val="D8E0DA"/>
+                      </a:solidFill>
+                      <a:prstDash val="solid"/>
+                      <a:round/>
+                      <a:headEnd type="none" w="med" len="med"/>
+                      <a:tailEnd type="none" w="med" len="med"/>
+                    </a:lnL>
+                    <a:lnR w="8890" cap="flat" cmpd="sng" algn="ctr">
+                      <a:solidFill>
+                        <a:srgbClr val="D8E0DA"/>
+                      </a:solidFill>
+                      <a:prstDash val="solid"/>
+                      <a:round/>
+                      <a:headEnd type="none" w="med" len="med"/>
+                      <a:tailEnd type="none" w="med" len="med"/>
+                    </a:lnR>
+                    <a:lnT w="8890" cap="flat" cmpd="sng" algn="ctr">
+                      <a:solidFill>
+                        <a:srgbClr val="D8E0DA"/>
+                      </a:solidFill>
+                      <a:prstDash val="solid"/>
+                      <a:round/>
+                      <a:headEnd type="none" w="med" len="med"/>
+                      <a:tailEnd type="none" w="med" len="med"/>
+                    </a:lnT>
+                    <a:lnB w="8890" cap="flat" cmpd="sng" algn="ctr">
+                      <a:solidFill>
+                        <a:srgbClr val="D8E0DA"/>
+                      </a:solidFill>
+                      <a:prstDash val="solid"/>
+                      <a:round/>
+                      <a:headEnd type="none" w="med" len="med"/>
+                      <a:tailEnd type="none" w="med" len="med"/>
+                    </a:lnB>
+                    <a:solidFill>
+                      <a:srgbClr val="FFFFFF"/>
+                    </a:solidFill>
+                  </a:tcPr>
+                </a:tc>
+                <a:tc>
+                  <a:txBody>
+                    <a:bodyPr/>
+                    <a:lstStyle/>
+                    <a:p>
+                      <a:pPr indent="0" marL="0">
+                        <a:buNone/>
+                      </a:pPr>
+                      <a:r>
+                        <a:rPr lang="en-US" sz="1800" dirty="0">
+                          <a:solidFill>
+                            <a:srgbClr val="172C30"/>
+                          </a:solidFill>
+                          <a:latin typeface="Noto Sans SC" pitchFamily="34" charset="0"/>
+                          <a:ea typeface="Noto Sans SC" pitchFamily="34" charset="-122"/>
+                          <a:cs typeface="Noto Sans SC" pitchFamily="34" charset="-120"/>
+                        </a:rPr>
+                        <a:t>341.075</a:t>
+                      </a:r>
+                      <a:endParaRPr lang="en-US" sz="1800" dirty="0">
+                        <a:latin typeface="Noto Sans SC" charset="0"/>
+                        <a:ea typeface="Noto Sans SC" charset="0"/>
+                        <a:cs typeface="Noto Sans SC" charset="0"/>
+                      </a:endParaRPr>
+                    </a:p>
+                  </a:txBody>
+                  <a:tcPr marL="109728" marR="109728" marT="109728" marB="109728" anchor="ctr">
+                    <a:lnL w="8890" cap="flat" cmpd="sng" algn="ctr">
+                      <a:solidFill>
+                        <a:srgbClr val="D8E0DA"/>
+                      </a:solidFill>
+                      <a:prstDash val="solid"/>
+                      <a:round/>
+                      <a:headEnd type="none" w="med" len="med"/>
+                      <a:tailEnd type="none" w="med" len="med"/>
+                    </a:lnL>
+                    <a:lnR w="8890" cap="flat" cmpd="sng" algn="ctr">
+                      <a:solidFill>
+                        <a:srgbClr val="D8E0DA"/>
+                      </a:solidFill>
+                      <a:prstDash val="solid"/>
+                      <a:round/>
+                      <a:headEnd type="none" w="med" len="med"/>
+                      <a:tailEnd type="none" w="med" len="med"/>
+                    </a:lnR>
+                    <a:lnT w="8890" cap="flat" cmpd="sng" algn="ctr">
+                      <a:solidFill>
+                        <a:srgbClr val="D8E0DA"/>
+                      </a:solidFill>
+                      <a:prstDash val="solid"/>
+                      <a:round/>
+                      <a:headEnd type="none" w="med" len="med"/>
+                      <a:tailEnd type="none" w="med" len="med"/>
+                    </a:lnT>
+                    <a:lnB w="8890" cap="flat" cmpd="sng" algn="ctr">
+                      <a:solidFill>
+                        <a:srgbClr val="D8E0DA"/>
+                      </a:solidFill>
+                      <a:prstDash val="solid"/>
+                      <a:round/>
+                      <a:headEnd type="none" w="med" len="med"/>
+                      <a:tailEnd type="none" w="med" len="med"/>
+                    </a:lnB>
+                    <a:solidFill>
+                      <a:srgbClr val="FFFFFF"/>
+                    </a:solidFill>
+                  </a:tcPr>
+                </a:tc>
+                <a:tc>
+                  <a:txBody>
+                    <a:bodyPr/>
+                    <a:lstStyle/>
+                    <a:p>
+                      <a:pPr indent="0" marL="0">
+                        <a:buNone/>
+                      </a:pPr>
+                      <a:r>
+                        <a:rPr lang="en-US" sz="1800" dirty="0">
+                          <a:solidFill>
+                            <a:srgbClr val="172C30"/>
+                          </a:solidFill>
+                          <a:latin typeface="Noto Sans SC" pitchFamily="34" charset="0"/>
+                          <a:ea typeface="Noto Sans SC" pitchFamily="34" charset="-122"/>
+                          <a:cs typeface="Noto Sans SC" pitchFamily="34" charset="-120"/>
+                        </a:rPr>
+                        <a:t>500.000</a:t>
+                      </a:r>
+                      <a:endParaRPr lang="en-US" sz="1800" dirty="0">
+                        <a:latin typeface="Noto Sans SC" charset="0"/>
+                        <a:ea typeface="Noto Sans SC" charset="0"/>
+                        <a:cs typeface="Noto Sans SC" charset="0"/>
+                      </a:endParaRPr>
+                    </a:p>
+                  </a:txBody>
+                  <a:tcPr marL="109728" marR="109728" marT="109728" marB="109728" anchor="ctr">
+                    <a:lnL w="8890" cap="flat" cmpd="sng" algn="ctr">
+                      <a:solidFill>
+                        <a:srgbClr val="D8E0DA"/>
+                      </a:solidFill>
+                      <a:prstDash val="solid"/>
+                      <a:round/>
+                      <a:headEnd type="none" w="med" len="med"/>
+                      <a:tailEnd type="none" w="med" len="med"/>
+                    </a:lnL>
+                    <a:lnR w="8890" cap="flat" cmpd="sng" algn="ctr">
+                      <a:solidFill>
+                        <a:srgbClr val="D8E0DA"/>
+                      </a:solidFill>
+                      <a:prstDash val="solid"/>
+                      <a:round/>
+                      <a:headEnd type="none" w="med" len="med"/>
+                      <a:tailEnd type="none" w="med" len="med"/>
+                    </a:lnR>
+                    <a:lnT w="8890" cap="flat" cmpd="sng" algn="ctr">
+                      <a:solidFill>
+                        <a:srgbClr val="D8E0DA"/>
+                      </a:solidFill>
+                      <a:prstDash val="solid"/>
+                      <a:round/>
+                      <a:headEnd type="none" w="med" len="med"/>
+                      <a:tailEnd type="none" w="med" len="med"/>
+                    </a:lnT>
+                    <a:lnB w="8890" cap="flat" cmpd="sng" algn="ctr">
+                      <a:solidFill>
+                        <a:srgbClr val="D8E0DA"/>
+                      </a:solidFill>
+                      <a:prstDash val="solid"/>
+                      <a:round/>
+                      <a:headEnd type="none" w="med" len="med"/>
+                      <a:tailEnd type="none" w="med" len="med"/>
+                    </a:lnB>
+                    <a:solidFill>
+                      <a:srgbClr val="FFFFFF"/>
+                    </a:solidFill>
+                  </a:tcPr>
+                </a:tc>
+              </a:tr>
+              <a:tr h="676656">
+                <a:tc>
+                  <a:txBody>
+                    <a:bodyPr/>
+                    <a:lstStyle/>
+                    <a:p>
+                      <a:pPr indent="0" marL="0">
+                        <a:buNone/>
+                      </a:pPr>
+                      <a:r>
+                        <a:rPr lang="en-US" sz="1800" dirty="0">
+                          <a:solidFill>
+                            <a:srgbClr val="172C30"/>
+                          </a:solidFill>
+                          <a:latin typeface="Noto Sans SC" pitchFamily="34" charset="0"/>
+                          <a:ea typeface="Noto Sans SC" pitchFamily="34" charset="-122"/>
+                          <a:cs typeface="Noto Sans SC" pitchFamily="34" charset="-120"/>
+                        </a:rPr>
+                        <a:t>高用量压力</a:t>
+                      </a:r>
+                      <a:endParaRPr lang="en-US" sz="1800" dirty="0">
+                        <a:latin typeface="Noto Sans SC" charset="0"/>
+                        <a:ea typeface="Noto Sans SC" charset="0"/>
+                        <a:cs typeface="Noto Sans SC" charset="0"/>
+                      </a:endParaRPr>
+                    </a:p>
+                  </a:txBody>
+                  <a:tcPr marL="109728" marR="109728" marT="109728" marB="109728" anchor="ctr">
+                    <a:lnL w="8890" cap="flat" cmpd="sng" algn="ctr">
+                      <a:solidFill>
+                        <a:srgbClr val="D8E0DA"/>
+                      </a:solidFill>
+                      <a:prstDash val="solid"/>
+                      <a:round/>
+                      <a:headEnd type="none" w="med" len="med"/>
+                      <a:tailEnd type="none" w="med" len="med"/>
+                    </a:lnL>
+                    <a:lnR w="8890" cap="flat" cmpd="sng" algn="ctr">
+                      <a:solidFill>
+                        <a:srgbClr val="D8E0DA"/>
+                      </a:solidFill>
+                      <a:prstDash val="solid"/>
+                      <a:round/>
+                      <a:headEnd type="none" w="med" len="med"/>
+                      <a:tailEnd type="none" w="med" len="med"/>
+                    </a:lnR>
+                    <a:lnT w="8890" cap="flat" cmpd="sng" algn="ctr">
+                      <a:solidFill>
+                        <a:srgbClr val="D8E0DA"/>
+                      </a:solidFill>
+                      <a:prstDash val="solid"/>
+                      <a:round/>
+                      <a:headEnd type="none" w="med" len="med"/>
+                      <a:tailEnd type="none" w="med" len="med"/>
+                    </a:lnT>
+                    <a:lnB w="8890" cap="flat" cmpd="sng" algn="ctr">
+                      <a:solidFill>
+                        <a:srgbClr val="D8E0DA"/>
+                      </a:solidFill>
+                      <a:prstDash val="solid"/>
+                      <a:round/>
+                      <a:headEnd type="none" w="med" len="med"/>
+                      <a:tailEnd type="none" w="med" len="med"/>
+                    </a:lnB>
+                    <a:solidFill>
+                      <a:srgbClr val="FFFFFF"/>
+                    </a:solidFill>
+                  </a:tcPr>
+                </a:tc>
+                <a:tc>
+                  <a:txBody>
+                    <a:bodyPr/>
+                    <a:lstStyle/>
+                    <a:p>
+                      <a:pPr indent="0" marL="0">
+                        <a:buNone/>
+                      </a:pPr>
+                      <a:r>
+                        <a:rPr lang="en-US" sz="1800" dirty="0">
+                          <a:solidFill>
+                            <a:srgbClr val="172C30"/>
+                          </a:solidFill>
+                          <a:latin typeface="Noto Sans SC" pitchFamily="34" charset="0"/>
+                          <a:ea typeface="Noto Sans SC" pitchFamily="34" charset="-122"/>
+                          <a:cs typeface="Noto Sans SC" pitchFamily="34" charset="-120"/>
+                        </a:rPr>
+                        <a:t>10,280</a:t>
+                      </a:r>
+                      <a:endParaRPr lang="en-US" sz="1800" dirty="0">
+                        <a:latin typeface="Noto Sans SC" charset="0"/>
+                        <a:ea typeface="Noto Sans SC" charset="0"/>
+                        <a:cs typeface="Noto Sans SC" charset="0"/>
+                      </a:endParaRPr>
+                    </a:p>
+                  </a:txBody>
+                  <a:tcPr marL="109728" marR="109728" marT="109728" marB="109728" anchor="ctr">
+                    <a:lnL w="8890" cap="flat" cmpd="sng" algn="ctr">
+                      <a:solidFill>
+                        <a:srgbClr val="D8E0DA"/>
+                      </a:solidFill>
+                      <a:prstDash val="solid"/>
+                      <a:round/>
+                      <a:headEnd type="none" w="med" len="med"/>
+                      <a:tailEnd type="none" w="med" len="med"/>
+                    </a:lnL>
+                    <a:lnR w="8890" cap="flat" cmpd="sng" algn="ctr">
+                      <a:solidFill>
+                        <a:srgbClr val="D8E0DA"/>
+                      </a:solidFill>
+                      <a:prstDash val="solid"/>
+                      <a:round/>
+                      <a:headEnd type="none" w="med" len="med"/>
+                      <a:tailEnd type="none" w="med" len="med"/>
+                    </a:lnR>
+                    <a:lnT w="8890" cap="flat" cmpd="sng" algn="ctr">
+                      <a:solidFill>
+                        <a:srgbClr val="D8E0DA"/>
+                      </a:solidFill>
+                      <a:prstDash val="solid"/>
+                      <a:round/>
+                      <a:headEnd type="none" w="med" len="med"/>
+                      <a:tailEnd type="none" w="med" len="med"/>
+                    </a:lnT>
+                    <a:lnB w="8890" cap="flat" cmpd="sng" algn="ctr">
+                      <a:solidFill>
+                        <a:srgbClr val="D8E0DA"/>
+                      </a:solidFill>
+                      <a:prstDash val="solid"/>
+                      <a:round/>
+                      <a:headEnd type="none" w="med" len="med"/>
+                      <a:tailEnd type="none" w="med" len="med"/>
+                    </a:lnB>
+                    <a:solidFill>
+                      <a:srgbClr val="FFFFFF"/>
+                    </a:solidFill>
+                  </a:tcPr>
+                </a:tc>
+                <a:tc>
+                  <a:txBody>
+                    <a:bodyPr/>
+                    <a:lstStyle/>
+                    <a:p>
+                      <a:pPr indent="0" marL="0">
+                        <a:buNone/>
+                      </a:pPr>
+                      <a:r>
+                        <a:rPr lang="en-US" sz="1800" dirty="0">
+                          <a:solidFill>
+                            <a:srgbClr val="172C30"/>
+                          </a:solidFill>
+                          <a:latin typeface="Noto Sans SC" pitchFamily="34" charset="0"/>
+                          <a:ea typeface="Noto Sans SC" pitchFamily="34" charset="-122"/>
+                          <a:cs typeface="Noto Sans SC" pitchFamily="34" charset="-120"/>
+                        </a:rPr>
+                        <a:t>795.945</a:t>
+                      </a:r>
+                      <a:endParaRPr lang="en-US" sz="1800" dirty="0">
+                        <a:latin typeface="Noto Sans SC" charset="0"/>
+                        <a:ea typeface="Noto Sans SC" charset="0"/>
+                        <a:cs typeface="Noto Sans SC" charset="0"/>
+                      </a:endParaRPr>
+                    </a:p>
+                  </a:txBody>
+                  <a:tcPr marL="109728" marR="109728" marT="109728" marB="109728" anchor="ctr">
+                    <a:lnL w="8890" cap="flat" cmpd="sng" algn="ctr">
+                      <a:solidFill>
+                        <a:srgbClr val="D8E0DA"/>
+                      </a:solidFill>
+                      <a:prstDash val="solid"/>
+                      <a:round/>
+                      <a:headEnd type="none" w="med" len="med"/>
+                      <a:tailEnd type="none" w="med" len="med"/>
+                    </a:lnL>
+                    <a:lnR w="8890" cap="flat" cmpd="sng" algn="ctr">
+                      <a:solidFill>
+                        <a:srgbClr val="D8E0DA"/>
+                      </a:solidFill>
+                      <a:prstDash val="solid"/>
+                      <a:round/>
+                      <a:headEnd type="none" w="med" len="med"/>
+                      <a:tailEnd type="none" w="med" len="med"/>
+                    </a:lnR>
+                    <a:lnT w="8890" cap="flat" cmpd="sng" algn="ctr">
+                      <a:solidFill>
+                        <a:srgbClr val="D8E0DA"/>
+                      </a:solidFill>
+                      <a:prstDash val="solid"/>
+                      <a:round/>
+                      <a:headEnd type="none" w="med" len="med"/>
+                      <a:tailEnd type="none" w="med" len="med"/>
+                    </a:lnT>
+                    <a:lnB w="8890" cap="flat" cmpd="sng" algn="ctr">
+                      <a:solidFill>
+                        <a:srgbClr val="D8E0DA"/>
+                      </a:solidFill>
+                      <a:prstDash val="solid"/>
+                      <a:round/>
+                      <a:headEnd type="none" w="med" len="med"/>
+                      <a:tailEnd type="none" w="med" len="med"/>
+                    </a:lnB>
+                    <a:solidFill>
+                      <a:srgbClr val="FFFFFF"/>
+                    </a:solidFill>
+                  </a:tcPr>
+                </a:tc>
+                <a:tc>
+                  <a:txBody>
+                    <a:bodyPr/>
+                    <a:lstStyle/>
+                    <a:p>
+                      <a:pPr indent="0" marL="0">
+                        <a:buNone/>
+                      </a:pPr>
+                      <a:r>
+                        <a:rPr lang="en-US" sz="1800" dirty="0">
+                          <a:solidFill>
+                            <a:srgbClr val="172C30"/>
+                          </a:solidFill>
+                          <a:latin typeface="Noto Sans SC" pitchFamily="34" charset="0"/>
+                          <a:ea typeface="Noto Sans SC" pitchFamily="34" charset="-122"/>
+                          <a:cs typeface="Noto Sans SC" pitchFamily="34" charset="-120"/>
+                        </a:rPr>
+                        <a:t>1200.000</a:t>
+                      </a:r>
+                      <a:endParaRPr lang="en-US" sz="1800" dirty="0">
+                        <a:latin typeface="Noto Sans SC" charset="0"/>
+                        <a:ea typeface="Noto Sans SC" charset="0"/>
+                        <a:cs typeface="Noto Sans SC" charset="0"/>
+                      </a:endParaRPr>
+                    </a:p>
+                  </a:txBody>
+                  <a:tcPr marL="109728" marR="109728" marT="109728" marB="109728" anchor="ctr">
+                    <a:lnL w="8890" cap="flat" cmpd="sng" algn="ctr">
+                      <a:solidFill>
+                        <a:srgbClr val="D8E0DA"/>
+                      </a:solidFill>
+                      <a:prstDash val="solid"/>
+                      <a:round/>
+                      <a:headEnd type="none" w="med" len="med"/>
+                      <a:tailEnd type="none" w="med" len="med"/>
+                    </a:lnL>
+                    <a:lnR w="8890" cap="flat" cmpd="sng" algn="ctr">
+                      <a:solidFill>
+                        <a:srgbClr val="D8E0DA"/>
+                      </a:solidFill>
+                      <a:prstDash val="solid"/>
+                      <a:round/>
+                      <a:headEnd type="none" w="med" len="med"/>
+                      <a:tailEnd type="none" w="med" len="med"/>
+                    </a:lnR>
+                    <a:lnT w="8890" cap="flat" cmpd="sng" algn="ctr">
+                      <a:solidFill>
+                        <a:srgbClr val="D8E0DA"/>
+                      </a:solidFill>
+                      <a:prstDash val="solid"/>
+                      <a:round/>
+                      <a:headEnd type="none" w="med" len="med"/>
+                      <a:tailEnd type="none" w="med" len="med"/>
+                    </a:lnT>
+                    <a:lnB w="8890" cap="flat" cmpd="sng" algn="ctr">
+                      <a:solidFill>
+                        <a:srgbClr val="D8E0DA"/>
+                      </a:solidFill>
+                      <a:prstDash val="solid"/>
+                      <a:round/>
+                      <a:headEnd type="none" w="med" len="med"/>
+                      <a:tailEnd type="none" w="med" len="med"/>
+                    </a:lnB>
+                    <a:solidFill>
+                      <a:srgbClr val="FFFFFF"/>
+                    </a:solidFill>
+                  </a:tcPr>
+                </a:tc>
+              </a:tr>
+            </a:tbl>
+          </a:graphicData>
+        </a:graphic>
+      </p:graphicFrame>
+      <p:sp>
+        <p:nvSpPr>
+          <p:cNvPr id="9" name="Text 6"/>
+          <p:cNvSpPr/>
+          <p:nvPr/>
+        </p:nvSpPr>
+        <p:spPr>
+          <a:xfrm>
+            <a:off x="777240" y="5102352"/>
+            <a:ext cx="10607040" cy="320040"/>
+          </a:xfrm>
+          <a:prstGeom prst="rect">
+            <a:avLst/>
+          </a:prstGeom>
+          <a:noFill/>
+          <a:ln/>
+        </p:spPr>
+        <p:txBody>
+          <a:bodyPr wrap="square" lIns="0" tIns="0" rIns="0" bIns="0" rtlCol="0" anchor="ctr">
+            <a:spAutoFit/>
+          </a:bodyPr>
+          <a:lstStyle/>
+          <a:p>
+            <a:pPr indent="0" marL="0">
+              <a:buNone/>
+            </a:pPr>
+            <a:r>
+              <a:rPr lang="en-US" sz="1800" dirty="0">
+                <a:solidFill>
+                  <a:srgbClr val="172C30"/>
+                </a:solidFill>
+                <a:latin typeface="Noto Sans SC" pitchFamily="34" charset="0"/>
+                <a:ea typeface="Noto Sans SC" pitchFamily="34" charset="-122"/>
+                <a:cs typeface="Noto Sans SC" pitchFamily="34" charset="-120"/>
+              </a:rPr>
+              <a:t>精简推进：更小人力与云用户规模，按优先级交付。</a:t>
+            </a:r>
+            <a:endParaRPr lang="en-US" sz="1800" dirty="0"/>
+          </a:p>
+        </p:txBody>
+      </p:sp>
+      <p:sp>
+        <p:nvSpPr>
+          <p:cNvPr id="10" name="Text 7"/>
+          <p:cNvSpPr/>
+          <p:nvPr/>
+        </p:nvSpPr>
+        <p:spPr>
+          <a:xfrm>
+            <a:off x="777240" y="5486400"/>
+            <a:ext cx="10607040" cy="320040"/>
+          </a:xfrm>
+          <a:prstGeom prst="rect">
+            <a:avLst/>
+          </a:prstGeom>
+          <a:noFill/>
+          <a:ln/>
+        </p:spPr>
+        <p:txBody>
+          <a:bodyPr wrap="square" lIns="0" tIns="0" rIns="0" bIns="0" rtlCol="0" anchor="ctr">
+            <a:spAutoFit/>
+          </a:bodyPr>
+          <a:lstStyle/>
+          <a:p>
+            <a:pPr indent="0" marL="0">
+              <a:buNone/>
+            </a:pPr>
+            <a:r>
+              <a:rPr lang="en-US" sz="1800" b="1" dirty="0">
+                <a:solidFill>
+                  <a:srgbClr val="007C73"/>
+                </a:solidFill>
+                <a:latin typeface="Noto Sans SC" pitchFamily="34" charset="0"/>
+                <a:ea typeface="Noto Sans SC" pitchFamily="34" charset="-122"/>
+                <a:cs typeface="Noto Sans SC" pitchFamily="34" charset="-120"/>
+              </a:rPr>
+              <a:t>基准建设：覆盖教育后台、多端与App、社区的持续建设。</a:t>
+            </a:r>
+            <a:endParaRPr lang="en-US" sz="1800" dirty="0"/>
+          </a:p>
+        </p:txBody>
+      </p:sp>
+      <p:sp>
+        <p:nvSpPr>
+          <p:cNvPr id="11" name="Text 8"/>
+          <p:cNvSpPr/>
+          <p:nvPr/>
+        </p:nvSpPr>
+        <p:spPr>
+          <a:xfrm>
+            <a:off x="777240" y="5870448"/>
+            <a:ext cx="10607040" cy="320040"/>
+          </a:xfrm>
+          <a:prstGeom prst="rect">
+            <a:avLst/>
+          </a:prstGeom>
+          <a:noFill/>
+          <a:ln/>
+        </p:spPr>
+        <p:txBody>
+          <a:bodyPr wrap="square" lIns="0" tIns="0" rIns="0" bIns="0" rtlCol="0" anchor="ctr">
+            <a:spAutoFit/>
+          </a:bodyPr>
+          <a:lstStyle/>
+          <a:p>
+            <a:pPr indent="0" marL="0">
+              <a:buNone/>
+            </a:pPr>
+            <a:r>
+              <a:rPr lang="en-US" sz="1800" dirty="0">
+                <a:solidFill>
+                  <a:srgbClr val="172C30"/>
+                </a:solidFill>
+                <a:latin typeface="Noto Sans SC" pitchFamily="34" charset="0"/>
+                <a:ea typeface="Noto Sans SC" pitchFamily="34" charset="-122"/>
+                <a:cs typeface="Noto Sans SC" pitchFamily="34" charset="-120"/>
+              </a:rPr>
+              <a:t>高用量压力：更大云用户规模、更高人均成本与现金储备。</a:t>
+            </a:r>
+            <a:endParaRPr lang="en-US" sz="1800" dirty="0"/>
+          </a:p>
+        </p:txBody>
+      </p:sp>
+    </p:spTree>
+  </p:cSld>
+  <p:clrMapOvr>
+    <a:masterClrMapping/>
+  </p:clrMapOvr>
+</p:sld>
+</file>
+
+<file path=ppt/slides/slide35.xml><?xml version="1.0" encoding="utf-8"?>
+<p:sld xmlns:a="http://schemas.openxmlformats.org/drawingml/2006/main" xmlns:r="http://schemas.openxmlformats.org/officeDocument/2006/relationships" xmlns:p="http://schemas.openxmlformats.org/presentationml/2006/main">
+  <p:cSld name="Slide 35">
+    <p:bg>
+      <p:bgPr>
+        <a:solidFill>
+          <a:srgbClr val="F7F6F0"/>
+        </a:solidFill>
+      </p:bgPr>
+    </p:bg>
+    <p:spTree>
+      <p:nvGrpSpPr>
+        <p:cNvPr id="1" name=""/>
+        <p:cNvGrpSpPr/>
+        <p:nvPr/>
+      </p:nvGrpSpPr>
+      <p:grpSpPr>
+        <a:xfrm>
+          <a:off x="0" y="0"/>
+          <a:ext cx="0" cy="0"/>
+          <a:chOff x="0" y="0"/>
+          <a:chExt cx="0" cy="0"/>
+        </a:xfrm>
+      </p:grpSpPr>
+      <p:sp>
+        <p:nvSpPr>
+          <p:cNvPr id="2" name="Text 0"/>
+          <p:cNvSpPr/>
+          <p:nvPr/>
+        </p:nvSpPr>
+        <p:spPr>
+          <a:xfrm>
+            <a:off x="548640" y="274320"/>
+            <a:ext cx="10972800" cy="256032"/>
+          </a:xfrm>
+          <a:prstGeom prst="rect">
+            <a:avLst/>
+          </a:prstGeom>
+          <a:noFill/>
+          <a:ln/>
+        </p:spPr>
+        <p:txBody>
+          <a:bodyPr wrap="square" lIns="0" tIns="0" rIns="0" bIns="0" rtlCol="0" anchor="ctr">
+            <a:spAutoFit/>
+          </a:bodyPr>
+          <a:lstStyle/>
+          <a:p>
+            <a:pPr indent="0" marL="0">
+              <a:buNone/>
+            </a:pPr>
+            <a:r>
+              <a:rPr lang="en-US" sz="1100" b="1" dirty="0">
+                <a:solidFill>
+                  <a:srgbClr val="007C73"/>
+                </a:solidFill>
+                <a:latin typeface="Noto Sans SC" pitchFamily="34" charset="0"/>
+                <a:ea typeface="Noto Sans SC" pitchFamily="34" charset="-122"/>
+                <a:cs typeface="Noto Sans SC" pitchFamily="34" charset="-120"/>
+              </a:rPr>
+              <a:t>34 / 成果与路线</a:t>
+            </a:r>
+            <a:endParaRPr lang="en-US" sz="1100" dirty="0"/>
+          </a:p>
+        </p:txBody>
+      </p:sp>
+      <p:sp>
+        <p:nvSpPr>
+          <p:cNvPr id="3" name="Text 1"/>
+          <p:cNvSpPr/>
+          <p:nvPr/>
+        </p:nvSpPr>
+        <p:spPr>
+          <a:xfrm>
+            <a:off x="548640" y="749808"/>
+            <a:ext cx="11064240" cy="749808"/>
+          </a:xfrm>
+          <a:prstGeom prst="rect">
+            <a:avLst/>
+          </a:prstGeom>
+          <a:noFill/>
+          <a:ln/>
+        </p:spPr>
+        <p:txBody>
+          <a:bodyPr wrap="square" lIns="0" tIns="0" rIns="0" bIns="0" rtlCol="0" anchor="ctr">
+            <a:spAutoFit/>
+          </a:bodyPr>
+          <a:lstStyle/>
+          <a:p>
+            <a:pPr indent="0" marL="0">
+              <a:buNone/>
+            </a:pPr>
+            <a:r>
+              <a:rPr lang="en-US" sz="3000" b="1" dirty="0">
+                <a:solidFill>
+                  <a:srgbClr val="172C30"/>
+                </a:solidFill>
+                <a:latin typeface="Noto Sans SC" pitchFamily="34" charset="0"/>
+                <a:ea typeface="Noto Sans SC" pitchFamily="34" charset="-122"/>
+                <a:cs typeface="Noto Sans SC" pitchFamily="34" charset="-120"/>
+              </a:rPr>
+              <a:t>推进小学作品、开源社区与组织方案</a:t>
+            </a:r>
+            <a:endParaRPr lang="en-US" sz="3000" dirty="0"/>
+          </a:p>
+        </p:txBody>
+      </p:sp>
+      <p:sp>
+        <p:nvSpPr>
+          <p:cNvPr id="4" name="Text 2"/>
+          <p:cNvSpPr/>
+          <p:nvPr/>
+        </p:nvSpPr>
+        <p:spPr>
+          <a:xfrm>
+            <a:off x="585216" y="1581912"/>
+            <a:ext cx="10972800" cy="438912"/>
+          </a:xfrm>
+          <a:prstGeom prst="rect">
+            <a:avLst/>
+          </a:prstGeom>
+          <a:noFill/>
+          <a:ln/>
+        </p:spPr>
+        <p:txBody>
+          <a:bodyPr wrap="square" lIns="0" tIns="0" rIns="0" bIns="0" rtlCol="0" anchor="ctr">
+            <a:spAutoFit/>
+          </a:bodyPr>
+          <a:lstStyle/>
+          <a:p>
+            <a:pPr indent="0" marL="0">
+              <a:buNone/>
+            </a:pPr>
+            <a:r>
+              <a:rPr lang="en-US" sz="1500" dirty="0">
+                <a:solidFill>
+                  <a:srgbClr val="53696B"/>
+                </a:solidFill>
+                <a:latin typeface="Noto Sans SC" pitchFamily="34" charset="0"/>
+                <a:ea typeface="Noto Sans SC" pitchFamily="34" charset="-122"/>
+                <a:cs typeface="Noto Sans SC" pitchFamily="34" charset="-120"/>
+              </a:rPr>
+              <a:t>已有桌面能力支持教学共创，开源与组织后台按阶段建设。</a:t>
+            </a:r>
+            <a:endParaRPr lang="en-US" sz="1500" dirty="0"/>
+          </a:p>
+        </p:txBody>
+      </p:sp>
+      <p:sp>
+        <p:nvSpPr>
+          <p:cNvPr id="5" name="Shape 3"/>
+          <p:cNvSpPr/>
+          <p:nvPr/>
+        </p:nvSpPr>
+        <p:spPr>
+          <a:xfrm>
+            <a:off x="548640" y="6419088"/>
+            <a:ext cx="11064240" cy="0"/>
+          </a:xfrm>
+          <a:prstGeom prst="line">
+            <a:avLst/>
+          </a:prstGeom>
+          <a:noFill/>
+          <a:ln w="10160">
+            <a:solidFill>
+              <a:srgbClr val="D8E0DA"/>
+            </a:solidFill>
+            <a:prstDash val="solid"/>
+          </a:ln>
+        </p:spPr>
+      </p:sp>
+      <p:sp>
+        <p:nvSpPr>
+          <p:cNvPr id="6" name="Text 4"/>
+          <p:cNvSpPr/>
+          <p:nvPr/>
+        </p:nvSpPr>
+        <p:spPr>
+          <a:xfrm>
+            <a:off x="576072" y="6519672"/>
+            <a:ext cx="9144000" cy="173736"/>
+          </a:xfrm>
+          <a:prstGeom prst="rect">
+            <a:avLst/>
+          </a:prstGeom>
+          <a:noFill/>
+          <a:ln/>
+        </p:spPr>
+        <p:txBody>
+          <a:bodyPr wrap="square" lIns="0" tIns="0" rIns="0" bIns="0" rtlCol="0" anchor="ctr">
+            <a:spAutoFit/>
+          </a:bodyPr>
+          <a:lstStyle/>
+          <a:p>
+            <a:pPr indent="0" marL="0">
+              <a:buNone/>
+            </a:pPr>
+            <a:r>
+              <a:rPr lang="en-US" sz="900" dirty="0">
+                <a:solidFill>
+                  <a:srgbClr val="53696B"/>
+                </a:solidFill>
+                <a:latin typeface="Noto Sans SC" pitchFamily="34" charset="0"/>
+                <a:ea typeface="Noto Sans SC" pitchFamily="34" charset="-122"/>
+                <a:cs typeface="Noto Sans SC" pitchFamily="34" charset="-120"/>
+              </a:rPr>
+              <a:t>Blocky Studio  /  小学 Agent 创作教育</a:t>
+            </a:r>
+            <a:endParaRPr lang="en-US" sz="900" dirty="0"/>
+          </a:p>
+        </p:txBody>
+      </p:sp>
+      <p:sp>
+        <p:nvSpPr>
+          <p:cNvPr id="7" name="Text 5"/>
+          <p:cNvSpPr/>
+          <p:nvPr/>
+        </p:nvSpPr>
+        <p:spPr>
+          <a:xfrm>
+            <a:off x="11009376" y="6492240"/>
+            <a:ext cx="594360" cy="228600"/>
+          </a:xfrm>
+          <a:prstGeom prst="rect">
+            <a:avLst/>
+          </a:prstGeom>
+          <a:noFill/>
+          <a:ln/>
+        </p:spPr>
+        <p:txBody>
+          <a:bodyPr wrap="square" lIns="0" tIns="0" rIns="0" bIns="0" rtlCol="0" anchor="ctr">
+            <a:spAutoFit/>
+          </a:bodyPr>
+          <a:lstStyle/>
+          <a:p>
+            <a:pPr algn="r" indent="0" marL="0">
+              <a:buNone/>
+            </a:pPr>
+            <a:r>
+              <a:rPr lang="en-US" sz="1000" dirty="0">
+                <a:solidFill>
+                  <a:srgbClr val="53696B"/>
+                </a:solidFill>
+                <a:latin typeface="Noto Sans SC" pitchFamily="34" charset="0"/>
+                <a:ea typeface="Noto Sans SC" pitchFamily="34" charset="-122"/>
+                <a:cs typeface="Noto Sans SC" pitchFamily="34" charset="-120"/>
+              </a:rPr>
+              <a:t>35</a:t>
+            </a:r>
+            <a:endParaRPr lang="en-US" sz="1000" dirty="0"/>
+          </a:p>
+        </p:txBody>
+      </p:sp>
+      <p:graphicFrame>
+        <p:nvGraphicFramePr>
+          <p:cNvPr id="36" name="Table 0"/>
           <p:cNvGraphicFramePr>
             <a:graphicFrameLocks noGrp="1"/>
           </p:cNvGraphicFramePr>
@@ -37015,9 +40265,9 @@
 </p:sld>
 </file>
 
-<file path=ppt/slides/slide34.xml><?xml version="1.0" encoding="utf-8"?>
+<file path=ppt/slides/slide36.xml><?xml version="1.0" encoding="utf-8"?>
 <p:sld xmlns:a="http://schemas.openxmlformats.org/drawingml/2006/main" xmlns:r="http://schemas.openxmlformats.org/officeDocument/2006/relationships" xmlns:p="http://schemas.openxmlformats.org/presentationml/2006/main">
-  <p:cSld name="Slide 34">
+  <p:cSld name="Slide 36">
     <p:bg>
       <p:bgPr>
         <a:solidFill>
@@ -37074,7 +40324,7 @@
                 <a:ea typeface="Noto Sans SC" pitchFamily="34" charset="-122"/>
                 <a:cs typeface="Noto Sans SC" pitchFamily="34" charset="-120"/>
               </a:rPr>
-              <a:t>33 / 后续方向与来源</a:t>
+              <a:t>35 / 后续方向与来源</a:t>
             </a:r>
             <a:endParaRPr lang="en-US" sz="1100" dirty="0"/>
           </a:p>
@@ -37261,7 +40511,7 @@
                 <a:ea typeface="Noto Sans SC" pitchFamily="34" charset="-122"/>
                 <a:cs typeface="Noto Sans SC" pitchFamily="34" charset="-120"/>
               </a:rPr>
-              <a:t>34</a:t>
+              <a:t>36</a:t>
             </a:r>
             <a:endParaRPr lang="en-US" sz="1000" dirty="0"/>
           </a:p>
@@ -37391,7 +40641,7 @@
       </p:sp>
       <p:graphicFrame>
         <p:nvGraphicFramePr>
-          <p:cNvPr id="35" name="Table 0"/>
+          <p:cNvPr id="37" name="Table 0"/>
           <p:cNvGraphicFramePr>
             <a:graphicFrameLocks noGrp="1"/>
           </p:cNvGraphicFramePr>
@@ -38258,7 +41508,7 @@
                           <a:ea typeface="Noto Sans SC" pitchFamily="34" charset="-122"/>
                           <a:cs typeface="Noto Sans SC" pitchFamily="34" charset="-120"/>
                         </a:rPr>
-                        <a:t>教育部 / 配套服务预算</a:t>
+                        <a:t>教育部 / 24个月资金模型</a:t>
                       </a:r>
                       <a:endParaRPr lang="en-US" sz="1450" dirty="0">
                         <a:latin typeface="Noto Sans SC" charset="0"/>
@@ -38326,7 +41576,7 @@
                           <a:ea typeface="Noto Sans SC" pitchFamily="34" charset="-122"/>
                           <a:cs typeface="Noto Sans SC" pitchFamily="34" charset="-120"/>
                         </a:rPr>
-                        <a:t>小学AI教育方向；服务经营参考</a:t>
+                        <a:t>小学AI教育方向；建设资金规划</a:t>
                       </a:r>
                       <a:endParaRPr lang="en-US" sz="1450" dirty="0">
                         <a:latin typeface="Noto Sans SC" charset="0"/>
@@ -38458,9 +41708,9 @@
 </p:sld>
 </file>
 
-<file path=ppt/slides/slide35.xml><?xml version="1.0" encoding="utf-8"?>
+<file path=ppt/slides/slide37.xml><?xml version="1.0" encoding="utf-8"?>
 <p:sld xmlns:a="http://schemas.openxmlformats.org/drawingml/2006/main" xmlns:r="http://schemas.openxmlformats.org/officeDocument/2006/relationships" xmlns:p="http://schemas.openxmlformats.org/presentationml/2006/main">
-  <p:cSld name="Slide 35">
+  <p:cSld name="Slide 37">
     <p:bg>
       <p:bgPr>
         <a:solidFill>
@@ -38517,7 +41767,7 @@
                 <a:ea typeface="Noto Sans SC" pitchFamily="34" charset="-122"/>
                 <a:cs typeface="Noto Sans SC" pitchFamily="34" charset="-120"/>
               </a:rPr>
-              <a:t>34 / 合作邀请</a:t>
+              <a:t>36 / 合作邀请</a:t>
             </a:r>
             <a:endParaRPr lang="en-US" sz="1100" dirty="0"/>
           </a:p>
@@ -38704,7 +41954,7 @@
                 <a:ea typeface="Noto Sans SC" pitchFamily="34" charset="-122"/>
                 <a:cs typeface="Noto Sans SC" pitchFamily="34" charset="-120"/>
               </a:rPr>
-              <a:t>35</a:t>
+              <a:t>37</a:t>
             </a:r>
             <a:endParaRPr lang="en-US" sz="1000" dirty="0"/>
           </a:p>
